--- a/examples/preview/subjects/化学.pptx
+++ b/examples/preview/subjects/化学.pptx
@@ -3113,7 +3113,7 @@
             <a:avLst/>
           </a:prstGeom>
           <a:solidFill>
-            <a:srgbClr val="E9F0F2"/>
+            <a:srgbClr val="F1F5F9"/>
           </a:solidFill>
           <a:ln>
             <a:noFill/>
@@ -3150,14 +3150,146 @@
         </p:nvSpPr>
         <p:spPr>
           <a:xfrm>
-            <a:off x="10607040" y="914400"/>
-            <a:ext cx="155448" cy="155448"/>
+            <a:off x="9281160" y="164592"/>
+            <a:ext cx="2651760" cy="2651760"/>
           </a:xfrm>
           <a:prstGeom prst="ellipse">
             <a:avLst/>
           </a:prstGeom>
+          <a:noFill/>
+          <a:ln w="13970">
+            <a:solidFill>
+              <a:srgbClr val="E8EDF2"/>
+            </a:solidFill>
+          </a:ln>
+          <a:effectLst/>
+        </p:spPr>
+        <p:style>
+          <a:lnRef idx="1">
+            <a:schemeClr val="accent1"/>
+          </a:lnRef>
+          <a:fillRef idx="3">
+            <a:schemeClr val="accent1"/>
+          </a:fillRef>
+          <a:effectRef idx="2">
+            <a:schemeClr val="accent1"/>
+          </a:effectRef>
+          <a:fontRef idx="minor">
+            <a:schemeClr val="lt1"/>
+          </a:fontRef>
+        </p:style>
+        <p:txBody>
+          <a:bodyPr rtlCol="0" anchor="ctr"/>
+          <a:lstStyle/>
+          <a:p>
+            <a:pPr algn="ctr"/>
+          </a:p>
+        </p:txBody>
+      </p:sp>
+      <p:sp>
+        <p:nvSpPr>
+          <p:cNvPr id="4" name="Oval 3"/>
+          <p:cNvSpPr/>
+          <p:nvPr/>
+        </p:nvSpPr>
+        <p:spPr>
+          <a:xfrm>
+            <a:off x="9646920" y="502920"/>
+            <a:ext cx="1920240" cy="1920240"/>
+          </a:xfrm>
+          <a:prstGeom prst="ellipse">
+            <a:avLst/>
+          </a:prstGeom>
+          <a:noFill/>
+          <a:ln w="13970">
+            <a:solidFill>
+              <a:srgbClr val="E8EDF2"/>
+            </a:solidFill>
+          </a:ln>
+          <a:effectLst/>
+        </p:spPr>
+        <p:style>
+          <a:lnRef idx="1">
+            <a:schemeClr val="accent1"/>
+          </a:lnRef>
+          <a:fillRef idx="3">
+            <a:schemeClr val="accent1"/>
+          </a:fillRef>
+          <a:effectRef idx="2">
+            <a:schemeClr val="accent1"/>
+          </a:effectRef>
+          <a:fontRef idx="minor">
+            <a:schemeClr val="lt1"/>
+          </a:fontRef>
+        </p:style>
+        <p:txBody>
+          <a:bodyPr rtlCol="0" anchor="ctr"/>
+          <a:lstStyle/>
+          <a:p>
+            <a:pPr algn="ctr"/>
+          </a:p>
+        </p:txBody>
+      </p:sp>
+      <p:sp>
+        <p:nvSpPr>
+          <p:cNvPr id="5" name="Oval 4"/>
+          <p:cNvSpPr/>
+          <p:nvPr/>
+        </p:nvSpPr>
+        <p:spPr>
+          <a:xfrm>
+            <a:off x="10012680" y="868680"/>
+            <a:ext cx="1188720" cy="1188720"/>
+          </a:xfrm>
+          <a:prstGeom prst="ellipse">
+            <a:avLst/>
+          </a:prstGeom>
+          <a:noFill/>
+          <a:ln w="13970">
+            <a:solidFill>
+              <a:srgbClr val="E8EDF2"/>
+            </a:solidFill>
+          </a:ln>
+          <a:effectLst/>
+        </p:spPr>
+        <p:style>
+          <a:lnRef idx="1">
+            <a:schemeClr val="accent1"/>
+          </a:lnRef>
+          <a:fillRef idx="3">
+            <a:schemeClr val="accent1"/>
+          </a:fillRef>
+          <a:effectRef idx="2">
+            <a:schemeClr val="accent1"/>
+          </a:effectRef>
+          <a:fontRef idx="minor">
+            <a:schemeClr val="lt1"/>
+          </a:fontRef>
+        </p:style>
+        <p:txBody>
+          <a:bodyPr rtlCol="0" anchor="ctr"/>
+          <a:lstStyle/>
+          <a:p>
+            <a:pPr algn="ctr"/>
+          </a:p>
+        </p:txBody>
+      </p:sp>
+      <p:sp>
+        <p:nvSpPr>
+          <p:cNvPr id="6" name="Rectangle 5"/>
+          <p:cNvSpPr/>
+          <p:nvPr/>
+        </p:nvSpPr>
+        <p:spPr>
+          <a:xfrm>
+            <a:off x="0" y="0"/>
+            <a:ext cx="12191695" cy="109728"/>
+          </a:xfrm>
+          <a:prstGeom prst="rect">
+            <a:avLst/>
+          </a:prstGeom>
           <a:solidFill>
-            <a:srgbClr val="CBE7DF"/>
+            <a:srgbClr val="1F4E79"/>
           </a:solidFill>
           <a:ln>
             <a:noFill/>
@@ -3188,20 +3320,22 @@
       </p:sp>
       <p:sp>
         <p:nvSpPr>
-          <p:cNvPr id="4" name="Oval 3"/>
+          <p:cNvPr id="7" name="Rounded Rectangle 6"/>
           <p:cNvSpPr/>
           <p:nvPr/>
         </p:nvSpPr>
         <p:spPr>
           <a:xfrm>
-            <a:off x="11155680" y="1417320"/>
-            <a:ext cx="100584" cy="100584"/>
-          </a:xfrm>
-          <a:prstGeom prst="ellipse">
-            <a:avLst/>
+            <a:off x="7680767" y="1463040"/>
+            <a:ext cx="3794760" cy="3566160"/>
+          </a:xfrm>
+          <a:prstGeom prst="roundRect">
+            <a:avLst>
+              <a:gd name="adj" fmla="val 5000"/>
+            </a:avLst>
           </a:prstGeom>
           <a:solidFill>
-            <a:srgbClr val="CBE7DF"/>
+            <a:srgbClr val="DCE6EE"/>
           </a:solidFill>
           <a:ln>
             <a:noFill/>
@@ -3232,20 +3366,22 @@
       </p:sp>
       <p:sp>
         <p:nvSpPr>
-          <p:cNvPr id="5" name="Oval 4"/>
+          <p:cNvPr id="8" name="Rounded Rectangle 7"/>
           <p:cNvSpPr/>
           <p:nvPr/>
         </p:nvSpPr>
         <p:spPr>
           <a:xfrm>
-            <a:off x="10744200" y="1965960"/>
-            <a:ext cx="155448" cy="155448"/>
-          </a:xfrm>
-          <a:prstGeom prst="ellipse">
-            <a:avLst/>
+            <a:off x="7680767" y="4526280"/>
+            <a:ext cx="3794760" cy="502920"/>
+          </a:xfrm>
+          <a:prstGeom prst="roundRect">
+            <a:avLst>
+              <a:gd name="adj" fmla="val 8000"/>
+            </a:avLst>
           </a:prstGeom>
           <a:solidFill>
-            <a:srgbClr val="CBE7DF"/>
+            <a:srgbClr val="C7D4E0"/>
           </a:solidFill>
           <a:ln>
             <a:noFill/>
@@ -3276,23 +3412,25 @@
       </p:sp>
       <p:sp>
         <p:nvSpPr>
-          <p:cNvPr id="6" name="Oval 5"/>
+          <p:cNvPr id="9" name="Rounded Rectangle 8"/>
           <p:cNvSpPr/>
           <p:nvPr/>
         </p:nvSpPr>
         <p:spPr>
           <a:xfrm>
-            <a:off x="11292840" y="2331720"/>
-            <a:ext cx="100584" cy="100584"/>
-          </a:xfrm>
-          <a:prstGeom prst="ellipse">
+            <a:off x="8549447" y="2286000"/>
+            <a:ext cx="475488" cy="2011680"/>
+          </a:xfrm>
+          <a:prstGeom prst="roundRect">
             <a:avLst/>
           </a:prstGeom>
           <a:solidFill>
-            <a:srgbClr val="CBE7DF"/>
+            <a:srgbClr val="7FB3D9"/>
           </a:solidFill>
-          <a:ln>
-            <a:noFill/>
+          <a:ln w="12700">
+            <a:solidFill>
+              <a:srgbClr val="9FB2C4"/>
+            </a:solidFill>
           </a:ln>
           <a:effectLst/>
         </p:spPr>
@@ -3320,23 +3458,25 @@
       </p:sp>
       <p:sp>
         <p:nvSpPr>
-          <p:cNvPr id="7" name="Oval 6"/>
+          <p:cNvPr id="10" name="Rounded Rectangle 9"/>
           <p:cNvSpPr/>
           <p:nvPr/>
         </p:nvSpPr>
         <p:spPr>
           <a:xfrm>
-            <a:off x="10378440" y="1691640"/>
-            <a:ext cx="155448" cy="155448"/>
-          </a:xfrm>
-          <a:prstGeom prst="ellipse">
+            <a:off x="9509567" y="2286000"/>
+            <a:ext cx="475488" cy="2011680"/>
+          </a:xfrm>
+          <a:prstGeom prst="roundRect">
             <a:avLst/>
           </a:prstGeom>
           <a:solidFill>
-            <a:srgbClr val="CBE7DF"/>
+            <a:srgbClr val="E8A87C"/>
           </a:solidFill>
-          <a:ln>
-            <a:noFill/>
+          <a:ln w="12700">
+            <a:solidFill>
+              <a:srgbClr val="9FB2C4"/>
+            </a:solidFill>
           </a:ln>
           <a:effectLst/>
         </p:spPr>
@@ -3362,165 +3502,27 @@
           </a:p>
         </p:txBody>
       </p:sp>
-      <p:cxnSp>
-        <p:nvCxnSpPr>
-          <p:cNvPr id="8" name="Connector 7"/>
-          <p:cNvCxnSpPr/>
-          <p:nvPr/>
-        </p:nvCxnSpPr>
-        <p:spPr>
-          <a:xfrm>
-            <a:off x="10689336" y="996696"/>
-            <a:ext cx="548640" cy="502920"/>
-          </a:xfrm>
-          <a:prstGeom prst="line">
-            <a:avLst/>
-          </a:prstGeom>
+      <p:sp>
+        <p:nvSpPr>
+          <p:cNvPr id="11" name="Rounded Rectangle 10"/>
+          <p:cNvSpPr/>
+          <p:nvPr/>
+        </p:nvSpPr>
+        <p:spPr>
+          <a:xfrm>
+            <a:off x="10469687" y="2286000"/>
+            <a:ext cx="475488" cy="2011680"/>
+          </a:xfrm>
+          <a:prstGeom prst="roundRect">
+            <a:avLst/>
+          </a:prstGeom>
+          <a:solidFill>
+            <a:srgbClr val="82C9A6"/>
+          </a:solidFill>
           <a:ln w="12700">
             <a:solidFill>
-              <a:srgbClr val="D7EAE4"/>
+              <a:srgbClr val="9FB2C4"/>
             </a:solidFill>
-          </a:ln>
-        </p:spPr>
-        <p:style>
-          <a:lnRef idx="2">
-            <a:schemeClr val="accent1"/>
-          </a:lnRef>
-          <a:fillRef idx="0">
-            <a:schemeClr val="accent1"/>
-          </a:fillRef>
-          <a:effectRef idx="1">
-            <a:schemeClr val="accent1"/>
-          </a:effectRef>
-          <a:fontRef idx="minor">
-            <a:schemeClr val="tx1"/>
-          </a:fontRef>
-        </p:style>
-      </p:cxnSp>
-      <p:cxnSp>
-        <p:nvCxnSpPr>
-          <p:cNvPr id="9" name="Connector 8"/>
-          <p:cNvCxnSpPr/>
-          <p:nvPr/>
-        </p:nvCxnSpPr>
-        <p:spPr>
-          <a:xfrm flipH="1">
-            <a:off x="10826496" y="1499616"/>
-            <a:ext cx="411480" cy="548639"/>
-          </a:xfrm>
-          <a:prstGeom prst="line">
-            <a:avLst/>
-          </a:prstGeom>
-          <a:ln w="12700">
-            <a:solidFill>
-              <a:srgbClr val="D7EAE4"/>
-            </a:solidFill>
-          </a:ln>
-        </p:spPr>
-        <p:style>
-          <a:lnRef idx="2">
-            <a:schemeClr val="accent1"/>
-          </a:lnRef>
-          <a:fillRef idx="0">
-            <a:schemeClr val="accent1"/>
-          </a:fillRef>
-          <a:effectRef idx="1">
-            <a:schemeClr val="accent1"/>
-          </a:effectRef>
-          <a:fontRef idx="minor">
-            <a:schemeClr val="tx1"/>
-          </a:fontRef>
-        </p:style>
-      </p:cxnSp>
-      <p:cxnSp>
-        <p:nvCxnSpPr>
-          <p:cNvPr id="10" name="Connector 9"/>
-          <p:cNvCxnSpPr/>
-          <p:nvPr/>
-        </p:nvCxnSpPr>
-        <p:spPr>
-          <a:xfrm>
-            <a:off x="10826496" y="2048255"/>
-            <a:ext cx="548640" cy="365760"/>
-          </a:xfrm>
-          <a:prstGeom prst="line">
-            <a:avLst/>
-          </a:prstGeom>
-          <a:ln w="12700">
-            <a:solidFill>
-              <a:srgbClr val="D7EAE4"/>
-            </a:solidFill>
-          </a:ln>
-        </p:spPr>
-        <p:style>
-          <a:lnRef idx="2">
-            <a:schemeClr val="accent1"/>
-          </a:lnRef>
-          <a:fillRef idx="0">
-            <a:schemeClr val="accent1"/>
-          </a:fillRef>
-          <a:effectRef idx="1">
-            <a:schemeClr val="accent1"/>
-          </a:effectRef>
-          <a:fontRef idx="minor">
-            <a:schemeClr val="tx1"/>
-          </a:fontRef>
-        </p:style>
-      </p:cxnSp>
-      <p:cxnSp>
-        <p:nvCxnSpPr>
-          <p:cNvPr id="11" name="Connector 10"/>
-          <p:cNvCxnSpPr/>
-          <p:nvPr/>
-        </p:nvCxnSpPr>
-        <p:spPr>
-          <a:xfrm flipH="1" flipV="1">
-            <a:off x="10460736" y="1773936"/>
-            <a:ext cx="914400" cy="640079"/>
-          </a:xfrm>
-          <a:prstGeom prst="line">
-            <a:avLst/>
-          </a:prstGeom>
-          <a:ln w="12700">
-            <a:solidFill>
-              <a:srgbClr val="D7EAE4"/>
-            </a:solidFill>
-          </a:ln>
-        </p:spPr>
-        <p:style>
-          <a:lnRef idx="2">
-            <a:schemeClr val="accent1"/>
-          </a:lnRef>
-          <a:fillRef idx="0">
-            <a:schemeClr val="accent1"/>
-          </a:fillRef>
-          <a:effectRef idx="1">
-            <a:schemeClr val="accent1"/>
-          </a:effectRef>
-          <a:fontRef idx="minor">
-            <a:schemeClr val="tx1"/>
-          </a:fontRef>
-        </p:style>
-      </p:cxnSp>
-      <p:sp>
-        <p:nvSpPr>
-          <p:cNvPr id="12" name="Rectangle 11"/>
-          <p:cNvSpPr/>
-          <p:nvPr/>
-        </p:nvSpPr>
-        <p:spPr>
-          <a:xfrm>
-            <a:off x="0" y="0"/>
-            <a:ext cx="164592" cy="6858000"/>
-          </a:xfrm>
-          <a:prstGeom prst="rect">
-            <a:avLst/>
-          </a:prstGeom>
-          <a:solidFill>
-            <a:srgbClr val="0E4F45"/>
-          </a:solidFill>
-          <a:ln>
-            <a:noFill/>
           </a:ln>
           <a:effectLst/>
         </p:spPr>
@@ -3548,58 +3550,14 @@
       </p:sp>
       <p:sp>
         <p:nvSpPr>
-          <p:cNvPr id="13" name="Rectangle 12"/>
-          <p:cNvSpPr/>
-          <p:nvPr/>
-        </p:nvSpPr>
-        <p:spPr>
-          <a:xfrm>
-            <a:off x="0" y="6711696"/>
-            <a:ext cx="12191695" cy="146304"/>
-          </a:xfrm>
-          <a:prstGeom prst="rect">
-            <a:avLst/>
-          </a:prstGeom>
-          <a:solidFill>
-            <a:srgbClr val="E8710A"/>
-          </a:solidFill>
-          <a:ln>
-            <a:noFill/>
-          </a:ln>
-          <a:effectLst/>
-        </p:spPr>
-        <p:style>
-          <a:lnRef idx="1">
-            <a:schemeClr val="accent1"/>
-          </a:lnRef>
-          <a:fillRef idx="3">
-            <a:schemeClr val="accent1"/>
-          </a:fillRef>
-          <a:effectRef idx="2">
-            <a:schemeClr val="accent1"/>
-          </a:effectRef>
-          <a:fontRef idx="minor">
-            <a:schemeClr val="lt1"/>
-          </a:fontRef>
-        </p:style>
-        <p:txBody>
-          <a:bodyPr rtlCol="0" anchor="ctr"/>
-          <a:lstStyle/>
-          <a:p>
-            <a:pPr algn="ctr"/>
-          </a:p>
-        </p:txBody>
-      </p:sp>
-      <p:sp>
-        <p:nvSpPr>
-          <p:cNvPr id="14" name="TextBox 13"/>
+          <p:cNvPr id="12" name="TextBox 11"/>
           <p:cNvSpPr txBox="1"/>
           <p:nvPr/>
         </p:nvSpPr>
         <p:spPr>
           <a:xfrm>
-            <a:off x="822960" y="1600200"/>
-            <a:ext cx="7558850" cy="2194560"/>
+            <a:off x="822960" y="1645920"/>
+            <a:ext cx="6827349" cy="2194560"/>
           </a:xfrm>
           <a:prstGeom prst="rect">
             <a:avLst/>
@@ -3621,10 +3579,10 @@
             <a:r>
               <a:rPr sz="2900" b="1" u="none">
                 <a:solidFill>
-                  <a:srgbClr val="0E4F45"/>
+                  <a:srgbClr val="1F4E79"/>
                 </a:solidFill>
                 <a:latin typeface="Times New Roman"/>
-                <a:ea typeface="Noto Sans CJK SC"/>
+                <a:ea typeface="Noto Serif CJK SC"/>
               </a:rPr>
               <a:t>14. 反应热 热化学方程式</a:t>
             </a:r>
@@ -3633,20 +3591,20 @@
       </p:sp>
       <p:sp>
         <p:nvSpPr>
-          <p:cNvPr id="15" name="Rectangle 14"/>
+          <p:cNvPr id="13" name="Rectangle 12"/>
           <p:cNvSpPr/>
           <p:nvPr/>
         </p:nvSpPr>
         <p:spPr>
           <a:xfrm>
-            <a:off x="850392" y="3566160"/>
+            <a:off x="850392" y="3611880"/>
             <a:ext cx="1097280" cy="82296"/>
           </a:xfrm>
           <a:prstGeom prst="rect">
             <a:avLst/>
           </a:prstGeom>
           <a:solidFill>
-            <a:srgbClr val="E8710A"/>
+            <a:srgbClr val="2E75B6"/>
           </a:solidFill>
           <a:ln>
             <a:noFill/>
@@ -3677,14 +3635,14 @@
       </p:sp>
       <p:sp>
         <p:nvSpPr>
-          <p:cNvPr id="16" name="TextBox 15"/>
+          <p:cNvPr id="14" name="TextBox 13"/>
           <p:cNvSpPr txBox="1"/>
           <p:nvPr/>
         </p:nvSpPr>
         <p:spPr>
           <a:xfrm>
-            <a:off x="850392" y="3840480"/>
-            <a:ext cx="7315017" cy="731520"/>
+            <a:off x="850392" y="3886200"/>
+            <a:ext cx="6705432" cy="731520"/>
           </a:xfrm>
           <a:prstGeom prst="rect">
             <a:avLst/>
@@ -3706,10 +3664,10 @@
             <a:r>
               <a:rPr sz="1900" b="0" u="none">
                 <a:solidFill>
-                  <a:srgbClr val="2F4F49"/>
+                  <a:srgbClr val="2F4F5C"/>
                 </a:solidFill>
                 <a:latin typeface="Times New Roman"/>
-                <a:ea typeface="Noto Sans CJK SC"/>
+                <a:ea typeface="Noto Serif CJK SC"/>
               </a:rPr>
               <a:t>高三化学</a:t>
             </a:r>
@@ -3718,14 +3676,14 @@
       </p:sp>
       <p:sp>
         <p:nvSpPr>
-          <p:cNvPr id="17" name="TextBox 16"/>
+          <p:cNvPr id="15" name="TextBox 14"/>
           <p:cNvSpPr txBox="1"/>
           <p:nvPr/>
         </p:nvSpPr>
         <p:spPr>
           <a:xfrm>
-            <a:off x="850392" y="4709160"/>
-            <a:ext cx="7315017" cy="457200"/>
+            <a:off x="850392" y="4754880"/>
+            <a:ext cx="6705432" cy="457200"/>
           </a:xfrm>
           <a:prstGeom prst="rect">
             <a:avLst/>
@@ -3747,10 +3705,10 @@
             <a:r>
               <a:rPr sz="1200" b="0" u="none">
                 <a:solidFill>
-                  <a:srgbClr val="5E807A"/>
+                  <a:srgbClr val="5E808C"/>
                 </a:solidFill>
                 <a:latin typeface="Times New Roman"/>
-                <a:ea typeface="Noto Sans CJK SC"/>
+                <a:ea typeface="Noto Serif CJK SC"/>
               </a:rPr>
               <a:t>胶州四中</a:t>
             </a:r>
@@ -3759,13 +3717,13 @@
       </p:sp>
       <p:sp>
         <p:nvSpPr>
-          <p:cNvPr id="18" name="Rounded Rectangle 17"/>
+          <p:cNvPr id="16" name="Rounded Rectangle 15"/>
           <p:cNvSpPr/>
           <p:nvPr/>
         </p:nvSpPr>
         <p:spPr>
           <a:xfrm>
-            <a:off x="10637215" y="5715000"/>
+            <a:off x="850392" y="5715000"/>
             <a:ext cx="822960" cy="402336"/>
           </a:xfrm>
           <a:prstGeom prst="roundRect">
@@ -3774,7 +3732,7 @@
             </a:avLst>
           </a:prstGeom>
           <a:solidFill>
-            <a:srgbClr val="0E4F45"/>
+            <a:srgbClr val="1F4E79"/>
           </a:solidFill>
           <a:ln>
             <a:noFill/>
@@ -3805,13 +3763,13 @@
       </p:sp>
       <p:sp>
         <p:nvSpPr>
-          <p:cNvPr id="19" name="TextBox 18"/>
+          <p:cNvPr id="17" name="TextBox 16"/>
           <p:cNvSpPr txBox="1"/>
           <p:nvPr/>
         </p:nvSpPr>
         <p:spPr>
           <a:xfrm>
-            <a:off x="10637215" y="5733288"/>
+            <a:off x="850392" y="5733288"/>
             <a:ext cx="822960" cy="365760"/>
           </a:xfrm>
           <a:prstGeom prst="rect">
@@ -3837,7 +3795,7 @@
                   <a:srgbClr val="FFFFFF"/>
                 </a:solidFill>
                 <a:latin typeface="Times New Roman"/>
-                <a:ea typeface="Noto Sans CJK SC"/>
+                <a:ea typeface="Noto Serif CJK SC"/>
               </a:rPr>
               <a:t>学案</a:t>
             </a:r>
@@ -3870,14 +3828,148 @@
         </p:nvSpPr>
         <p:spPr>
           <a:xfrm>
-            <a:off x="10607040" y="914400"/>
-            <a:ext cx="155448" cy="155448"/>
+            <a:off x="9281160" y="164592"/>
+            <a:ext cx="2651760" cy="2651760"/>
           </a:xfrm>
           <a:prstGeom prst="ellipse">
             <a:avLst/>
           </a:prstGeom>
+          <a:noFill/>
+          <a:ln w="13970">
+            <a:solidFill>
+              <a:srgbClr val="E8EDF2"/>
+            </a:solidFill>
+          </a:ln>
+          <a:effectLst/>
+        </p:spPr>
+        <p:style>
+          <a:lnRef idx="1">
+            <a:schemeClr val="accent1"/>
+          </a:lnRef>
+          <a:fillRef idx="3">
+            <a:schemeClr val="accent1"/>
+          </a:fillRef>
+          <a:effectRef idx="2">
+            <a:schemeClr val="accent1"/>
+          </a:effectRef>
+          <a:fontRef idx="minor">
+            <a:schemeClr val="lt1"/>
+          </a:fontRef>
+        </p:style>
+        <p:txBody>
+          <a:bodyPr rtlCol="0" anchor="ctr"/>
+          <a:lstStyle/>
+          <a:p>
+            <a:pPr algn="ctr"/>
+          </a:p>
+        </p:txBody>
+      </p:sp>
+      <p:sp>
+        <p:nvSpPr>
+          <p:cNvPr id="3" name="Oval 2"/>
+          <p:cNvSpPr/>
+          <p:nvPr/>
+        </p:nvSpPr>
+        <p:spPr>
+          <a:xfrm>
+            <a:off x="9646920" y="502920"/>
+            <a:ext cx="1920240" cy="1920240"/>
+          </a:xfrm>
+          <a:prstGeom prst="ellipse">
+            <a:avLst/>
+          </a:prstGeom>
+          <a:noFill/>
+          <a:ln w="13970">
+            <a:solidFill>
+              <a:srgbClr val="E8EDF2"/>
+            </a:solidFill>
+          </a:ln>
+          <a:effectLst/>
+        </p:spPr>
+        <p:style>
+          <a:lnRef idx="1">
+            <a:schemeClr val="accent1"/>
+          </a:lnRef>
+          <a:fillRef idx="3">
+            <a:schemeClr val="accent1"/>
+          </a:fillRef>
+          <a:effectRef idx="2">
+            <a:schemeClr val="accent1"/>
+          </a:effectRef>
+          <a:fontRef idx="minor">
+            <a:schemeClr val="lt1"/>
+          </a:fontRef>
+        </p:style>
+        <p:txBody>
+          <a:bodyPr rtlCol="0" anchor="ctr"/>
+          <a:lstStyle/>
+          <a:p>
+            <a:pPr algn="ctr"/>
+          </a:p>
+        </p:txBody>
+      </p:sp>
+      <p:sp>
+        <p:nvSpPr>
+          <p:cNvPr id="4" name="Oval 3"/>
+          <p:cNvSpPr/>
+          <p:nvPr/>
+        </p:nvSpPr>
+        <p:spPr>
+          <a:xfrm>
+            <a:off x="10012680" y="868680"/>
+            <a:ext cx="1188720" cy="1188720"/>
+          </a:xfrm>
+          <a:prstGeom prst="ellipse">
+            <a:avLst/>
+          </a:prstGeom>
+          <a:noFill/>
+          <a:ln w="13970">
+            <a:solidFill>
+              <a:srgbClr val="E8EDF2"/>
+            </a:solidFill>
+          </a:ln>
+          <a:effectLst/>
+        </p:spPr>
+        <p:style>
+          <a:lnRef idx="1">
+            <a:schemeClr val="accent1"/>
+          </a:lnRef>
+          <a:fillRef idx="3">
+            <a:schemeClr val="accent1"/>
+          </a:fillRef>
+          <a:effectRef idx="2">
+            <a:schemeClr val="accent1"/>
+          </a:effectRef>
+          <a:fontRef idx="minor">
+            <a:schemeClr val="lt1"/>
+          </a:fontRef>
+        </p:style>
+        <p:txBody>
+          <a:bodyPr rtlCol="0" anchor="ctr"/>
+          <a:lstStyle/>
+          <a:p>
+            <a:pPr algn="ctr"/>
+          </a:p>
+        </p:txBody>
+      </p:sp>
+      <p:sp>
+        <p:nvSpPr>
+          <p:cNvPr id="5" name="Rounded Rectangle 4"/>
+          <p:cNvSpPr/>
+          <p:nvPr/>
+        </p:nvSpPr>
+        <p:spPr>
+          <a:xfrm>
+            <a:off x="548640" y="347472"/>
+            <a:ext cx="1865376" cy="585216"/>
+          </a:xfrm>
+          <a:prstGeom prst="roundRect">
+            <a:avLst>
+              <a:gd name="adj" fmla="val 32000"/>
+            </a:avLst>
+          </a:prstGeom>
           <a:solidFill>
-            <a:srgbClr val="CBE7DF"/>
+            <a:srgbClr val="2E75B6"/>
           </a:solidFill>
           <a:ln>
             <a:noFill/>
@@ -3908,505 +4000,14 @@
       </p:sp>
       <p:sp>
         <p:nvSpPr>
-          <p:cNvPr id="3" name="Oval 2"/>
-          <p:cNvSpPr/>
-          <p:nvPr/>
-        </p:nvSpPr>
-        <p:spPr>
-          <a:xfrm>
-            <a:off x="11155680" y="1417320"/>
-            <a:ext cx="100584" cy="100584"/>
-          </a:xfrm>
-          <a:prstGeom prst="ellipse">
-            <a:avLst/>
-          </a:prstGeom>
-          <a:solidFill>
-            <a:srgbClr val="CBE7DF"/>
-          </a:solidFill>
-          <a:ln>
-            <a:noFill/>
-          </a:ln>
-          <a:effectLst/>
-        </p:spPr>
-        <p:style>
-          <a:lnRef idx="1">
-            <a:schemeClr val="accent1"/>
-          </a:lnRef>
-          <a:fillRef idx="3">
-            <a:schemeClr val="accent1"/>
-          </a:fillRef>
-          <a:effectRef idx="2">
-            <a:schemeClr val="accent1"/>
-          </a:effectRef>
-          <a:fontRef idx="minor">
-            <a:schemeClr val="lt1"/>
-          </a:fontRef>
-        </p:style>
-        <p:txBody>
-          <a:bodyPr rtlCol="0" anchor="ctr"/>
-          <a:lstStyle/>
-          <a:p>
-            <a:pPr algn="ctr"/>
-          </a:p>
-        </p:txBody>
-      </p:sp>
-      <p:sp>
-        <p:nvSpPr>
-          <p:cNvPr id="4" name="Oval 3"/>
-          <p:cNvSpPr/>
-          <p:nvPr/>
-        </p:nvSpPr>
-        <p:spPr>
-          <a:xfrm>
-            <a:off x="10744200" y="1965960"/>
-            <a:ext cx="155448" cy="155448"/>
-          </a:xfrm>
-          <a:prstGeom prst="ellipse">
-            <a:avLst/>
-          </a:prstGeom>
-          <a:solidFill>
-            <a:srgbClr val="CBE7DF"/>
-          </a:solidFill>
-          <a:ln>
-            <a:noFill/>
-          </a:ln>
-          <a:effectLst/>
-        </p:spPr>
-        <p:style>
-          <a:lnRef idx="1">
-            <a:schemeClr val="accent1"/>
-          </a:lnRef>
-          <a:fillRef idx="3">
-            <a:schemeClr val="accent1"/>
-          </a:fillRef>
-          <a:effectRef idx="2">
-            <a:schemeClr val="accent1"/>
-          </a:effectRef>
-          <a:fontRef idx="minor">
-            <a:schemeClr val="lt1"/>
-          </a:fontRef>
-        </p:style>
-        <p:txBody>
-          <a:bodyPr rtlCol="0" anchor="ctr"/>
-          <a:lstStyle/>
-          <a:p>
-            <a:pPr algn="ctr"/>
-          </a:p>
-        </p:txBody>
-      </p:sp>
-      <p:sp>
-        <p:nvSpPr>
-          <p:cNvPr id="5" name="Oval 4"/>
-          <p:cNvSpPr/>
-          <p:nvPr/>
-        </p:nvSpPr>
-        <p:spPr>
-          <a:xfrm>
-            <a:off x="11292840" y="2331720"/>
-            <a:ext cx="100584" cy="100584"/>
-          </a:xfrm>
-          <a:prstGeom prst="ellipse">
-            <a:avLst/>
-          </a:prstGeom>
-          <a:solidFill>
-            <a:srgbClr val="CBE7DF"/>
-          </a:solidFill>
-          <a:ln>
-            <a:noFill/>
-          </a:ln>
-          <a:effectLst/>
-        </p:spPr>
-        <p:style>
-          <a:lnRef idx="1">
-            <a:schemeClr val="accent1"/>
-          </a:lnRef>
-          <a:fillRef idx="3">
-            <a:schemeClr val="accent1"/>
-          </a:fillRef>
-          <a:effectRef idx="2">
-            <a:schemeClr val="accent1"/>
-          </a:effectRef>
-          <a:fontRef idx="minor">
-            <a:schemeClr val="lt1"/>
-          </a:fontRef>
-        </p:style>
-        <p:txBody>
-          <a:bodyPr rtlCol="0" anchor="ctr"/>
-          <a:lstStyle/>
-          <a:p>
-            <a:pPr algn="ctr"/>
-          </a:p>
-        </p:txBody>
-      </p:sp>
-      <p:sp>
-        <p:nvSpPr>
-          <p:cNvPr id="6" name="Oval 5"/>
-          <p:cNvSpPr/>
-          <p:nvPr/>
-        </p:nvSpPr>
-        <p:spPr>
-          <a:xfrm>
-            <a:off x="10378440" y="1691640"/>
-            <a:ext cx="155448" cy="155448"/>
-          </a:xfrm>
-          <a:prstGeom prst="ellipse">
-            <a:avLst/>
-          </a:prstGeom>
-          <a:solidFill>
-            <a:srgbClr val="CBE7DF"/>
-          </a:solidFill>
-          <a:ln>
-            <a:noFill/>
-          </a:ln>
-          <a:effectLst/>
-        </p:spPr>
-        <p:style>
-          <a:lnRef idx="1">
-            <a:schemeClr val="accent1"/>
-          </a:lnRef>
-          <a:fillRef idx="3">
-            <a:schemeClr val="accent1"/>
-          </a:fillRef>
-          <a:effectRef idx="2">
-            <a:schemeClr val="accent1"/>
-          </a:effectRef>
-          <a:fontRef idx="minor">
-            <a:schemeClr val="lt1"/>
-          </a:fontRef>
-        </p:style>
-        <p:txBody>
-          <a:bodyPr rtlCol="0" anchor="ctr"/>
-          <a:lstStyle/>
-          <a:p>
-            <a:pPr algn="ctr"/>
-          </a:p>
-        </p:txBody>
-      </p:sp>
-      <p:cxnSp>
-        <p:nvCxnSpPr>
-          <p:cNvPr id="7" name="Connector 6"/>
-          <p:cNvCxnSpPr/>
-          <p:nvPr/>
-        </p:nvCxnSpPr>
-        <p:spPr>
-          <a:xfrm>
-            <a:off x="10689336" y="996696"/>
-            <a:ext cx="548640" cy="502920"/>
-          </a:xfrm>
-          <a:prstGeom prst="line">
-            <a:avLst/>
-          </a:prstGeom>
-          <a:ln w="12700">
-            <a:solidFill>
-              <a:srgbClr val="D7EAE4"/>
-            </a:solidFill>
-          </a:ln>
-        </p:spPr>
-        <p:style>
-          <a:lnRef idx="2">
-            <a:schemeClr val="accent1"/>
-          </a:lnRef>
-          <a:fillRef idx="0">
-            <a:schemeClr val="accent1"/>
-          </a:fillRef>
-          <a:effectRef idx="1">
-            <a:schemeClr val="accent1"/>
-          </a:effectRef>
-          <a:fontRef idx="minor">
-            <a:schemeClr val="tx1"/>
-          </a:fontRef>
-        </p:style>
-      </p:cxnSp>
-      <p:cxnSp>
-        <p:nvCxnSpPr>
-          <p:cNvPr id="8" name="Connector 7"/>
-          <p:cNvCxnSpPr/>
-          <p:nvPr/>
-        </p:nvCxnSpPr>
-        <p:spPr>
-          <a:xfrm flipH="1">
-            <a:off x="10826496" y="1499616"/>
-            <a:ext cx="411480" cy="548639"/>
-          </a:xfrm>
-          <a:prstGeom prst="line">
-            <a:avLst/>
-          </a:prstGeom>
-          <a:ln w="12700">
-            <a:solidFill>
-              <a:srgbClr val="D7EAE4"/>
-            </a:solidFill>
-          </a:ln>
-        </p:spPr>
-        <p:style>
-          <a:lnRef idx="2">
-            <a:schemeClr val="accent1"/>
-          </a:lnRef>
-          <a:fillRef idx="0">
-            <a:schemeClr val="accent1"/>
-          </a:fillRef>
-          <a:effectRef idx="1">
-            <a:schemeClr val="accent1"/>
-          </a:effectRef>
-          <a:fontRef idx="minor">
-            <a:schemeClr val="tx1"/>
-          </a:fontRef>
-        </p:style>
-      </p:cxnSp>
-      <p:cxnSp>
-        <p:nvCxnSpPr>
-          <p:cNvPr id="9" name="Connector 8"/>
-          <p:cNvCxnSpPr/>
-          <p:nvPr/>
-        </p:nvCxnSpPr>
-        <p:spPr>
-          <a:xfrm>
-            <a:off x="10826496" y="2048255"/>
-            <a:ext cx="548640" cy="365760"/>
-          </a:xfrm>
-          <a:prstGeom prst="line">
-            <a:avLst/>
-          </a:prstGeom>
-          <a:ln w="12700">
-            <a:solidFill>
-              <a:srgbClr val="D7EAE4"/>
-            </a:solidFill>
-          </a:ln>
-        </p:spPr>
-        <p:style>
-          <a:lnRef idx="2">
-            <a:schemeClr val="accent1"/>
-          </a:lnRef>
-          <a:fillRef idx="0">
-            <a:schemeClr val="accent1"/>
-          </a:fillRef>
-          <a:effectRef idx="1">
-            <a:schemeClr val="accent1"/>
-          </a:effectRef>
-          <a:fontRef idx="minor">
-            <a:schemeClr val="tx1"/>
-          </a:fontRef>
-        </p:style>
-      </p:cxnSp>
-      <p:cxnSp>
-        <p:nvCxnSpPr>
-          <p:cNvPr id="10" name="Connector 9"/>
-          <p:cNvCxnSpPr/>
-          <p:nvPr/>
-        </p:nvCxnSpPr>
-        <p:spPr>
-          <a:xfrm flipH="1" flipV="1">
-            <a:off x="10460736" y="1773936"/>
-            <a:ext cx="914400" cy="640079"/>
-          </a:xfrm>
-          <a:prstGeom prst="line">
-            <a:avLst/>
-          </a:prstGeom>
-          <a:ln w="12700">
-            <a:solidFill>
-              <a:srgbClr val="D7EAE4"/>
-            </a:solidFill>
-          </a:ln>
-        </p:spPr>
-        <p:style>
-          <a:lnRef idx="2">
-            <a:schemeClr val="accent1"/>
-          </a:lnRef>
-          <a:fillRef idx="0">
-            <a:schemeClr val="accent1"/>
-          </a:fillRef>
-          <a:effectRef idx="1">
-            <a:schemeClr val="accent1"/>
-          </a:effectRef>
-          <a:fontRef idx="minor">
-            <a:schemeClr val="tx1"/>
-          </a:fontRef>
-        </p:style>
-      </p:cxnSp>
-      <p:sp>
-        <p:nvSpPr>
-          <p:cNvPr id="11" name="Rectangle 10"/>
-          <p:cNvSpPr/>
-          <p:nvPr/>
-        </p:nvSpPr>
-        <p:spPr>
-          <a:xfrm>
-            <a:off x="0" y="0"/>
-            <a:ext cx="12191695" cy="786384"/>
-          </a:xfrm>
-          <a:prstGeom prst="rect">
-            <a:avLst/>
-          </a:prstGeom>
-          <a:solidFill>
-            <a:srgbClr val="0E4F45"/>
-          </a:solidFill>
-          <a:ln>
-            <a:noFill/>
-          </a:ln>
-          <a:effectLst/>
-        </p:spPr>
-        <p:style>
-          <a:lnRef idx="1">
-            <a:schemeClr val="accent1"/>
-          </a:lnRef>
-          <a:fillRef idx="3">
-            <a:schemeClr val="accent1"/>
-          </a:fillRef>
-          <a:effectRef idx="2">
-            <a:schemeClr val="accent1"/>
-          </a:effectRef>
-          <a:fontRef idx="minor">
-            <a:schemeClr val="lt1"/>
-          </a:fontRef>
-        </p:style>
-        <p:txBody>
-          <a:bodyPr rtlCol="0" anchor="ctr"/>
-          <a:lstStyle/>
-          <a:p>
-            <a:pPr algn="ctr"/>
-          </a:p>
-        </p:txBody>
-      </p:sp>
-      <p:sp>
-        <p:nvSpPr>
-          <p:cNvPr id="12" name="Rectangle 11"/>
-          <p:cNvSpPr/>
-          <p:nvPr/>
-        </p:nvSpPr>
-        <p:spPr>
-          <a:xfrm>
-            <a:off x="0" y="786384"/>
-            <a:ext cx="12191695" cy="36576"/>
-          </a:xfrm>
-          <a:prstGeom prst="rect">
-            <a:avLst/>
-          </a:prstGeom>
-          <a:solidFill>
-            <a:srgbClr val="E8710A"/>
-          </a:solidFill>
-          <a:ln>
-            <a:noFill/>
-          </a:ln>
-          <a:effectLst/>
-        </p:spPr>
-        <p:style>
-          <a:lnRef idx="1">
-            <a:schemeClr val="accent1"/>
-          </a:lnRef>
-          <a:fillRef idx="3">
-            <a:schemeClr val="accent1"/>
-          </a:fillRef>
-          <a:effectRef idx="2">
-            <a:schemeClr val="accent1"/>
-          </a:effectRef>
-          <a:fontRef idx="minor">
-            <a:schemeClr val="lt1"/>
-          </a:fontRef>
-        </p:style>
-        <p:txBody>
-          <a:bodyPr rtlCol="0" anchor="ctr"/>
-          <a:lstStyle/>
-          <a:p>
-            <a:pPr algn="ctr"/>
-          </a:p>
-        </p:txBody>
-      </p:sp>
-      <p:sp>
-        <p:nvSpPr>
-          <p:cNvPr id="13" name="TextBox 12"/>
+          <p:cNvPr id="6" name="TextBox 5"/>
           <p:cNvSpPr txBox="1"/>
           <p:nvPr/>
         </p:nvSpPr>
         <p:spPr>
           <a:xfrm>
-            <a:off x="548640" y="128016"/>
-            <a:ext cx="8442656" cy="530352"/>
-          </a:xfrm>
-          <a:prstGeom prst="rect">
-            <a:avLst/>
-          </a:prstGeom>
-          <a:noFill/>
-        </p:spPr>
-        <p:txBody>
-          <a:bodyPr wrap="square" anchor="ctr" lIns="54864" rIns="54864" tIns="0" bIns="0">
-            <a:spAutoFit/>
-          </a:bodyPr>
-          <a:lstStyle/>
-          <a:p>
-            <a:pPr algn="l">
-              <a:lnSpc>
-                <a:spcPct val="130000"/>
-              </a:lnSpc>
-              <a:defRPr sz="2800"/>
-            </a:pPr>
-            <a:r>
-              <a:rPr sz="2800" b="1" u="none">
-                <a:solidFill>
-                  <a:srgbClr val="FFFFFF"/>
-                </a:solidFill>
-                <a:latin typeface="Times New Roman"/>
-                <a:ea typeface="Noto Sans CJK SC"/>
-              </a:rPr>
-              <a:t>参考答案</a:t>
-            </a:r>
-          </a:p>
-        </p:txBody>
-      </p:sp>
-      <p:sp>
-        <p:nvSpPr>
-          <p:cNvPr id="14" name="Rounded Rectangle 13"/>
-          <p:cNvSpPr/>
-          <p:nvPr/>
-        </p:nvSpPr>
-        <p:spPr>
-          <a:xfrm>
-            <a:off x="11039551" y="201168"/>
-            <a:ext cx="649224" cy="365760"/>
-          </a:xfrm>
-          <a:prstGeom prst="roundRect">
-            <a:avLst>
-              <a:gd name="adj" fmla="val 35000"/>
-            </a:avLst>
-          </a:prstGeom>
-          <a:solidFill>
-            <a:srgbClr val="2A3F63"/>
-          </a:solidFill>
-          <a:ln>
-            <a:noFill/>
-          </a:ln>
-          <a:effectLst/>
-        </p:spPr>
-        <p:style>
-          <a:lnRef idx="1">
-            <a:schemeClr val="accent1"/>
-          </a:lnRef>
-          <a:fillRef idx="3">
-            <a:schemeClr val="accent1"/>
-          </a:fillRef>
-          <a:effectRef idx="2">
-            <a:schemeClr val="accent1"/>
-          </a:effectRef>
-          <a:fontRef idx="minor">
-            <a:schemeClr val="lt1"/>
-          </a:fontRef>
-        </p:style>
-        <p:txBody>
-          <a:bodyPr rtlCol="0" anchor="ctr"/>
-          <a:lstStyle/>
-          <a:p>
-            <a:pPr algn="ctr"/>
-          </a:p>
-        </p:txBody>
-      </p:sp>
-      <p:sp>
-        <p:nvSpPr>
-          <p:cNvPr id="15" name="TextBox 14"/>
-          <p:cNvSpPr txBox="1"/>
-          <p:nvPr/>
-        </p:nvSpPr>
-        <p:spPr>
-          <a:xfrm>
-            <a:off x="11039551" y="219456"/>
-            <a:ext cx="649224" cy="329184"/>
+            <a:off x="548640" y="365760"/>
+            <a:ext cx="1865376" cy="548640"/>
           </a:xfrm>
           <a:prstGeom prst="rect">
             <a:avLst/>
@@ -4423,24 +4024,24 @@
               <a:lnSpc>
                 <a:spcPct val="130000"/>
               </a:lnSpc>
-              <a:defRPr sz="1100"/>
+              <a:defRPr sz="2300"/>
             </a:pPr>
             <a:r>
-              <a:rPr sz="1100" b="1" u="none">
+              <a:rPr sz="2300" b="1" u="none">
                 <a:solidFill>
                   <a:srgbClr val="FFFFFF"/>
                 </a:solidFill>
                 <a:latin typeface="Times New Roman"/>
-                <a:ea typeface="Noto Sans CJK SC"/>
+                <a:ea typeface="Noto Serif CJK SC"/>
               </a:rPr>
-              <a:t>答案</a:t>
-            </a:r>
-          </a:p>
-        </p:txBody>
-      </p:sp>
-      <p:sp>
-        <p:nvSpPr>
-          <p:cNvPr id="16" name="TextBox 15"/>
+              <a:t>参考答案</a:t>
+            </a:r>
+          </a:p>
+        </p:txBody>
+      </p:sp>
+      <p:sp>
+        <p:nvSpPr>
+          <p:cNvPr id="7" name="TextBox 6"/>
           <p:cNvSpPr txBox="1"/>
           <p:nvPr/>
         </p:nvSpPr>
@@ -4469,10 +4070,10 @@
             <a:r>
               <a:rPr sz="2600" b="0" u="none">
                 <a:solidFill>
-                  <a:srgbClr val="122A26"/>
+                  <a:srgbClr val="1C2B3A"/>
                 </a:solidFill>
                 <a:latin typeface="Times New Roman"/>
-                <a:ea typeface="Noto Sans CJK SC"/>
+                <a:ea typeface="Noto Serif CJK SC"/>
               </a:rPr>
               <a:t>1. B</a:t>
             </a:r>
@@ -4489,30 +4090,30 @@
             <a:r>
               <a:rPr sz="2600" b="0" u="none">
                 <a:solidFill>
-                  <a:srgbClr val="E8710A"/>
+                  <a:srgbClr val="2E75B6"/>
                 </a:solidFill>
                 <a:latin typeface="Times New Roman"/>
-                <a:ea typeface="Noto Sans CJK SC"/>
+                <a:ea typeface="Noto Serif CJK SC"/>
               </a:rPr>
               <a:t>▪ </a:t>
             </a:r>
             <a:r>
               <a:rPr sz="2600" b="1" u="none">
                 <a:solidFill>
-                  <a:srgbClr val="B42318"/>
+                  <a:srgbClr val="C00000"/>
                 </a:solidFill>
                 <a:latin typeface="Times New Roman"/>
-                <a:ea typeface="Noto Sans CJK SC"/>
+                <a:ea typeface="Noto Serif CJK SC"/>
               </a:rPr>
               <a:t>【解析】</a:t>
             </a:r>
             <a:r>
               <a:rPr sz="2600" b="0" u="none">
                 <a:solidFill>
-                  <a:srgbClr val="122A26"/>
+                  <a:srgbClr val="1C2B3A"/>
                 </a:solidFill>
                 <a:latin typeface="Times New Roman"/>
-                <a:ea typeface="Noto Sans CJK SC"/>
+                <a:ea typeface="Noto Serif CJK SC"/>
               </a:rPr>
               <a:t>燃烧热要求生成液态水，ΔH = −(241.8 + 44.0) = −285.8 kJ·mol⁻¹。</a:t>
             </a:r>
@@ -4521,20 +4122,22 @@
       </p:sp>
       <p:sp>
         <p:nvSpPr>
-          <p:cNvPr id="17" name="Rectangle 16"/>
+          <p:cNvPr id="8" name="Rounded Rectangle 7"/>
           <p:cNvSpPr/>
           <p:nvPr/>
         </p:nvSpPr>
         <p:spPr>
           <a:xfrm>
-            <a:off x="0" y="6739128"/>
-            <a:ext cx="12191695" cy="118872"/>
-          </a:xfrm>
-          <a:prstGeom prst="rect">
-            <a:avLst/>
+            <a:off x="10600639" y="6382512"/>
+            <a:ext cx="310896" cy="292608"/>
+          </a:xfrm>
+          <a:prstGeom prst="roundRect">
+            <a:avLst>
+              <a:gd name="adj" fmla="val 18000"/>
+            </a:avLst>
           </a:prstGeom>
           <a:solidFill>
-            <a:srgbClr val="E8710A"/>
+            <a:srgbClr val="E4E9F0"/>
           </a:solidFill>
           <a:ln>
             <a:noFill/>
@@ -4565,14 +4168,14 @@
       </p:sp>
       <p:sp>
         <p:nvSpPr>
-          <p:cNvPr id="18" name="TextBox 17"/>
+          <p:cNvPr id="9" name="TextBox 8"/>
           <p:cNvSpPr txBox="1"/>
           <p:nvPr/>
         </p:nvSpPr>
         <p:spPr>
           <a:xfrm>
-            <a:off x="548640" y="6345936"/>
-            <a:ext cx="8595360" cy="274320"/>
+            <a:off x="10600639" y="6400800"/>
+            <a:ext cx="310896" cy="274320"/>
           </a:xfrm>
           <a:prstGeom prst="rect">
             <a:avLst/>
@@ -4580,7 +4183,222 @@
           <a:noFill/>
         </p:spPr>
         <p:txBody>
-          <a:bodyPr wrap="square" anchor="t" lIns="54864" rIns="54864" tIns="0" bIns="0">
+          <a:bodyPr wrap="square" anchor="ctr" lIns="54864" rIns="54864" tIns="0" bIns="0">
+            <a:spAutoFit/>
+          </a:bodyPr>
+          <a:lstStyle/>
+          <a:p>
+            <a:pPr algn="ctr">
+              <a:lnSpc>
+                <a:spcPct val="130000"/>
+              </a:lnSpc>
+              <a:defRPr sz="1000"/>
+            </a:pPr>
+            <a:r>
+              <a:rPr sz="1000" b="0" u="none">
+                <a:solidFill>
+                  <a:srgbClr val="6B7785"/>
+                </a:solidFill>
+                <a:latin typeface="Times New Roman"/>
+                <a:ea typeface="Noto Serif CJK SC"/>
+              </a:rPr>
+              <a:t>‹</a:t>
+            </a:r>
+          </a:p>
+        </p:txBody>
+      </p:sp>
+      <p:sp>
+        <p:nvSpPr>
+          <p:cNvPr id="10" name="Rounded Rectangle 9"/>
+          <p:cNvSpPr/>
+          <p:nvPr/>
+        </p:nvSpPr>
+        <p:spPr>
+          <a:xfrm>
+            <a:off x="10966399" y="6382512"/>
+            <a:ext cx="310896" cy="292608"/>
+          </a:xfrm>
+          <a:prstGeom prst="roundRect">
+            <a:avLst>
+              <a:gd name="adj" fmla="val 18000"/>
+            </a:avLst>
+          </a:prstGeom>
+          <a:solidFill>
+            <a:srgbClr val="2E75B6"/>
+          </a:solidFill>
+          <a:ln>
+            <a:noFill/>
+          </a:ln>
+          <a:effectLst/>
+        </p:spPr>
+        <p:style>
+          <a:lnRef idx="1">
+            <a:schemeClr val="accent1"/>
+          </a:lnRef>
+          <a:fillRef idx="3">
+            <a:schemeClr val="accent1"/>
+          </a:fillRef>
+          <a:effectRef idx="2">
+            <a:schemeClr val="accent1"/>
+          </a:effectRef>
+          <a:fontRef idx="minor">
+            <a:schemeClr val="lt1"/>
+          </a:fontRef>
+        </p:style>
+        <p:txBody>
+          <a:bodyPr rtlCol="0" anchor="ctr"/>
+          <a:lstStyle/>
+          <a:p>
+            <a:pPr algn="ctr"/>
+          </a:p>
+        </p:txBody>
+      </p:sp>
+      <p:sp>
+        <p:nvSpPr>
+          <p:cNvPr id="11" name="TextBox 10"/>
+          <p:cNvSpPr txBox="1"/>
+          <p:nvPr/>
+        </p:nvSpPr>
+        <p:spPr>
+          <a:xfrm>
+            <a:off x="10966399" y="6400800"/>
+            <a:ext cx="310896" cy="274320"/>
+          </a:xfrm>
+          <a:prstGeom prst="rect">
+            <a:avLst/>
+          </a:prstGeom>
+          <a:noFill/>
+        </p:spPr>
+        <p:txBody>
+          <a:bodyPr wrap="square" anchor="ctr" lIns="54864" rIns="54864" tIns="0" bIns="0">
+            <a:spAutoFit/>
+          </a:bodyPr>
+          <a:lstStyle/>
+          <a:p>
+            <a:pPr algn="ctr">
+              <a:lnSpc>
+                <a:spcPct val="130000"/>
+              </a:lnSpc>
+              <a:defRPr sz="1000"/>
+            </a:pPr>
+            <a:r>
+              <a:rPr sz="1000" b="1" u="none">
+                <a:solidFill>
+                  <a:srgbClr val="FFFFFF"/>
+                </a:solidFill>
+                <a:latin typeface="Times New Roman"/>
+                <a:ea typeface="Noto Serif CJK SC"/>
+              </a:rPr>
+              <a:t>10</a:t>
+            </a:r>
+          </a:p>
+        </p:txBody>
+      </p:sp>
+      <p:sp>
+        <p:nvSpPr>
+          <p:cNvPr id="12" name="Rounded Rectangle 11"/>
+          <p:cNvSpPr/>
+          <p:nvPr/>
+        </p:nvSpPr>
+        <p:spPr>
+          <a:xfrm>
+            <a:off x="11332159" y="6382512"/>
+            <a:ext cx="310896" cy="292608"/>
+          </a:xfrm>
+          <a:prstGeom prst="roundRect">
+            <a:avLst>
+              <a:gd name="adj" fmla="val 18000"/>
+            </a:avLst>
+          </a:prstGeom>
+          <a:solidFill>
+            <a:srgbClr val="E4E9F0"/>
+          </a:solidFill>
+          <a:ln>
+            <a:noFill/>
+          </a:ln>
+          <a:effectLst/>
+        </p:spPr>
+        <p:style>
+          <a:lnRef idx="1">
+            <a:schemeClr val="accent1"/>
+          </a:lnRef>
+          <a:fillRef idx="3">
+            <a:schemeClr val="accent1"/>
+          </a:fillRef>
+          <a:effectRef idx="2">
+            <a:schemeClr val="accent1"/>
+          </a:effectRef>
+          <a:fontRef idx="minor">
+            <a:schemeClr val="lt1"/>
+          </a:fontRef>
+        </p:style>
+        <p:txBody>
+          <a:bodyPr rtlCol="0" anchor="ctr"/>
+          <a:lstStyle/>
+          <a:p>
+            <a:pPr algn="ctr"/>
+          </a:p>
+        </p:txBody>
+      </p:sp>
+      <p:sp>
+        <p:nvSpPr>
+          <p:cNvPr id="13" name="TextBox 12"/>
+          <p:cNvSpPr txBox="1"/>
+          <p:nvPr/>
+        </p:nvSpPr>
+        <p:spPr>
+          <a:xfrm>
+            <a:off x="11332159" y="6400800"/>
+            <a:ext cx="310896" cy="274320"/>
+          </a:xfrm>
+          <a:prstGeom prst="rect">
+            <a:avLst/>
+          </a:prstGeom>
+          <a:noFill/>
+        </p:spPr>
+        <p:txBody>
+          <a:bodyPr wrap="square" anchor="ctr" lIns="54864" rIns="54864" tIns="0" bIns="0">
+            <a:spAutoFit/>
+          </a:bodyPr>
+          <a:lstStyle/>
+          <a:p>
+            <a:pPr algn="ctr">
+              <a:lnSpc>
+                <a:spcPct val="130000"/>
+              </a:lnSpc>
+              <a:defRPr sz="1000"/>
+            </a:pPr>
+            <a:r>
+              <a:rPr sz="1000" b="0" u="none">
+                <a:solidFill>
+                  <a:srgbClr val="6B7785"/>
+                </a:solidFill>
+                <a:latin typeface="Times New Roman"/>
+                <a:ea typeface="Noto Serif CJK SC"/>
+              </a:rPr>
+              <a:t>›</a:t>
+            </a:r>
+          </a:p>
+        </p:txBody>
+      </p:sp>
+      <p:sp>
+        <p:nvSpPr>
+          <p:cNvPr id="14" name="TextBox 13"/>
+          <p:cNvSpPr txBox="1"/>
+          <p:nvPr/>
+        </p:nvSpPr>
+        <p:spPr>
+          <a:xfrm>
+            <a:off x="548640" y="6382512"/>
+            <a:ext cx="7498079" cy="274320"/>
+          </a:xfrm>
+          <a:prstGeom prst="rect">
+            <a:avLst/>
+          </a:prstGeom>
+          <a:noFill/>
+        </p:spPr>
+        <p:txBody>
+          <a:bodyPr wrap="square" anchor="ctr" lIns="54864" rIns="54864" tIns="0" bIns="0">
             <a:spAutoFit/>
           </a:bodyPr>
           <a:lstStyle/>
@@ -4597,50 +4415,9 @@
                   <a:srgbClr val="8A94A6"/>
                 </a:solidFill>
                 <a:latin typeface="Times New Roman"/>
-                <a:ea typeface="Noto Sans CJK SC"/>
+                <a:ea typeface="Noto Serif CJK SC"/>
               </a:rPr>
               <a:t>胶州四中 · 14. 反应热 热化学方程式</a:t>
-            </a:r>
-          </a:p>
-        </p:txBody>
-      </p:sp>
-      <p:sp>
-        <p:nvSpPr>
-          <p:cNvPr id="19" name="TextBox 18"/>
-          <p:cNvSpPr txBox="1"/>
-          <p:nvPr/>
-        </p:nvSpPr>
-        <p:spPr>
-          <a:xfrm>
-            <a:off x="11048695" y="6345936"/>
-            <a:ext cx="685800" cy="274320"/>
-          </a:xfrm>
-          <a:prstGeom prst="rect">
-            <a:avLst/>
-          </a:prstGeom>
-          <a:noFill/>
-        </p:spPr>
-        <p:txBody>
-          <a:bodyPr wrap="square" anchor="t" lIns="54864" rIns="54864" tIns="0" bIns="0">
-            <a:spAutoFit/>
-          </a:bodyPr>
-          <a:lstStyle/>
-          <a:p>
-            <a:pPr algn="r">
-              <a:lnSpc>
-                <a:spcPct val="130000"/>
-              </a:lnSpc>
-              <a:defRPr sz="1000"/>
-            </a:pPr>
-            <a:r>
-              <a:rPr sz="1000" b="0" u="none">
-                <a:solidFill>
-                  <a:srgbClr val="8A94A6"/>
-                </a:solidFill>
-                <a:latin typeface="Times New Roman"/>
-                <a:ea typeface="Noto Sans CJK SC"/>
-              </a:rPr>
-              <a:t>10</a:t>
             </a:r>
           </a:p>
         </p:txBody>
@@ -4678,7 +4455,7 @@
             <a:avLst/>
           </a:prstGeom>
           <a:solidFill>
-            <a:srgbClr val="E9F0F2"/>
+            <a:srgbClr val="F1F5F9"/>
           </a:solidFill>
           <a:ln>
             <a:noFill/>
@@ -4722,7 +4499,7 @@
             <a:avLst/>
           </a:prstGeom>
           <a:solidFill>
-            <a:srgbClr val="0E4F45"/>
+            <a:srgbClr val="1F4E79"/>
           </a:solidFill>
           <a:ln>
             <a:noFill/>
@@ -4766,7 +4543,7 @@
             <a:avLst/>
           </a:prstGeom>
           <a:solidFill>
-            <a:srgbClr val="E8710A"/>
+            <a:srgbClr val="2E75B6"/>
           </a:solidFill>
           <a:ln>
             <a:noFill/>
@@ -4803,7 +4580,7 @@
         </p:nvSpPr>
         <p:spPr>
           <a:xfrm>
-            <a:off x="777240" y="731520"/>
+            <a:off x="777240" y="1005840"/>
             <a:ext cx="10637215" cy="822960"/>
           </a:xfrm>
           <a:prstGeom prst="rect">
@@ -4826,10 +4603,10 @@
             <a:r>
               <a:rPr sz="3800" b="1" u="none">
                 <a:solidFill>
-                  <a:srgbClr val="0E4F45"/>
+                  <a:srgbClr val="1F4E79"/>
                 </a:solidFill>
                 <a:latin typeface="Times New Roman"/>
-                <a:ea typeface="Noto Sans CJK SC"/>
+                <a:ea typeface="Noto Serif CJK SC"/>
               </a:rPr>
               <a:t>本节课小结</a:t>
             </a:r>
@@ -4844,8 +4621,8 @@
         </p:nvSpPr>
         <p:spPr>
           <a:xfrm>
-            <a:off x="868680" y="1783080"/>
-            <a:ext cx="10454335" cy="4251960"/>
+            <a:off x="868680" y="3136392"/>
+            <a:ext cx="10454335" cy="2715768"/>
           </a:xfrm>
           <a:prstGeom prst="rect">
             <a:avLst/>
@@ -4867,20 +4644,20 @@
             <a:r>
               <a:rPr sz="2300" b="0" u="none">
                 <a:solidFill>
-                  <a:srgbClr val="E8710A"/>
+                  <a:srgbClr val="2E75B6"/>
                 </a:solidFill>
                 <a:latin typeface="Times New Roman"/>
-                <a:ea typeface="Noto Sans CJK SC"/>
+                <a:ea typeface="Noto Serif CJK SC"/>
               </a:rPr>
               <a:t>✔ </a:t>
             </a:r>
             <a:r>
               <a:rPr sz="2300" b="0" u="none">
                 <a:solidFill>
-                  <a:srgbClr val="122A26"/>
+                  <a:srgbClr val="1C2B3A"/>
                 </a:solidFill>
                 <a:latin typeface="Times New Roman"/>
-                <a:ea typeface="Noto Sans CJK SC"/>
+                <a:ea typeface="Noto Serif CJK SC"/>
               </a:rPr>
               <a:t>理解反应热、焓变的概念，会从宏观与微观两个角度分析吸放热。</a:t>
             </a:r>
@@ -4897,20 +4674,20 @@
             <a:r>
               <a:rPr sz="2300" b="0" u="none">
                 <a:solidFill>
-                  <a:srgbClr val="E8710A"/>
+                  <a:srgbClr val="2E75B6"/>
                 </a:solidFill>
                 <a:latin typeface="Times New Roman"/>
-                <a:ea typeface="Noto Sans CJK SC"/>
+                <a:ea typeface="Noto Serif CJK SC"/>
               </a:rPr>
               <a:t>✔ </a:t>
             </a:r>
             <a:r>
               <a:rPr sz="2300" b="0" u="none">
                 <a:solidFill>
-                  <a:srgbClr val="122A26"/>
+                  <a:srgbClr val="1C2B3A"/>
                 </a:solidFill>
                 <a:latin typeface="Times New Roman"/>
-                <a:ea typeface="Noto Sans CJK SC"/>
+                <a:ea typeface="Noto Serif CJK SC"/>
               </a:rPr>
               <a:t>能规范书写热化学方程式（状态、符号、单位、化学计量数）。</a:t>
             </a:r>
@@ -4919,14 +4696,60 @@
       </p:sp>
       <p:sp>
         <p:nvSpPr>
-          <p:cNvPr id="7" name="TextBox 6"/>
+          <p:cNvPr id="7" name="Rounded Rectangle 6"/>
+          <p:cNvSpPr/>
+          <p:nvPr/>
+        </p:nvSpPr>
+        <p:spPr>
+          <a:xfrm>
+            <a:off x="10600639" y="6382512"/>
+            <a:ext cx="310896" cy="292608"/>
+          </a:xfrm>
+          <a:prstGeom prst="roundRect">
+            <a:avLst>
+              <a:gd name="adj" fmla="val 18000"/>
+            </a:avLst>
+          </a:prstGeom>
+          <a:solidFill>
+            <a:srgbClr val="E4E9F0"/>
+          </a:solidFill>
+          <a:ln>
+            <a:noFill/>
+          </a:ln>
+          <a:effectLst/>
+        </p:spPr>
+        <p:style>
+          <a:lnRef idx="1">
+            <a:schemeClr val="accent1"/>
+          </a:lnRef>
+          <a:fillRef idx="3">
+            <a:schemeClr val="accent1"/>
+          </a:fillRef>
+          <a:effectRef idx="2">
+            <a:schemeClr val="accent1"/>
+          </a:effectRef>
+          <a:fontRef idx="minor">
+            <a:schemeClr val="lt1"/>
+          </a:fontRef>
+        </p:style>
+        <p:txBody>
+          <a:bodyPr rtlCol="0" anchor="ctr"/>
+          <a:lstStyle/>
+          <a:p>
+            <a:pPr algn="ctr"/>
+          </a:p>
+        </p:txBody>
+      </p:sp>
+      <p:sp>
+        <p:nvSpPr>
+          <p:cNvPr id="8" name="TextBox 7"/>
           <p:cNvSpPr txBox="1"/>
           <p:nvPr/>
         </p:nvSpPr>
         <p:spPr>
           <a:xfrm>
-            <a:off x="868680" y="5989320"/>
-            <a:ext cx="10454335" cy="347472"/>
+            <a:off x="10600639" y="6400800"/>
+            <a:ext cx="310896" cy="274320"/>
           </a:xfrm>
           <a:prstGeom prst="rect">
             <a:avLst/>
@@ -4934,7 +4757,222 @@
           <a:noFill/>
         </p:spPr>
         <p:txBody>
-          <a:bodyPr wrap="square" anchor="t" lIns="54864" rIns="54864" tIns="0" bIns="0">
+          <a:bodyPr wrap="square" anchor="ctr" lIns="54864" rIns="54864" tIns="0" bIns="0">
+            <a:spAutoFit/>
+          </a:bodyPr>
+          <a:lstStyle/>
+          <a:p>
+            <a:pPr algn="ctr">
+              <a:lnSpc>
+                <a:spcPct val="130000"/>
+              </a:lnSpc>
+              <a:defRPr sz="1000"/>
+            </a:pPr>
+            <a:r>
+              <a:rPr sz="1000" b="0" u="none">
+                <a:solidFill>
+                  <a:srgbClr val="6B7785"/>
+                </a:solidFill>
+                <a:latin typeface="Times New Roman"/>
+                <a:ea typeface="Noto Serif CJK SC"/>
+              </a:rPr>
+              <a:t>‹</a:t>
+            </a:r>
+          </a:p>
+        </p:txBody>
+      </p:sp>
+      <p:sp>
+        <p:nvSpPr>
+          <p:cNvPr id="9" name="Rounded Rectangle 8"/>
+          <p:cNvSpPr/>
+          <p:nvPr/>
+        </p:nvSpPr>
+        <p:spPr>
+          <a:xfrm>
+            <a:off x="10966399" y="6382512"/>
+            <a:ext cx="310896" cy="292608"/>
+          </a:xfrm>
+          <a:prstGeom prst="roundRect">
+            <a:avLst>
+              <a:gd name="adj" fmla="val 18000"/>
+            </a:avLst>
+          </a:prstGeom>
+          <a:solidFill>
+            <a:srgbClr val="2E75B6"/>
+          </a:solidFill>
+          <a:ln>
+            <a:noFill/>
+          </a:ln>
+          <a:effectLst/>
+        </p:spPr>
+        <p:style>
+          <a:lnRef idx="1">
+            <a:schemeClr val="accent1"/>
+          </a:lnRef>
+          <a:fillRef idx="3">
+            <a:schemeClr val="accent1"/>
+          </a:fillRef>
+          <a:effectRef idx="2">
+            <a:schemeClr val="accent1"/>
+          </a:effectRef>
+          <a:fontRef idx="minor">
+            <a:schemeClr val="lt1"/>
+          </a:fontRef>
+        </p:style>
+        <p:txBody>
+          <a:bodyPr rtlCol="0" anchor="ctr"/>
+          <a:lstStyle/>
+          <a:p>
+            <a:pPr algn="ctr"/>
+          </a:p>
+        </p:txBody>
+      </p:sp>
+      <p:sp>
+        <p:nvSpPr>
+          <p:cNvPr id="10" name="TextBox 9"/>
+          <p:cNvSpPr txBox="1"/>
+          <p:nvPr/>
+        </p:nvSpPr>
+        <p:spPr>
+          <a:xfrm>
+            <a:off x="10966399" y="6400800"/>
+            <a:ext cx="310896" cy="274320"/>
+          </a:xfrm>
+          <a:prstGeom prst="rect">
+            <a:avLst/>
+          </a:prstGeom>
+          <a:noFill/>
+        </p:spPr>
+        <p:txBody>
+          <a:bodyPr wrap="square" anchor="ctr" lIns="54864" rIns="54864" tIns="0" bIns="0">
+            <a:spAutoFit/>
+          </a:bodyPr>
+          <a:lstStyle/>
+          <a:p>
+            <a:pPr algn="ctr">
+              <a:lnSpc>
+                <a:spcPct val="130000"/>
+              </a:lnSpc>
+              <a:defRPr sz="1000"/>
+            </a:pPr>
+            <a:r>
+              <a:rPr sz="1000" b="1" u="none">
+                <a:solidFill>
+                  <a:srgbClr val="FFFFFF"/>
+                </a:solidFill>
+                <a:latin typeface="Times New Roman"/>
+                <a:ea typeface="Noto Serif CJK SC"/>
+              </a:rPr>
+              <a:t>11</a:t>
+            </a:r>
+          </a:p>
+        </p:txBody>
+      </p:sp>
+      <p:sp>
+        <p:nvSpPr>
+          <p:cNvPr id="11" name="Rounded Rectangle 10"/>
+          <p:cNvSpPr/>
+          <p:nvPr/>
+        </p:nvSpPr>
+        <p:spPr>
+          <a:xfrm>
+            <a:off x="11332159" y="6382512"/>
+            <a:ext cx="310896" cy="292608"/>
+          </a:xfrm>
+          <a:prstGeom prst="roundRect">
+            <a:avLst>
+              <a:gd name="adj" fmla="val 18000"/>
+            </a:avLst>
+          </a:prstGeom>
+          <a:solidFill>
+            <a:srgbClr val="E4E9F0"/>
+          </a:solidFill>
+          <a:ln>
+            <a:noFill/>
+          </a:ln>
+          <a:effectLst/>
+        </p:spPr>
+        <p:style>
+          <a:lnRef idx="1">
+            <a:schemeClr val="accent1"/>
+          </a:lnRef>
+          <a:fillRef idx="3">
+            <a:schemeClr val="accent1"/>
+          </a:fillRef>
+          <a:effectRef idx="2">
+            <a:schemeClr val="accent1"/>
+          </a:effectRef>
+          <a:fontRef idx="minor">
+            <a:schemeClr val="lt1"/>
+          </a:fontRef>
+        </p:style>
+        <p:txBody>
+          <a:bodyPr rtlCol="0" anchor="ctr"/>
+          <a:lstStyle/>
+          <a:p>
+            <a:pPr algn="ctr"/>
+          </a:p>
+        </p:txBody>
+      </p:sp>
+      <p:sp>
+        <p:nvSpPr>
+          <p:cNvPr id="12" name="TextBox 11"/>
+          <p:cNvSpPr txBox="1"/>
+          <p:nvPr/>
+        </p:nvSpPr>
+        <p:spPr>
+          <a:xfrm>
+            <a:off x="11332159" y="6400800"/>
+            <a:ext cx="310896" cy="274320"/>
+          </a:xfrm>
+          <a:prstGeom prst="rect">
+            <a:avLst/>
+          </a:prstGeom>
+          <a:noFill/>
+        </p:spPr>
+        <p:txBody>
+          <a:bodyPr wrap="square" anchor="ctr" lIns="54864" rIns="54864" tIns="0" bIns="0">
+            <a:spAutoFit/>
+          </a:bodyPr>
+          <a:lstStyle/>
+          <a:p>
+            <a:pPr algn="ctr">
+              <a:lnSpc>
+                <a:spcPct val="130000"/>
+              </a:lnSpc>
+              <a:defRPr sz="1000"/>
+            </a:pPr>
+            <a:r>
+              <a:rPr sz="1000" b="0" u="none">
+                <a:solidFill>
+                  <a:srgbClr val="6B7785"/>
+                </a:solidFill>
+                <a:latin typeface="Times New Roman"/>
+                <a:ea typeface="Noto Serif CJK SC"/>
+              </a:rPr>
+              <a:t>›</a:t>
+            </a:r>
+          </a:p>
+        </p:txBody>
+      </p:sp>
+      <p:sp>
+        <p:nvSpPr>
+          <p:cNvPr id="13" name="TextBox 12"/>
+          <p:cNvSpPr txBox="1"/>
+          <p:nvPr/>
+        </p:nvSpPr>
+        <p:spPr>
+          <a:xfrm>
+            <a:off x="548640" y="6382512"/>
+            <a:ext cx="7498079" cy="274320"/>
+          </a:xfrm>
+          <a:prstGeom prst="rect">
+            <a:avLst/>
+          </a:prstGeom>
+          <a:noFill/>
+        </p:spPr>
+        <p:txBody>
+          <a:bodyPr wrap="square" anchor="ctr" lIns="54864" rIns="54864" tIns="0" bIns="0">
             <a:spAutoFit/>
           </a:bodyPr>
           <a:lstStyle/>
@@ -4943,58 +4981,17 @@
               <a:lnSpc>
                 <a:spcPct val="130000"/>
               </a:lnSpc>
-              <a:defRPr sz="1400"/>
+              <a:defRPr sz="1000"/>
             </a:pPr>
             <a:r>
-              <a:rPr sz="1400" b="0" u="none">
-                <a:solidFill>
-                  <a:srgbClr val="64748B"/>
+              <a:rPr sz="1000" b="0" u="none">
+                <a:solidFill>
+                  <a:srgbClr val="8A94A6"/>
                 </a:solidFill>
                 <a:latin typeface="Times New Roman"/>
-                <a:ea typeface="Noto Sans CJK SC"/>
+                <a:ea typeface="Noto Serif CJK SC"/>
               </a:rPr>
-              <a:t>胶州四中</a:t>
-            </a:r>
-          </a:p>
-        </p:txBody>
-      </p:sp>
-      <p:sp>
-        <p:nvSpPr>
-          <p:cNvPr id="8" name="TextBox 7"/>
-          <p:cNvSpPr txBox="1"/>
-          <p:nvPr/>
-        </p:nvSpPr>
-        <p:spPr>
-          <a:xfrm>
-            <a:off x="11048695" y="5989320"/>
-            <a:ext cx="685800" cy="347472"/>
-          </a:xfrm>
-          <a:prstGeom prst="rect">
-            <a:avLst/>
-          </a:prstGeom>
-          <a:noFill/>
-        </p:spPr>
-        <p:txBody>
-          <a:bodyPr wrap="square" anchor="t" lIns="54864" rIns="54864" tIns="0" bIns="0">
-            <a:spAutoFit/>
-          </a:bodyPr>
-          <a:lstStyle/>
-          <a:p>
-            <a:pPr algn="r">
-              <a:lnSpc>
-                <a:spcPct val="130000"/>
-              </a:lnSpc>
-              <a:defRPr sz="1400"/>
-            </a:pPr>
-            <a:r>
-              <a:rPr sz="1400" b="0" u="none">
-                <a:solidFill>
-                  <a:srgbClr val="64748B"/>
-                </a:solidFill>
-                <a:latin typeface="Times New Roman"/>
-                <a:ea typeface="Noto Sans CJK SC"/>
-              </a:rPr>
-              <a:t>11</a:t>
+              <a:t>胶州四中 · 14. 反应热 热化学方程式</a:t>
             </a:r>
           </a:p>
         </p:txBody>
@@ -5032,7 +5029,7 @@
             <a:avLst/>
           </a:prstGeom>
           <a:solidFill>
-            <a:srgbClr val="0E4F45"/>
+            <a:srgbClr val="1F4E79"/>
           </a:solidFill>
           <a:ln>
             <a:noFill/>
@@ -5076,7 +5073,7 @@
             <a:avLst/>
           </a:prstGeom>
           <a:solidFill>
-            <a:srgbClr val="E8710A"/>
+            <a:srgbClr val="2E75B6"/>
           </a:solidFill>
           <a:ln>
             <a:noFill/>
@@ -5136,10 +5133,10 @@
             <a:r>
               <a:rPr sz="9200" b="1" u="none">
                 <a:solidFill>
-                  <a:srgbClr val="E8710A"/>
+                  <a:srgbClr val="2E75B6"/>
                 </a:solidFill>
                 <a:latin typeface="Times New Roman"/>
-                <a:ea typeface="Noto Sans CJK SC"/>
+                <a:ea typeface="Noto Serif CJK SC"/>
               </a:rPr>
               <a:t>01</a:t>
             </a:r>
@@ -5180,7 +5177,7 @@
                   <a:srgbClr val="FFFFFF"/>
                 </a:solidFill>
                 <a:latin typeface="Times New Roman"/>
-                <a:ea typeface="Noto Sans CJK SC"/>
+                <a:ea typeface="Noto Serif CJK SC"/>
               </a:rPr>
               <a:t>学习目标</a:t>
             </a:r>
@@ -5195,8 +5192,8 @@
         </p:nvSpPr>
         <p:spPr>
           <a:xfrm>
-            <a:off x="11688775" y="2011680"/>
-            <a:ext cx="365760" cy="2377440"/>
+            <a:off x="777240" y="2011680"/>
+            <a:ext cx="384048" cy="868680"/>
           </a:xfrm>
           <a:prstGeom prst="roundRect">
             <a:avLst>
@@ -5204,7 +5201,7 @@
             </a:avLst>
           </a:prstGeom>
           <a:solidFill>
-            <a:srgbClr val="E8710A"/>
+            <a:srgbClr val="B7791F"/>
           </a:solidFill>
           <a:ln>
             <a:noFill/>
@@ -5241,8 +5238,8 @@
         </p:nvSpPr>
         <p:spPr>
           <a:xfrm>
-            <a:off x="11688775" y="2103120"/>
-            <a:ext cx="365760" cy="2194560"/>
+            <a:off x="1280160" y="2011680"/>
+            <a:ext cx="2011680" cy="384048"/>
           </a:xfrm>
           <a:prstGeom prst="rect">
             <a:avLst/>
@@ -5250,12 +5247,12 @@
           <a:noFill/>
         </p:spPr>
         <p:txBody>
-          <a:bodyPr wrap="square" anchor="ctr" lIns="54864" rIns="54864" tIns="0" bIns="0" vert="eaVert">
+          <a:bodyPr wrap="square" anchor="t" lIns="54864" rIns="54864" tIns="0" bIns="0">
             <a:spAutoFit/>
           </a:bodyPr>
           <a:lstStyle/>
           <a:p>
-            <a:pPr algn="ctr">
+            <a:pPr algn="l">
               <a:lnSpc>
                 <a:spcPct val="130000"/>
               </a:lnSpc>
@@ -5267,7 +5264,7 @@
                   <a:srgbClr val="FFFFFF"/>
                 </a:solidFill>
                 <a:latin typeface="Times New Roman"/>
-                <a:ea typeface="Noto Sans CJK SC"/>
+                <a:ea typeface="Noto Serif CJK SC"/>
               </a:rPr>
               <a:t>导入</a:t>
             </a:r>
@@ -5300,14 +5297,148 @@
         </p:nvSpPr>
         <p:spPr>
           <a:xfrm>
-            <a:off x="10607040" y="914400"/>
-            <a:ext cx="155448" cy="155448"/>
+            <a:off x="9281160" y="164592"/>
+            <a:ext cx="2651760" cy="2651760"/>
           </a:xfrm>
           <a:prstGeom prst="ellipse">
             <a:avLst/>
           </a:prstGeom>
+          <a:noFill/>
+          <a:ln w="13970">
+            <a:solidFill>
+              <a:srgbClr val="E8EDF2"/>
+            </a:solidFill>
+          </a:ln>
+          <a:effectLst/>
+        </p:spPr>
+        <p:style>
+          <a:lnRef idx="1">
+            <a:schemeClr val="accent1"/>
+          </a:lnRef>
+          <a:fillRef idx="3">
+            <a:schemeClr val="accent1"/>
+          </a:fillRef>
+          <a:effectRef idx="2">
+            <a:schemeClr val="accent1"/>
+          </a:effectRef>
+          <a:fontRef idx="minor">
+            <a:schemeClr val="lt1"/>
+          </a:fontRef>
+        </p:style>
+        <p:txBody>
+          <a:bodyPr rtlCol="0" anchor="ctr"/>
+          <a:lstStyle/>
+          <a:p>
+            <a:pPr algn="ctr"/>
+          </a:p>
+        </p:txBody>
+      </p:sp>
+      <p:sp>
+        <p:nvSpPr>
+          <p:cNvPr id="3" name="Oval 2"/>
+          <p:cNvSpPr/>
+          <p:nvPr/>
+        </p:nvSpPr>
+        <p:spPr>
+          <a:xfrm>
+            <a:off x="9646920" y="502920"/>
+            <a:ext cx="1920240" cy="1920240"/>
+          </a:xfrm>
+          <a:prstGeom prst="ellipse">
+            <a:avLst/>
+          </a:prstGeom>
+          <a:noFill/>
+          <a:ln w="13970">
+            <a:solidFill>
+              <a:srgbClr val="E8EDF2"/>
+            </a:solidFill>
+          </a:ln>
+          <a:effectLst/>
+        </p:spPr>
+        <p:style>
+          <a:lnRef idx="1">
+            <a:schemeClr val="accent1"/>
+          </a:lnRef>
+          <a:fillRef idx="3">
+            <a:schemeClr val="accent1"/>
+          </a:fillRef>
+          <a:effectRef idx="2">
+            <a:schemeClr val="accent1"/>
+          </a:effectRef>
+          <a:fontRef idx="minor">
+            <a:schemeClr val="lt1"/>
+          </a:fontRef>
+        </p:style>
+        <p:txBody>
+          <a:bodyPr rtlCol="0" anchor="ctr"/>
+          <a:lstStyle/>
+          <a:p>
+            <a:pPr algn="ctr"/>
+          </a:p>
+        </p:txBody>
+      </p:sp>
+      <p:sp>
+        <p:nvSpPr>
+          <p:cNvPr id="4" name="Oval 3"/>
+          <p:cNvSpPr/>
+          <p:nvPr/>
+        </p:nvSpPr>
+        <p:spPr>
+          <a:xfrm>
+            <a:off x="10012680" y="868680"/>
+            <a:ext cx="1188720" cy="1188720"/>
+          </a:xfrm>
+          <a:prstGeom prst="ellipse">
+            <a:avLst/>
+          </a:prstGeom>
+          <a:noFill/>
+          <a:ln w="13970">
+            <a:solidFill>
+              <a:srgbClr val="E8EDF2"/>
+            </a:solidFill>
+          </a:ln>
+          <a:effectLst/>
+        </p:spPr>
+        <p:style>
+          <a:lnRef idx="1">
+            <a:schemeClr val="accent1"/>
+          </a:lnRef>
+          <a:fillRef idx="3">
+            <a:schemeClr val="accent1"/>
+          </a:fillRef>
+          <a:effectRef idx="2">
+            <a:schemeClr val="accent1"/>
+          </a:effectRef>
+          <a:fontRef idx="minor">
+            <a:schemeClr val="lt1"/>
+          </a:fontRef>
+        </p:style>
+        <p:txBody>
+          <a:bodyPr rtlCol="0" anchor="ctr"/>
+          <a:lstStyle/>
+          <a:p>
+            <a:pPr algn="ctr"/>
+          </a:p>
+        </p:txBody>
+      </p:sp>
+      <p:sp>
+        <p:nvSpPr>
+          <p:cNvPr id="5" name="Rounded Rectangle 4"/>
+          <p:cNvSpPr/>
+          <p:nvPr/>
+        </p:nvSpPr>
+        <p:spPr>
+          <a:xfrm>
+            <a:off x="548640" y="347472"/>
+            <a:ext cx="1865376" cy="585216"/>
+          </a:xfrm>
+          <a:prstGeom prst="roundRect">
+            <a:avLst>
+              <a:gd name="adj" fmla="val 32000"/>
+            </a:avLst>
+          </a:prstGeom>
           <a:solidFill>
-            <a:srgbClr val="CBE7DF"/>
+            <a:srgbClr val="2E75B6"/>
           </a:solidFill>
           <a:ln>
             <a:noFill/>
@@ -5338,418 +5469,14 @@
       </p:sp>
       <p:sp>
         <p:nvSpPr>
-          <p:cNvPr id="3" name="Oval 2"/>
-          <p:cNvSpPr/>
-          <p:nvPr/>
-        </p:nvSpPr>
-        <p:spPr>
-          <a:xfrm>
-            <a:off x="11155680" y="1417320"/>
-            <a:ext cx="100584" cy="100584"/>
-          </a:xfrm>
-          <a:prstGeom prst="ellipse">
-            <a:avLst/>
-          </a:prstGeom>
-          <a:solidFill>
-            <a:srgbClr val="CBE7DF"/>
-          </a:solidFill>
-          <a:ln>
-            <a:noFill/>
-          </a:ln>
-          <a:effectLst/>
-        </p:spPr>
-        <p:style>
-          <a:lnRef idx="1">
-            <a:schemeClr val="accent1"/>
-          </a:lnRef>
-          <a:fillRef idx="3">
-            <a:schemeClr val="accent1"/>
-          </a:fillRef>
-          <a:effectRef idx="2">
-            <a:schemeClr val="accent1"/>
-          </a:effectRef>
-          <a:fontRef idx="minor">
-            <a:schemeClr val="lt1"/>
-          </a:fontRef>
-        </p:style>
-        <p:txBody>
-          <a:bodyPr rtlCol="0" anchor="ctr"/>
-          <a:lstStyle/>
-          <a:p>
-            <a:pPr algn="ctr"/>
-          </a:p>
-        </p:txBody>
-      </p:sp>
-      <p:sp>
-        <p:nvSpPr>
-          <p:cNvPr id="4" name="Oval 3"/>
-          <p:cNvSpPr/>
-          <p:nvPr/>
-        </p:nvSpPr>
-        <p:spPr>
-          <a:xfrm>
-            <a:off x="10744200" y="1965960"/>
-            <a:ext cx="155448" cy="155448"/>
-          </a:xfrm>
-          <a:prstGeom prst="ellipse">
-            <a:avLst/>
-          </a:prstGeom>
-          <a:solidFill>
-            <a:srgbClr val="CBE7DF"/>
-          </a:solidFill>
-          <a:ln>
-            <a:noFill/>
-          </a:ln>
-          <a:effectLst/>
-        </p:spPr>
-        <p:style>
-          <a:lnRef idx="1">
-            <a:schemeClr val="accent1"/>
-          </a:lnRef>
-          <a:fillRef idx="3">
-            <a:schemeClr val="accent1"/>
-          </a:fillRef>
-          <a:effectRef idx="2">
-            <a:schemeClr val="accent1"/>
-          </a:effectRef>
-          <a:fontRef idx="minor">
-            <a:schemeClr val="lt1"/>
-          </a:fontRef>
-        </p:style>
-        <p:txBody>
-          <a:bodyPr rtlCol="0" anchor="ctr"/>
-          <a:lstStyle/>
-          <a:p>
-            <a:pPr algn="ctr"/>
-          </a:p>
-        </p:txBody>
-      </p:sp>
-      <p:sp>
-        <p:nvSpPr>
-          <p:cNvPr id="5" name="Oval 4"/>
-          <p:cNvSpPr/>
-          <p:nvPr/>
-        </p:nvSpPr>
-        <p:spPr>
-          <a:xfrm>
-            <a:off x="11292840" y="2331720"/>
-            <a:ext cx="100584" cy="100584"/>
-          </a:xfrm>
-          <a:prstGeom prst="ellipse">
-            <a:avLst/>
-          </a:prstGeom>
-          <a:solidFill>
-            <a:srgbClr val="CBE7DF"/>
-          </a:solidFill>
-          <a:ln>
-            <a:noFill/>
-          </a:ln>
-          <a:effectLst/>
-        </p:spPr>
-        <p:style>
-          <a:lnRef idx="1">
-            <a:schemeClr val="accent1"/>
-          </a:lnRef>
-          <a:fillRef idx="3">
-            <a:schemeClr val="accent1"/>
-          </a:fillRef>
-          <a:effectRef idx="2">
-            <a:schemeClr val="accent1"/>
-          </a:effectRef>
-          <a:fontRef idx="minor">
-            <a:schemeClr val="lt1"/>
-          </a:fontRef>
-        </p:style>
-        <p:txBody>
-          <a:bodyPr rtlCol="0" anchor="ctr"/>
-          <a:lstStyle/>
-          <a:p>
-            <a:pPr algn="ctr"/>
-          </a:p>
-        </p:txBody>
-      </p:sp>
-      <p:sp>
-        <p:nvSpPr>
-          <p:cNvPr id="6" name="Oval 5"/>
-          <p:cNvSpPr/>
-          <p:nvPr/>
-        </p:nvSpPr>
-        <p:spPr>
-          <a:xfrm>
-            <a:off x="10378440" y="1691640"/>
-            <a:ext cx="155448" cy="155448"/>
-          </a:xfrm>
-          <a:prstGeom prst="ellipse">
-            <a:avLst/>
-          </a:prstGeom>
-          <a:solidFill>
-            <a:srgbClr val="CBE7DF"/>
-          </a:solidFill>
-          <a:ln>
-            <a:noFill/>
-          </a:ln>
-          <a:effectLst/>
-        </p:spPr>
-        <p:style>
-          <a:lnRef idx="1">
-            <a:schemeClr val="accent1"/>
-          </a:lnRef>
-          <a:fillRef idx="3">
-            <a:schemeClr val="accent1"/>
-          </a:fillRef>
-          <a:effectRef idx="2">
-            <a:schemeClr val="accent1"/>
-          </a:effectRef>
-          <a:fontRef idx="minor">
-            <a:schemeClr val="lt1"/>
-          </a:fontRef>
-        </p:style>
-        <p:txBody>
-          <a:bodyPr rtlCol="0" anchor="ctr"/>
-          <a:lstStyle/>
-          <a:p>
-            <a:pPr algn="ctr"/>
-          </a:p>
-        </p:txBody>
-      </p:sp>
-      <p:cxnSp>
-        <p:nvCxnSpPr>
-          <p:cNvPr id="7" name="Connector 6"/>
-          <p:cNvCxnSpPr/>
-          <p:nvPr/>
-        </p:nvCxnSpPr>
-        <p:spPr>
-          <a:xfrm>
-            <a:off x="10689336" y="996696"/>
-            <a:ext cx="548640" cy="502920"/>
-          </a:xfrm>
-          <a:prstGeom prst="line">
-            <a:avLst/>
-          </a:prstGeom>
-          <a:ln w="12700">
-            <a:solidFill>
-              <a:srgbClr val="D7EAE4"/>
-            </a:solidFill>
-          </a:ln>
-        </p:spPr>
-        <p:style>
-          <a:lnRef idx="2">
-            <a:schemeClr val="accent1"/>
-          </a:lnRef>
-          <a:fillRef idx="0">
-            <a:schemeClr val="accent1"/>
-          </a:fillRef>
-          <a:effectRef idx="1">
-            <a:schemeClr val="accent1"/>
-          </a:effectRef>
-          <a:fontRef idx="minor">
-            <a:schemeClr val="tx1"/>
-          </a:fontRef>
-        </p:style>
-      </p:cxnSp>
-      <p:cxnSp>
-        <p:nvCxnSpPr>
-          <p:cNvPr id="8" name="Connector 7"/>
-          <p:cNvCxnSpPr/>
-          <p:nvPr/>
-        </p:nvCxnSpPr>
-        <p:spPr>
-          <a:xfrm flipH="1">
-            <a:off x="10826496" y="1499616"/>
-            <a:ext cx="411480" cy="548639"/>
-          </a:xfrm>
-          <a:prstGeom prst="line">
-            <a:avLst/>
-          </a:prstGeom>
-          <a:ln w="12700">
-            <a:solidFill>
-              <a:srgbClr val="D7EAE4"/>
-            </a:solidFill>
-          </a:ln>
-        </p:spPr>
-        <p:style>
-          <a:lnRef idx="2">
-            <a:schemeClr val="accent1"/>
-          </a:lnRef>
-          <a:fillRef idx="0">
-            <a:schemeClr val="accent1"/>
-          </a:fillRef>
-          <a:effectRef idx="1">
-            <a:schemeClr val="accent1"/>
-          </a:effectRef>
-          <a:fontRef idx="minor">
-            <a:schemeClr val="tx1"/>
-          </a:fontRef>
-        </p:style>
-      </p:cxnSp>
-      <p:cxnSp>
-        <p:nvCxnSpPr>
-          <p:cNvPr id="9" name="Connector 8"/>
-          <p:cNvCxnSpPr/>
-          <p:nvPr/>
-        </p:nvCxnSpPr>
-        <p:spPr>
-          <a:xfrm>
-            <a:off x="10826496" y="2048255"/>
-            <a:ext cx="548640" cy="365760"/>
-          </a:xfrm>
-          <a:prstGeom prst="line">
-            <a:avLst/>
-          </a:prstGeom>
-          <a:ln w="12700">
-            <a:solidFill>
-              <a:srgbClr val="D7EAE4"/>
-            </a:solidFill>
-          </a:ln>
-        </p:spPr>
-        <p:style>
-          <a:lnRef idx="2">
-            <a:schemeClr val="accent1"/>
-          </a:lnRef>
-          <a:fillRef idx="0">
-            <a:schemeClr val="accent1"/>
-          </a:fillRef>
-          <a:effectRef idx="1">
-            <a:schemeClr val="accent1"/>
-          </a:effectRef>
-          <a:fontRef idx="minor">
-            <a:schemeClr val="tx1"/>
-          </a:fontRef>
-        </p:style>
-      </p:cxnSp>
-      <p:cxnSp>
-        <p:nvCxnSpPr>
-          <p:cNvPr id="10" name="Connector 9"/>
-          <p:cNvCxnSpPr/>
-          <p:nvPr/>
-        </p:nvCxnSpPr>
-        <p:spPr>
-          <a:xfrm flipH="1" flipV="1">
-            <a:off x="10460736" y="1773936"/>
-            <a:ext cx="914400" cy="640079"/>
-          </a:xfrm>
-          <a:prstGeom prst="line">
-            <a:avLst/>
-          </a:prstGeom>
-          <a:ln w="12700">
-            <a:solidFill>
-              <a:srgbClr val="D7EAE4"/>
-            </a:solidFill>
-          </a:ln>
-        </p:spPr>
-        <p:style>
-          <a:lnRef idx="2">
-            <a:schemeClr val="accent1"/>
-          </a:lnRef>
-          <a:fillRef idx="0">
-            <a:schemeClr val="accent1"/>
-          </a:fillRef>
-          <a:effectRef idx="1">
-            <a:schemeClr val="accent1"/>
-          </a:effectRef>
-          <a:fontRef idx="minor">
-            <a:schemeClr val="tx1"/>
-          </a:fontRef>
-        </p:style>
-      </p:cxnSp>
-      <p:sp>
-        <p:nvSpPr>
-          <p:cNvPr id="11" name="Rectangle 10"/>
-          <p:cNvSpPr/>
-          <p:nvPr/>
-        </p:nvSpPr>
-        <p:spPr>
-          <a:xfrm>
-            <a:off x="0" y="0"/>
-            <a:ext cx="12191695" cy="786384"/>
-          </a:xfrm>
-          <a:prstGeom prst="rect">
-            <a:avLst/>
-          </a:prstGeom>
-          <a:solidFill>
-            <a:srgbClr val="0E4F45"/>
-          </a:solidFill>
-          <a:ln>
-            <a:noFill/>
-          </a:ln>
-          <a:effectLst/>
-        </p:spPr>
-        <p:style>
-          <a:lnRef idx="1">
-            <a:schemeClr val="accent1"/>
-          </a:lnRef>
-          <a:fillRef idx="3">
-            <a:schemeClr val="accent1"/>
-          </a:fillRef>
-          <a:effectRef idx="2">
-            <a:schemeClr val="accent1"/>
-          </a:effectRef>
-          <a:fontRef idx="minor">
-            <a:schemeClr val="lt1"/>
-          </a:fontRef>
-        </p:style>
-        <p:txBody>
-          <a:bodyPr rtlCol="0" anchor="ctr"/>
-          <a:lstStyle/>
-          <a:p>
-            <a:pPr algn="ctr"/>
-          </a:p>
-        </p:txBody>
-      </p:sp>
-      <p:sp>
-        <p:nvSpPr>
-          <p:cNvPr id="12" name="Rectangle 11"/>
-          <p:cNvSpPr/>
-          <p:nvPr/>
-        </p:nvSpPr>
-        <p:spPr>
-          <a:xfrm>
-            <a:off x="0" y="786384"/>
-            <a:ext cx="12191695" cy="36576"/>
-          </a:xfrm>
-          <a:prstGeom prst="rect">
-            <a:avLst/>
-          </a:prstGeom>
-          <a:solidFill>
-            <a:srgbClr val="E8710A"/>
-          </a:solidFill>
-          <a:ln>
-            <a:noFill/>
-          </a:ln>
-          <a:effectLst/>
-        </p:spPr>
-        <p:style>
-          <a:lnRef idx="1">
-            <a:schemeClr val="accent1"/>
-          </a:lnRef>
-          <a:fillRef idx="3">
-            <a:schemeClr val="accent1"/>
-          </a:fillRef>
-          <a:effectRef idx="2">
-            <a:schemeClr val="accent1"/>
-          </a:effectRef>
-          <a:fontRef idx="minor">
-            <a:schemeClr val="lt1"/>
-          </a:fontRef>
-        </p:style>
-        <p:txBody>
-          <a:bodyPr rtlCol="0" anchor="ctr"/>
-          <a:lstStyle/>
-          <a:p>
-            <a:pPr algn="ctr"/>
-          </a:p>
-        </p:txBody>
-      </p:sp>
-      <p:sp>
-        <p:nvSpPr>
-          <p:cNvPr id="13" name="TextBox 12"/>
+          <p:cNvPr id="6" name="TextBox 5"/>
           <p:cNvSpPr txBox="1"/>
           <p:nvPr/>
         </p:nvSpPr>
         <p:spPr>
           <a:xfrm>
-            <a:off x="548640" y="128016"/>
-            <a:ext cx="8442656" cy="530352"/>
+            <a:off x="548640" y="365760"/>
+            <a:ext cx="1865376" cy="548640"/>
           </a:xfrm>
           <a:prstGeom prst="rect">
             <a:avLst/>
@@ -5762,19 +5489,19 @@
           </a:bodyPr>
           <a:lstStyle/>
           <a:p>
-            <a:pPr algn="l">
+            <a:pPr algn="ctr">
               <a:lnSpc>
                 <a:spcPct val="130000"/>
               </a:lnSpc>
-              <a:defRPr sz="2800"/>
+              <a:defRPr sz="2300"/>
             </a:pPr>
             <a:r>
-              <a:rPr sz="2800" b="1" u="none">
+              <a:rPr sz="2300" b="1" u="none">
                 <a:solidFill>
                   <a:srgbClr val="FFFFFF"/>
                 </a:solidFill>
                 <a:latin typeface="Times New Roman"/>
-                <a:ea typeface="Noto Sans CJK SC"/>
+                <a:ea typeface="Noto Serif CJK SC"/>
               </a:rPr>
               <a:t>学习目标</a:t>
             </a:r>
@@ -5783,7 +5510,7 @@
       </p:sp>
       <p:sp>
         <p:nvSpPr>
-          <p:cNvPr id="14" name="TextBox 13"/>
+          <p:cNvPr id="7" name="TextBox 6"/>
           <p:cNvSpPr txBox="1"/>
           <p:nvPr/>
         </p:nvSpPr>
@@ -5812,20 +5539,20 @@
             <a:r>
               <a:rPr sz="2600" b="0" u="none">
                 <a:solidFill>
-                  <a:srgbClr val="E8710A"/>
+                  <a:srgbClr val="2E75B6"/>
                 </a:solidFill>
                 <a:latin typeface="Times New Roman"/>
-                <a:ea typeface="Noto Sans CJK SC"/>
+                <a:ea typeface="Noto Serif CJK SC"/>
               </a:rPr>
               <a:t>▪ </a:t>
             </a:r>
             <a:r>
               <a:rPr sz="2600" b="0" u="none">
                 <a:solidFill>
-                  <a:srgbClr val="122A26"/>
+                  <a:srgbClr val="1C2B3A"/>
                 </a:solidFill>
                 <a:latin typeface="Times New Roman"/>
-                <a:ea typeface="Noto Sans CJK SC"/>
+                <a:ea typeface="Noto Serif CJK SC"/>
               </a:rPr>
               <a:t>理解反应热、焓变的概念，会从宏观与微观两个角度分析吸放热。</a:t>
             </a:r>
@@ -5842,20 +5569,20 @@
             <a:r>
               <a:rPr sz="2600" b="0" u="none">
                 <a:solidFill>
-                  <a:srgbClr val="E8710A"/>
+                  <a:srgbClr val="2E75B6"/>
                 </a:solidFill>
                 <a:latin typeface="Times New Roman"/>
-                <a:ea typeface="Noto Sans CJK SC"/>
+                <a:ea typeface="Noto Serif CJK SC"/>
               </a:rPr>
               <a:t>▪ </a:t>
             </a:r>
             <a:r>
               <a:rPr sz="2600" b="0" u="none">
                 <a:solidFill>
-                  <a:srgbClr val="122A26"/>
+                  <a:srgbClr val="1C2B3A"/>
                 </a:solidFill>
                 <a:latin typeface="Times New Roman"/>
-                <a:ea typeface="Noto Sans CJK SC"/>
+                <a:ea typeface="Noto Serif CJK SC"/>
               </a:rPr>
               <a:t>能规范书写热化学方程式（状态、符号、单位、化学计量数）。</a:t>
             </a:r>
@@ -5864,20 +5591,22 @@
       </p:sp>
       <p:sp>
         <p:nvSpPr>
-          <p:cNvPr id="15" name="Rectangle 14"/>
+          <p:cNvPr id="8" name="Rounded Rectangle 7"/>
           <p:cNvSpPr/>
           <p:nvPr/>
         </p:nvSpPr>
         <p:spPr>
           <a:xfrm>
-            <a:off x="0" y="6739128"/>
-            <a:ext cx="12191695" cy="118872"/>
-          </a:xfrm>
-          <a:prstGeom prst="rect">
-            <a:avLst/>
+            <a:off x="10600639" y="6382512"/>
+            <a:ext cx="310896" cy="292608"/>
+          </a:xfrm>
+          <a:prstGeom prst="roundRect">
+            <a:avLst>
+              <a:gd name="adj" fmla="val 18000"/>
+            </a:avLst>
           </a:prstGeom>
           <a:solidFill>
-            <a:srgbClr val="E8710A"/>
+            <a:srgbClr val="E4E9F0"/>
           </a:solidFill>
           <a:ln>
             <a:noFill/>
@@ -5908,14 +5637,14 @@
       </p:sp>
       <p:sp>
         <p:nvSpPr>
-          <p:cNvPr id="16" name="TextBox 15"/>
+          <p:cNvPr id="9" name="TextBox 8"/>
           <p:cNvSpPr txBox="1"/>
           <p:nvPr/>
         </p:nvSpPr>
         <p:spPr>
           <a:xfrm>
-            <a:off x="548640" y="6345936"/>
-            <a:ext cx="8595360" cy="274320"/>
+            <a:off x="10600639" y="6400800"/>
+            <a:ext cx="310896" cy="274320"/>
           </a:xfrm>
           <a:prstGeom prst="rect">
             <a:avLst/>
@@ -5923,7 +5652,222 @@
           <a:noFill/>
         </p:spPr>
         <p:txBody>
-          <a:bodyPr wrap="square" anchor="t" lIns="54864" rIns="54864" tIns="0" bIns="0">
+          <a:bodyPr wrap="square" anchor="ctr" lIns="54864" rIns="54864" tIns="0" bIns="0">
+            <a:spAutoFit/>
+          </a:bodyPr>
+          <a:lstStyle/>
+          <a:p>
+            <a:pPr algn="ctr">
+              <a:lnSpc>
+                <a:spcPct val="130000"/>
+              </a:lnSpc>
+              <a:defRPr sz="1000"/>
+            </a:pPr>
+            <a:r>
+              <a:rPr sz="1000" b="0" u="none">
+                <a:solidFill>
+                  <a:srgbClr val="6B7785"/>
+                </a:solidFill>
+                <a:latin typeface="Times New Roman"/>
+                <a:ea typeface="Noto Serif CJK SC"/>
+              </a:rPr>
+              <a:t>‹</a:t>
+            </a:r>
+          </a:p>
+        </p:txBody>
+      </p:sp>
+      <p:sp>
+        <p:nvSpPr>
+          <p:cNvPr id="10" name="Rounded Rectangle 9"/>
+          <p:cNvSpPr/>
+          <p:nvPr/>
+        </p:nvSpPr>
+        <p:spPr>
+          <a:xfrm>
+            <a:off x="10966399" y="6382512"/>
+            <a:ext cx="310896" cy="292608"/>
+          </a:xfrm>
+          <a:prstGeom prst="roundRect">
+            <a:avLst>
+              <a:gd name="adj" fmla="val 18000"/>
+            </a:avLst>
+          </a:prstGeom>
+          <a:solidFill>
+            <a:srgbClr val="2E75B6"/>
+          </a:solidFill>
+          <a:ln>
+            <a:noFill/>
+          </a:ln>
+          <a:effectLst/>
+        </p:spPr>
+        <p:style>
+          <a:lnRef idx="1">
+            <a:schemeClr val="accent1"/>
+          </a:lnRef>
+          <a:fillRef idx="3">
+            <a:schemeClr val="accent1"/>
+          </a:fillRef>
+          <a:effectRef idx="2">
+            <a:schemeClr val="accent1"/>
+          </a:effectRef>
+          <a:fontRef idx="minor">
+            <a:schemeClr val="lt1"/>
+          </a:fontRef>
+        </p:style>
+        <p:txBody>
+          <a:bodyPr rtlCol="0" anchor="ctr"/>
+          <a:lstStyle/>
+          <a:p>
+            <a:pPr algn="ctr"/>
+          </a:p>
+        </p:txBody>
+      </p:sp>
+      <p:sp>
+        <p:nvSpPr>
+          <p:cNvPr id="11" name="TextBox 10"/>
+          <p:cNvSpPr txBox="1"/>
+          <p:nvPr/>
+        </p:nvSpPr>
+        <p:spPr>
+          <a:xfrm>
+            <a:off x="10966399" y="6400800"/>
+            <a:ext cx="310896" cy="274320"/>
+          </a:xfrm>
+          <a:prstGeom prst="rect">
+            <a:avLst/>
+          </a:prstGeom>
+          <a:noFill/>
+        </p:spPr>
+        <p:txBody>
+          <a:bodyPr wrap="square" anchor="ctr" lIns="54864" rIns="54864" tIns="0" bIns="0">
+            <a:spAutoFit/>
+          </a:bodyPr>
+          <a:lstStyle/>
+          <a:p>
+            <a:pPr algn="ctr">
+              <a:lnSpc>
+                <a:spcPct val="130000"/>
+              </a:lnSpc>
+              <a:defRPr sz="1000"/>
+            </a:pPr>
+            <a:r>
+              <a:rPr sz="1000" b="1" u="none">
+                <a:solidFill>
+                  <a:srgbClr val="FFFFFF"/>
+                </a:solidFill>
+                <a:latin typeface="Times New Roman"/>
+                <a:ea typeface="Noto Serif CJK SC"/>
+              </a:rPr>
+              <a:t>3</a:t>
+            </a:r>
+          </a:p>
+        </p:txBody>
+      </p:sp>
+      <p:sp>
+        <p:nvSpPr>
+          <p:cNvPr id="12" name="Rounded Rectangle 11"/>
+          <p:cNvSpPr/>
+          <p:nvPr/>
+        </p:nvSpPr>
+        <p:spPr>
+          <a:xfrm>
+            <a:off x="11332159" y="6382512"/>
+            <a:ext cx="310896" cy="292608"/>
+          </a:xfrm>
+          <a:prstGeom prst="roundRect">
+            <a:avLst>
+              <a:gd name="adj" fmla="val 18000"/>
+            </a:avLst>
+          </a:prstGeom>
+          <a:solidFill>
+            <a:srgbClr val="E4E9F0"/>
+          </a:solidFill>
+          <a:ln>
+            <a:noFill/>
+          </a:ln>
+          <a:effectLst/>
+        </p:spPr>
+        <p:style>
+          <a:lnRef idx="1">
+            <a:schemeClr val="accent1"/>
+          </a:lnRef>
+          <a:fillRef idx="3">
+            <a:schemeClr val="accent1"/>
+          </a:fillRef>
+          <a:effectRef idx="2">
+            <a:schemeClr val="accent1"/>
+          </a:effectRef>
+          <a:fontRef idx="minor">
+            <a:schemeClr val="lt1"/>
+          </a:fontRef>
+        </p:style>
+        <p:txBody>
+          <a:bodyPr rtlCol="0" anchor="ctr"/>
+          <a:lstStyle/>
+          <a:p>
+            <a:pPr algn="ctr"/>
+          </a:p>
+        </p:txBody>
+      </p:sp>
+      <p:sp>
+        <p:nvSpPr>
+          <p:cNvPr id="13" name="TextBox 12"/>
+          <p:cNvSpPr txBox="1"/>
+          <p:nvPr/>
+        </p:nvSpPr>
+        <p:spPr>
+          <a:xfrm>
+            <a:off x="11332159" y="6400800"/>
+            <a:ext cx="310896" cy="274320"/>
+          </a:xfrm>
+          <a:prstGeom prst="rect">
+            <a:avLst/>
+          </a:prstGeom>
+          <a:noFill/>
+        </p:spPr>
+        <p:txBody>
+          <a:bodyPr wrap="square" anchor="ctr" lIns="54864" rIns="54864" tIns="0" bIns="0">
+            <a:spAutoFit/>
+          </a:bodyPr>
+          <a:lstStyle/>
+          <a:p>
+            <a:pPr algn="ctr">
+              <a:lnSpc>
+                <a:spcPct val="130000"/>
+              </a:lnSpc>
+              <a:defRPr sz="1000"/>
+            </a:pPr>
+            <a:r>
+              <a:rPr sz="1000" b="0" u="none">
+                <a:solidFill>
+                  <a:srgbClr val="6B7785"/>
+                </a:solidFill>
+                <a:latin typeface="Times New Roman"/>
+                <a:ea typeface="Noto Serif CJK SC"/>
+              </a:rPr>
+              <a:t>›</a:t>
+            </a:r>
+          </a:p>
+        </p:txBody>
+      </p:sp>
+      <p:sp>
+        <p:nvSpPr>
+          <p:cNvPr id="14" name="TextBox 13"/>
+          <p:cNvSpPr txBox="1"/>
+          <p:nvPr/>
+        </p:nvSpPr>
+        <p:spPr>
+          <a:xfrm>
+            <a:off x="548640" y="6382512"/>
+            <a:ext cx="7498079" cy="274320"/>
+          </a:xfrm>
+          <a:prstGeom prst="rect">
+            <a:avLst/>
+          </a:prstGeom>
+          <a:noFill/>
+        </p:spPr>
+        <p:txBody>
+          <a:bodyPr wrap="square" anchor="ctr" lIns="54864" rIns="54864" tIns="0" bIns="0">
             <a:spAutoFit/>
           </a:bodyPr>
           <a:lstStyle/>
@@ -5940,50 +5884,9 @@
                   <a:srgbClr val="8A94A6"/>
                 </a:solidFill>
                 <a:latin typeface="Times New Roman"/>
-                <a:ea typeface="Noto Sans CJK SC"/>
+                <a:ea typeface="Noto Serif CJK SC"/>
               </a:rPr>
               <a:t>胶州四中 · 14. 反应热 热化学方程式</a:t>
-            </a:r>
-          </a:p>
-        </p:txBody>
-      </p:sp>
-      <p:sp>
-        <p:nvSpPr>
-          <p:cNvPr id="17" name="TextBox 16"/>
-          <p:cNvSpPr txBox="1"/>
-          <p:nvPr/>
-        </p:nvSpPr>
-        <p:spPr>
-          <a:xfrm>
-            <a:off x="11048695" y="6345936"/>
-            <a:ext cx="685800" cy="274320"/>
-          </a:xfrm>
-          <a:prstGeom prst="rect">
-            <a:avLst/>
-          </a:prstGeom>
-          <a:noFill/>
-        </p:spPr>
-        <p:txBody>
-          <a:bodyPr wrap="square" anchor="t" lIns="54864" rIns="54864" tIns="0" bIns="0">
-            <a:spAutoFit/>
-          </a:bodyPr>
-          <a:lstStyle/>
-          <a:p>
-            <a:pPr algn="r">
-              <a:lnSpc>
-                <a:spcPct val="130000"/>
-              </a:lnSpc>
-              <a:defRPr sz="1000"/>
-            </a:pPr>
-            <a:r>
-              <a:rPr sz="1000" b="0" u="none">
-                <a:solidFill>
-                  <a:srgbClr val="8A94A6"/>
-                </a:solidFill>
-                <a:latin typeface="Times New Roman"/>
-                <a:ea typeface="Noto Sans CJK SC"/>
-              </a:rPr>
-              <a:t>3</a:t>
             </a:r>
           </a:p>
         </p:txBody>
@@ -6014,14 +5917,148 @@
         </p:nvSpPr>
         <p:spPr>
           <a:xfrm>
-            <a:off x="10607040" y="914400"/>
-            <a:ext cx="155448" cy="155448"/>
+            <a:off x="9281160" y="164592"/>
+            <a:ext cx="2651760" cy="2651760"/>
           </a:xfrm>
           <a:prstGeom prst="ellipse">
             <a:avLst/>
           </a:prstGeom>
+          <a:noFill/>
+          <a:ln w="13970">
+            <a:solidFill>
+              <a:srgbClr val="E8EDF2"/>
+            </a:solidFill>
+          </a:ln>
+          <a:effectLst/>
+        </p:spPr>
+        <p:style>
+          <a:lnRef idx="1">
+            <a:schemeClr val="accent1"/>
+          </a:lnRef>
+          <a:fillRef idx="3">
+            <a:schemeClr val="accent1"/>
+          </a:fillRef>
+          <a:effectRef idx="2">
+            <a:schemeClr val="accent1"/>
+          </a:effectRef>
+          <a:fontRef idx="minor">
+            <a:schemeClr val="lt1"/>
+          </a:fontRef>
+        </p:style>
+        <p:txBody>
+          <a:bodyPr rtlCol="0" anchor="ctr"/>
+          <a:lstStyle/>
+          <a:p>
+            <a:pPr algn="ctr"/>
+          </a:p>
+        </p:txBody>
+      </p:sp>
+      <p:sp>
+        <p:nvSpPr>
+          <p:cNvPr id="3" name="Oval 2"/>
+          <p:cNvSpPr/>
+          <p:nvPr/>
+        </p:nvSpPr>
+        <p:spPr>
+          <a:xfrm>
+            <a:off x="9646920" y="502920"/>
+            <a:ext cx="1920240" cy="1920240"/>
+          </a:xfrm>
+          <a:prstGeom prst="ellipse">
+            <a:avLst/>
+          </a:prstGeom>
+          <a:noFill/>
+          <a:ln w="13970">
+            <a:solidFill>
+              <a:srgbClr val="E8EDF2"/>
+            </a:solidFill>
+          </a:ln>
+          <a:effectLst/>
+        </p:spPr>
+        <p:style>
+          <a:lnRef idx="1">
+            <a:schemeClr val="accent1"/>
+          </a:lnRef>
+          <a:fillRef idx="3">
+            <a:schemeClr val="accent1"/>
+          </a:fillRef>
+          <a:effectRef idx="2">
+            <a:schemeClr val="accent1"/>
+          </a:effectRef>
+          <a:fontRef idx="minor">
+            <a:schemeClr val="lt1"/>
+          </a:fontRef>
+        </p:style>
+        <p:txBody>
+          <a:bodyPr rtlCol="0" anchor="ctr"/>
+          <a:lstStyle/>
+          <a:p>
+            <a:pPr algn="ctr"/>
+          </a:p>
+        </p:txBody>
+      </p:sp>
+      <p:sp>
+        <p:nvSpPr>
+          <p:cNvPr id="4" name="Oval 3"/>
+          <p:cNvSpPr/>
+          <p:nvPr/>
+        </p:nvSpPr>
+        <p:spPr>
+          <a:xfrm>
+            <a:off x="10012680" y="868680"/>
+            <a:ext cx="1188720" cy="1188720"/>
+          </a:xfrm>
+          <a:prstGeom prst="ellipse">
+            <a:avLst/>
+          </a:prstGeom>
+          <a:noFill/>
+          <a:ln w="13970">
+            <a:solidFill>
+              <a:srgbClr val="E8EDF2"/>
+            </a:solidFill>
+          </a:ln>
+          <a:effectLst/>
+        </p:spPr>
+        <p:style>
+          <a:lnRef idx="1">
+            <a:schemeClr val="accent1"/>
+          </a:lnRef>
+          <a:fillRef idx="3">
+            <a:schemeClr val="accent1"/>
+          </a:fillRef>
+          <a:effectRef idx="2">
+            <a:schemeClr val="accent1"/>
+          </a:effectRef>
+          <a:fontRef idx="minor">
+            <a:schemeClr val="lt1"/>
+          </a:fontRef>
+        </p:style>
+        <p:txBody>
+          <a:bodyPr rtlCol="0" anchor="ctr"/>
+          <a:lstStyle/>
+          <a:p>
+            <a:pPr algn="ctr"/>
+          </a:p>
+        </p:txBody>
+      </p:sp>
+      <p:sp>
+        <p:nvSpPr>
+          <p:cNvPr id="5" name="Rounded Rectangle 4"/>
+          <p:cNvSpPr/>
+          <p:nvPr/>
+        </p:nvSpPr>
+        <p:spPr>
+          <a:xfrm>
+            <a:off x="548640" y="347472"/>
+            <a:ext cx="3675888" cy="585216"/>
+          </a:xfrm>
+          <a:prstGeom prst="roundRect">
+            <a:avLst>
+              <a:gd name="adj" fmla="val 32000"/>
+            </a:avLst>
+          </a:prstGeom>
           <a:solidFill>
-            <a:srgbClr val="CBE7DF"/>
+            <a:srgbClr val="2E75B6"/>
           </a:solidFill>
           <a:ln>
             <a:noFill/>
@@ -6052,418 +6089,14 @@
       </p:sp>
       <p:sp>
         <p:nvSpPr>
-          <p:cNvPr id="3" name="Oval 2"/>
-          <p:cNvSpPr/>
-          <p:nvPr/>
-        </p:nvSpPr>
-        <p:spPr>
-          <a:xfrm>
-            <a:off x="11155680" y="1417320"/>
-            <a:ext cx="100584" cy="100584"/>
-          </a:xfrm>
-          <a:prstGeom prst="ellipse">
-            <a:avLst/>
-          </a:prstGeom>
-          <a:solidFill>
-            <a:srgbClr val="CBE7DF"/>
-          </a:solidFill>
-          <a:ln>
-            <a:noFill/>
-          </a:ln>
-          <a:effectLst/>
-        </p:spPr>
-        <p:style>
-          <a:lnRef idx="1">
-            <a:schemeClr val="accent1"/>
-          </a:lnRef>
-          <a:fillRef idx="3">
-            <a:schemeClr val="accent1"/>
-          </a:fillRef>
-          <a:effectRef idx="2">
-            <a:schemeClr val="accent1"/>
-          </a:effectRef>
-          <a:fontRef idx="minor">
-            <a:schemeClr val="lt1"/>
-          </a:fontRef>
-        </p:style>
-        <p:txBody>
-          <a:bodyPr rtlCol="0" anchor="ctr"/>
-          <a:lstStyle/>
-          <a:p>
-            <a:pPr algn="ctr"/>
-          </a:p>
-        </p:txBody>
-      </p:sp>
-      <p:sp>
-        <p:nvSpPr>
-          <p:cNvPr id="4" name="Oval 3"/>
-          <p:cNvSpPr/>
-          <p:nvPr/>
-        </p:nvSpPr>
-        <p:spPr>
-          <a:xfrm>
-            <a:off x="10744200" y="1965960"/>
-            <a:ext cx="155448" cy="155448"/>
-          </a:xfrm>
-          <a:prstGeom prst="ellipse">
-            <a:avLst/>
-          </a:prstGeom>
-          <a:solidFill>
-            <a:srgbClr val="CBE7DF"/>
-          </a:solidFill>
-          <a:ln>
-            <a:noFill/>
-          </a:ln>
-          <a:effectLst/>
-        </p:spPr>
-        <p:style>
-          <a:lnRef idx="1">
-            <a:schemeClr val="accent1"/>
-          </a:lnRef>
-          <a:fillRef idx="3">
-            <a:schemeClr val="accent1"/>
-          </a:fillRef>
-          <a:effectRef idx="2">
-            <a:schemeClr val="accent1"/>
-          </a:effectRef>
-          <a:fontRef idx="minor">
-            <a:schemeClr val="lt1"/>
-          </a:fontRef>
-        </p:style>
-        <p:txBody>
-          <a:bodyPr rtlCol="0" anchor="ctr"/>
-          <a:lstStyle/>
-          <a:p>
-            <a:pPr algn="ctr"/>
-          </a:p>
-        </p:txBody>
-      </p:sp>
-      <p:sp>
-        <p:nvSpPr>
-          <p:cNvPr id="5" name="Oval 4"/>
-          <p:cNvSpPr/>
-          <p:nvPr/>
-        </p:nvSpPr>
-        <p:spPr>
-          <a:xfrm>
-            <a:off x="11292840" y="2331720"/>
-            <a:ext cx="100584" cy="100584"/>
-          </a:xfrm>
-          <a:prstGeom prst="ellipse">
-            <a:avLst/>
-          </a:prstGeom>
-          <a:solidFill>
-            <a:srgbClr val="CBE7DF"/>
-          </a:solidFill>
-          <a:ln>
-            <a:noFill/>
-          </a:ln>
-          <a:effectLst/>
-        </p:spPr>
-        <p:style>
-          <a:lnRef idx="1">
-            <a:schemeClr val="accent1"/>
-          </a:lnRef>
-          <a:fillRef idx="3">
-            <a:schemeClr val="accent1"/>
-          </a:fillRef>
-          <a:effectRef idx="2">
-            <a:schemeClr val="accent1"/>
-          </a:effectRef>
-          <a:fontRef idx="minor">
-            <a:schemeClr val="lt1"/>
-          </a:fontRef>
-        </p:style>
-        <p:txBody>
-          <a:bodyPr rtlCol="0" anchor="ctr"/>
-          <a:lstStyle/>
-          <a:p>
-            <a:pPr algn="ctr"/>
-          </a:p>
-        </p:txBody>
-      </p:sp>
-      <p:sp>
-        <p:nvSpPr>
-          <p:cNvPr id="6" name="Oval 5"/>
-          <p:cNvSpPr/>
-          <p:nvPr/>
-        </p:nvSpPr>
-        <p:spPr>
-          <a:xfrm>
-            <a:off x="10378440" y="1691640"/>
-            <a:ext cx="155448" cy="155448"/>
-          </a:xfrm>
-          <a:prstGeom prst="ellipse">
-            <a:avLst/>
-          </a:prstGeom>
-          <a:solidFill>
-            <a:srgbClr val="CBE7DF"/>
-          </a:solidFill>
-          <a:ln>
-            <a:noFill/>
-          </a:ln>
-          <a:effectLst/>
-        </p:spPr>
-        <p:style>
-          <a:lnRef idx="1">
-            <a:schemeClr val="accent1"/>
-          </a:lnRef>
-          <a:fillRef idx="3">
-            <a:schemeClr val="accent1"/>
-          </a:fillRef>
-          <a:effectRef idx="2">
-            <a:schemeClr val="accent1"/>
-          </a:effectRef>
-          <a:fontRef idx="minor">
-            <a:schemeClr val="lt1"/>
-          </a:fontRef>
-        </p:style>
-        <p:txBody>
-          <a:bodyPr rtlCol="0" anchor="ctr"/>
-          <a:lstStyle/>
-          <a:p>
-            <a:pPr algn="ctr"/>
-          </a:p>
-        </p:txBody>
-      </p:sp>
-      <p:cxnSp>
-        <p:nvCxnSpPr>
-          <p:cNvPr id="7" name="Connector 6"/>
-          <p:cNvCxnSpPr/>
-          <p:nvPr/>
-        </p:nvCxnSpPr>
-        <p:spPr>
-          <a:xfrm>
-            <a:off x="10689336" y="996696"/>
-            <a:ext cx="548640" cy="502920"/>
-          </a:xfrm>
-          <a:prstGeom prst="line">
-            <a:avLst/>
-          </a:prstGeom>
-          <a:ln w="12700">
-            <a:solidFill>
-              <a:srgbClr val="D7EAE4"/>
-            </a:solidFill>
-          </a:ln>
-        </p:spPr>
-        <p:style>
-          <a:lnRef idx="2">
-            <a:schemeClr val="accent1"/>
-          </a:lnRef>
-          <a:fillRef idx="0">
-            <a:schemeClr val="accent1"/>
-          </a:fillRef>
-          <a:effectRef idx="1">
-            <a:schemeClr val="accent1"/>
-          </a:effectRef>
-          <a:fontRef idx="minor">
-            <a:schemeClr val="tx1"/>
-          </a:fontRef>
-        </p:style>
-      </p:cxnSp>
-      <p:cxnSp>
-        <p:nvCxnSpPr>
-          <p:cNvPr id="8" name="Connector 7"/>
-          <p:cNvCxnSpPr/>
-          <p:nvPr/>
-        </p:nvCxnSpPr>
-        <p:spPr>
-          <a:xfrm flipH="1">
-            <a:off x="10826496" y="1499616"/>
-            <a:ext cx="411480" cy="548639"/>
-          </a:xfrm>
-          <a:prstGeom prst="line">
-            <a:avLst/>
-          </a:prstGeom>
-          <a:ln w="12700">
-            <a:solidFill>
-              <a:srgbClr val="D7EAE4"/>
-            </a:solidFill>
-          </a:ln>
-        </p:spPr>
-        <p:style>
-          <a:lnRef idx="2">
-            <a:schemeClr val="accent1"/>
-          </a:lnRef>
-          <a:fillRef idx="0">
-            <a:schemeClr val="accent1"/>
-          </a:fillRef>
-          <a:effectRef idx="1">
-            <a:schemeClr val="accent1"/>
-          </a:effectRef>
-          <a:fontRef idx="minor">
-            <a:schemeClr val="tx1"/>
-          </a:fontRef>
-        </p:style>
-      </p:cxnSp>
-      <p:cxnSp>
-        <p:nvCxnSpPr>
-          <p:cNvPr id="9" name="Connector 8"/>
-          <p:cNvCxnSpPr/>
-          <p:nvPr/>
-        </p:nvCxnSpPr>
-        <p:spPr>
-          <a:xfrm>
-            <a:off x="10826496" y="2048255"/>
-            <a:ext cx="548640" cy="365760"/>
-          </a:xfrm>
-          <a:prstGeom prst="line">
-            <a:avLst/>
-          </a:prstGeom>
-          <a:ln w="12700">
-            <a:solidFill>
-              <a:srgbClr val="D7EAE4"/>
-            </a:solidFill>
-          </a:ln>
-        </p:spPr>
-        <p:style>
-          <a:lnRef idx="2">
-            <a:schemeClr val="accent1"/>
-          </a:lnRef>
-          <a:fillRef idx="0">
-            <a:schemeClr val="accent1"/>
-          </a:fillRef>
-          <a:effectRef idx="1">
-            <a:schemeClr val="accent1"/>
-          </a:effectRef>
-          <a:fontRef idx="minor">
-            <a:schemeClr val="tx1"/>
-          </a:fontRef>
-        </p:style>
-      </p:cxnSp>
-      <p:cxnSp>
-        <p:nvCxnSpPr>
-          <p:cNvPr id="10" name="Connector 9"/>
-          <p:cNvCxnSpPr/>
-          <p:nvPr/>
-        </p:nvCxnSpPr>
-        <p:spPr>
-          <a:xfrm flipH="1" flipV="1">
-            <a:off x="10460736" y="1773936"/>
-            <a:ext cx="914400" cy="640079"/>
-          </a:xfrm>
-          <a:prstGeom prst="line">
-            <a:avLst/>
-          </a:prstGeom>
-          <a:ln w="12700">
-            <a:solidFill>
-              <a:srgbClr val="D7EAE4"/>
-            </a:solidFill>
-          </a:ln>
-        </p:spPr>
-        <p:style>
-          <a:lnRef idx="2">
-            <a:schemeClr val="accent1"/>
-          </a:lnRef>
-          <a:fillRef idx="0">
-            <a:schemeClr val="accent1"/>
-          </a:fillRef>
-          <a:effectRef idx="1">
-            <a:schemeClr val="accent1"/>
-          </a:effectRef>
-          <a:fontRef idx="minor">
-            <a:schemeClr val="tx1"/>
-          </a:fontRef>
-        </p:style>
-      </p:cxnSp>
-      <p:sp>
-        <p:nvSpPr>
-          <p:cNvPr id="11" name="Rectangle 10"/>
-          <p:cNvSpPr/>
-          <p:nvPr/>
-        </p:nvSpPr>
-        <p:spPr>
-          <a:xfrm>
-            <a:off x="0" y="0"/>
-            <a:ext cx="12191695" cy="786384"/>
-          </a:xfrm>
-          <a:prstGeom prst="rect">
-            <a:avLst/>
-          </a:prstGeom>
-          <a:solidFill>
-            <a:srgbClr val="0E4F45"/>
-          </a:solidFill>
-          <a:ln>
-            <a:noFill/>
-          </a:ln>
-          <a:effectLst/>
-        </p:spPr>
-        <p:style>
-          <a:lnRef idx="1">
-            <a:schemeClr val="accent1"/>
-          </a:lnRef>
-          <a:fillRef idx="3">
-            <a:schemeClr val="accent1"/>
-          </a:fillRef>
-          <a:effectRef idx="2">
-            <a:schemeClr val="accent1"/>
-          </a:effectRef>
-          <a:fontRef idx="minor">
-            <a:schemeClr val="lt1"/>
-          </a:fontRef>
-        </p:style>
-        <p:txBody>
-          <a:bodyPr rtlCol="0" anchor="ctr"/>
-          <a:lstStyle/>
-          <a:p>
-            <a:pPr algn="ctr"/>
-          </a:p>
-        </p:txBody>
-      </p:sp>
-      <p:sp>
-        <p:nvSpPr>
-          <p:cNvPr id="12" name="Rectangle 11"/>
-          <p:cNvSpPr/>
-          <p:nvPr/>
-        </p:nvSpPr>
-        <p:spPr>
-          <a:xfrm>
-            <a:off x="0" y="786384"/>
-            <a:ext cx="12191695" cy="36576"/>
-          </a:xfrm>
-          <a:prstGeom prst="rect">
-            <a:avLst/>
-          </a:prstGeom>
-          <a:solidFill>
-            <a:srgbClr val="E8710A"/>
-          </a:solidFill>
-          <a:ln>
-            <a:noFill/>
-          </a:ln>
-          <a:effectLst/>
-        </p:spPr>
-        <p:style>
-          <a:lnRef idx="1">
-            <a:schemeClr val="accent1"/>
-          </a:lnRef>
-          <a:fillRef idx="3">
-            <a:schemeClr val="accent1"/>
-          </a:fillRef>
-          <a:effectRef idx="2">
-            <a:schemeClr val="accent1"/>
-          </a:effectRef>
-          <a:fontRef idx="minor">
-            <a:schemeClr val="lt1"/>
-          </a:fontRef>
-        </p:style>
-        <p:txBody>
-          <a:bodyPr rtlCol="0" anchor="ctr"/>
-          <a:lstStyle/>
-          <a:p>
-            <a:pPr algn="ctr"/>
-          </a:p>
-        </p:txBody>
-      </p:sp>
-      <p:sp>
-        <p:nvSpPr>
-          <p:cNvPr id="13" name="TextBox 12"/>
+          <p:cNvPr id="6" name="TextBox 5"/>
           <p:cNvSpPr txBox="1"/>
           <p:nvPr/>
         </p:nvSpPr>
         <p:spPr>
           <a:xfrm>
-            <a:off x="548640" y="128016"/>
-            <a:ext cx="8442656" cy="530352"/>
+            <a:off x="548640" y="365760"/>
+            <a:ext cx="3675888" cy="548640"/>
           </a:xfrm>
           <a:prstGeom prst="rect">
             <a:avLst/>
@@ -6476,19 +6109,19 @@
           </a:bodyPr>
           <a:lstStyle/>
           <a:p>
-            <a:pPr algn="l">
+            <a:pPr algn="ctr">
               <a:lnSpc>
                 <a:spcPct val="130000"/>
               </a:lnSpc>
-              <a:defRPr sz="2800"/>
+              <a:defRPr sz="2300"/>
             </a:pPr>
             <a:r>
-              <a:rPr sz="2800" b="1" u="none">
+              <a:rPr sz="2300" b="1" u="none">
                 <a:solidFill>
                   <a:srgbClr val="FFFFFF"/>
                 </a:solidFill>
                 <a:latin typeface="Times New Roman"/>
-                <a:ea typeface="Noto Sans CJK SC"/>
+                <a:ea typeface="Noto Serif CJK SC"/>
               </a:rPr>
               <a:t>考点一 反应热与焓变</a:t>
             </a:r>
@@ -6497,7 +6130,7 @@
       </p:sp>
       <p:sp>
         <p:nvSpPr>
-          <p:cNvPr id="14" name="TextBox 13"/>
+          <p:cNvPr id="7" name="TextBox 6"/>
           <p:cNvSpPr txBox="1"/>
           <p:nvPr/>
         </p:nvSpPr>
@@ -6526,20 +6159,20 @@
             <a:r>
               <a:rPr sz="2600" b="0" u="none">
                 <a:solidFill>
-                  <a:srgbClr val="E8710A"/>
+                  <a:srgbClr val="2E75B6"/>
                 </a:solidFill>
                 <a:latin typeface="Times New Roman"/>
-                <a:ea typeface="Noto Sans CJK SC"/>
+                <a:ea typeface="Noto Serif CJK SC"/>
               </a:rPr>
               <a:t>▪ </a:t>
             </a:r>
             <a:r>
               <a:rPr sz="2600" b="0" u="none">
                 <a:solidFill>
-                  <a:srgbClr val="122A26"/>
+                  <a:srgbClr val="1C2B3A"/>
                 </a:solidFill>
                 <a:latin typeface="Times New Roman"/>
-                <a:ea typeface="Noto Sans CJK SC"/>
+                <a:ea typeface="Noto Serif CJK SC"/>
               </a:rPr>
               <a:t>判断正误：</a:t>
             </a:r>
@@ -6556,10 +6189,10 @@
             <a:r>
               <a:rPr sz="2600" b="0" u="none">
                 <a:solidFill>
-                  <a:srgbClr val="122A26"/>
+                  <a:srgbClr val="1C2B3A"/>
                 </a:solidFill>
                 <a:latin typeface="Times New Roman"/>
-                <a:ea typeface="Noto Sans CJK SC"/>
+                <a:ea typeface="Noto Serif CJK SC"/>
               </a:rPr>
               <a:t>1. 物质发生化学变化时都伴有能量的变化（　）</a:t>
             </a:r>
@@ -6576,10 +6209,10 @@
             <a:r>
               <a:rPr sz="2600" b="0" u="none">
                 <a:solidFill>
-                  <a:srgbClr val="122A26"/>
+                  <a:srgbClr val="1C2B3A"/>
                 </a:solidFill>
                 <a:latin typeface="Times New Roman"/>
-                <a:ea typeface="Noto Sans CJK SC"/>
+                <a:ea typeface="Noto Serif CJK SC"/>
               </a:rPr>
               <a:t>2. 需要加热才能发生的反应一定是吸热反应（　）</a:t>
             </a:r>
@@ -6596,10 +6229,10 @@
             <a:r>
               <a:rPr sz="2600" b="0" u="none">
                 <a:solidFill>
-                  <a:srgbClr val="122A26"/>
+                  <a:srgbClr val="1C2B3A"/>
                 </a:solidFill>
                 <a:latin typeface="Times New Roman"/>
-                <a:ea typeface="Noto Sans CJK SC"/>
+                <a:ea typeface="Noto Serif CJK SC"/>
               </a:rPr>
               <a:t>3. 放热反应在常温下一定很容易发生（　）</a:t>
             </a:r>
@@ -6608,20 +6241,22 @@
       </p:sp>
       <p:sp>
         <p:nvSpPr>
-          <p:cNvPr id="15" name="Rectangle 14"/>
+          <p:cNvPr id="8" name="Rounded Rectangle 7"/>
           <p:cNvSpPr/>
           <p:nvPr/>
         </p:nvSpPr>
         <p:spPr>
           <a:xfrm>
-            <a:off x="0" y="6739128"/>
-            <a:ext cx="12191695" cy="118872"/>
-          </a:xfrm>
-          <a:prstGeom prst="rect">
-            <a:avLst/>
+            <a:off x="10600639" y="6382512"/>
+            <a:ext cx="310896" cy="292608"/>
+          </a:xfrm>
+          <a:prstGeom prst="roundRect">
+            <a:avLst>
+              <a:gd name="adj" fmla="val 18000"/>
+            </a:avLst>
           </a:prstGeom>
           <a:solidFill>
-            <a:srgbClr val="E8710A"/>
+            <a:srgbClr val="E4E9F0"/>
           </a:solidFill>
           <a:ln>
             <a:noFill/>
@@ -6652,14 +6287,14 @@
       </p:sp>
       <p:sp>
         <p:nvSpPr>
-          <p:cNvPr id="16" name="TextBox 15"/>
+          <p:cNvPr id="9" name="TextBox 8"/>
           <p:cNvSpPr txBox="1"/>
           <p:nvPr/>
         </p:nvSpPr>
         <p:spPr>
           <a:xfrm>
-            <a:off x="548640" y="6345936"/>
-            <a:ext cx="8595360" cy="274320"/>
+            <a:off x="10600639" y="6400800"/>
+            <a:ext cx="310896" cy="274320"/>
           </a:xfrm>
           <a:prstGeom prst="rect">
             <a:avLst/>
@@ -6667,7 +6302,222 @@
           <a:noFill/>
         </p:spPr>
         <p:txBody>
-          <a:bodyPr wrap="square" anchor="t" lIns="54864" rIns="54864" tIns="0" bIns="0">
+          <a:bodyPr wrap="square" anchor="ctr" lIns="54864" rIns="54864" tIns="0" bIns="0">
+            <a:spAutoFit/>
+          </a:bodyPr>
+          <a:lstStyle/>
+          <a:p>
+            <a:pPr algn="ctr">
+              <a:lnSpc>
+                <a:spcPct val="130000"/>
+              </a:lnSpc>
+              <a:defRPr sz="1000"/>
+            </a:pPr>
+            <a:r>
+              <a:rPr sz="1000" b="0" u="none">
+                <a:solidFill>
+                  <a:srgbClr val="6B7785"/>
+                </a:solidFill>
+                <a:latin typeface="Times New Roman"/>
+                <a:ea typeface="Noto Serif CJK SC"/>
+              </a:rPr>
+              <a:t>‹</a:t>
+            </a:r>
+          </a:p>
+        </p:txBody>
+      </p:sp>
+      <p:sp>
+        <p:nvSpPr>
+          <p:cNvPr id="10" name="Rounded Rectangle 9"/>
+          <p:cNvSpPr/>
+          <p:nvPr/>
+        </p:nvSpPr>
+        <p:spPr>
+          <a:xfrm>
+            <a:off x="10966399" y="6382512"/>
+            <a:ext cx="310896" cy="292608"/>
+          </a:xfrm>
+          <a:prstGeom prst="roundRect">
+            <a:avLst>
+              <a:gd name="adj" fmla="val 18000"/>
+            </a:avLst>
+          </a:prstGeom>
+          <a:solidFill>
+            <a:srgbClr val="2E75B6"/>
+          </a:solidFill>
+          <a:ln>
+            <a:noFill/>
+          </a:ln>
+          <a:effectLst/>
+        </p:spPr>
+        <p:style>
+          <a:lnRef idx="1">
+            <a:schemeClr val="accent1"/>
+          </a:lnRef>
+          <a:fillRef idx="3">
+            <a:schemeClr val="accent1"/>
+          </a:fillRef>
+          <a:effectRef idx="2">
+            <a:schemeClr val="accent1"/>
+          </a:effectRef>
+          <a:fontRef idx="minor">
+            <a:schemeClr val="lt1"/>
+          </a:fontRef>
+        </p:style>
+        <p:txBody>
+          <a:bodyPr rtlCol="0" anchor="ctr"/>
+          <a:lstStyle/>
+          <a:p>
+            <a:pPr algn="ctr"/>
+          </a:p>
+        </p:txBody>
+      </p:sp>
+      <p:sp>
+        <p:nvSpPr>
+          <p:cNvPr id="11" name="TextBox 10"/>
+          <p:cNvSpPr txBox="1"/>
+          <p:nvPr/>
+        </p:nvSpPr>
+        <p:spPr>
+          <a:xfrm>
+            <a:off x="10966399" y="6400800"/>
+            <a:ext cx="310896" cy="274320"/>
+          </a:xfrm>
+          <a:prstGeom prst="rect">
+            <a:avLst/>
+          </a:prstGeom>
+          <a:noFill/>
+        </p:spPr>
+        <p:txBody>
+          <a:bodyPr wrap="square" anchor="ctr" lIns="54864" rIns="54864" tIns="0" bIns="0">
+            <a:spAutoFit/>
+          </a:bodyPr>
+          <a:lstStyle/>
+          <a:p>
+            <a:pPr algn="ctr">
+              <a:lnSpc>
+                <a:spcPct val="130000"/>
+              </a:lnSpc>
+              <a:defRPr sz="1000"/>
+            </a:pPr>
+            <a:r>
+              <a:rPr sz="1000" b="1" u="none">
+                <a:solidFill>
+                  <a:srgbClr val="FFFFFF"/>
+                </a:solidFill>
+                <a:latin typeface="Times New Roman"/>
+                <a:ea typeface="Noto Serif CJK SC"/>
+              </a:rPr>
+              <a:t>4</a:t>
+            </a:r>
+          </a:p>
+        </p:txBody>
+      </p:sp>
+      <p:sp>
+        <p:nvSpPr>
+          <p:cNvPr id="12" name="Rounded Rectangle 11"/>
+          <p:cNvSpPr/>
+          <p:nvPr/>
+        </p:nvSpPr>
+        <p:spPr>
+          <a:xfrm>
+            <a:off x="11332159" y="6382512"/>
+            <a:ext cx="310896" cy="292608"/>
+          </a:xfrm>
+          <a:prstGeom prst="roundRect">
+            <a:avLst>
+              <a:gd name="adj" fmla="val 18000"/>
+            </a:avLst>
+          </a:prstGeom>
+          <a:solidFill>
+            <a:srgbClr val="E4E9F0"/>
+          </a:solidFill>
+          <a:ln>
+            <a:noFill/>
+          </a:ln>
+          <a:effectLst/>
+        </p:spPr>
+        <p:style>
+          <a:lnRef idx="1">
+            <a:schemeClr val="accent1"/>
+          </a:lnRef>
+          <a:fillRef idx="3">
+            <a:schemeClr val="accent1"/>
+          </a:fillRef>
+          <a:effectRef idx="2">
+            <a:schemeClr val="accent1"/>
+          </a:effectRef>
+          <a:fontRef idx="minor">
+            <a:schemeClr val="lt1"/>
+          </a:fontRef>
+        </p:style>
+        <p:txBody>
+          <a:bodyPr rtlCol="0" anchor="ctr"/>
+          <a:lstStyle/>
+          <a:p>
+            <a:pPr algn="ctr"/>
+          </a:p>
+        </p:txBody>
+      </p:sp>
+      <p:sp>
+        <p:nvSpPr>
+          <p:cNvPr id="13" name="TextBox 12"/>
+          <p:cNvSpPr txBox="1"/>
+          <p:nvPr/>
+        </p:nvSpPr>
+        <p:spPr>
+          <a:xfrm>
+            <a:off x="11332159" y="6400800"/>
+            <a:ext cx="310896" cy="274320"/>
+          </a:xfrm>
+          <a:prstGeom prst="rect">
+            <a:avLst/>
+          </a:prstGeom>
+          <a:noFill/>
+        </p:spPr>
+        <p:txBody>
+          <a:bodyPr wrap="square" anchor="ctr" lIns="54864" rIns="54864" tIns="0" bIns="0">
+            <a:spAutoFit/>
+          </a:bodyPr>
+          <a:lstStyle/>
+          <a:p>
+            <a:pPr algn="ctr">
+              <a:lnSpc>
+                <a:spcPct val="130000"/>
+              </a:lnSpc>
+              <a:defRPr sz="1000"/>
+            </a:pPr>
+            <a:r>
+              <a:rPr sz="1000" b="0" u="none">
+                <a:solidFill>
+                  <a:srgbClr val="6B7785"/>
+                </a:solidFill>
+                <a:latin typeface="Times New Roman"/>
+                <a:ea typeface="Noto Serif CJK SC"/>
+              </a:rPr>
+              <a:t>›</a:t>
+            </a:r>
+          </a:p>
+        </p:txBody>
+      </p:sp>
+      <p:sp>
+        <p:nvSpPr>
+          <p:cNvPr id="14" name="TextBox 13"/>
+          <p:cNvSpPr txBox="1"/>
+          <p:nvPr/>
+        </p:nvSpPr>
+        <p:spPr>
+          <a:xfrm>
+            <a:off x="548640" y="6382512"/>
+            <a:ext cx="7498079" cy="274320"/>
+          </a:xfrm>
+          <a:prstGeom prst="rect">
+            <a:avLst/>
+          </a:prstGeom>
+          <a:noFill/>
+        </p:spPr>
+        <p:txBody>
+          <a:bodyPr wrap="square" anchor="ctr" lIns="54864" rIns="54864" tIns="0" bIns="0">
             <a:spAutoFit/>
           </a:bodyPr>
           <a:lstStyle/>
@@ -6684,50 +6534,9 @@
                   <a:srgbClr val="8A94A6"/>
                 </a:solidFill>
                 <a:latin typeface="Times New Roman"/>
-                <a:ea typeface="Noto Sans CJK SC"/>
+                <a:ea typeface="Noto Serif CJK SC"/>
               </a:rPr>
               <a:t>胶州四中 · 14. 反应热 热化学方程式</a:t>
-            </a:r>
-          </a:p>
-        </p:txBody>
-      </p:sp>
-      <p:sp>
-        <p:nvSpPr>
-          <p:cNvPr id="17" name="TextBox 16"/>
-          <p:cNvSpPr txBox="1"/>
-          <p:nvPr/>
-        </p:nvSpPr>
-        <p:spPr>
-          <a:xfrm>
-            <a:off x="11048695" y="6345936"/>
-            <a:ext cx="685800" cy="274320"/>
-          </a:xfrm>
-          <a:prstGeom prst="rect">
-            <a:avLst/>
-          </a:prstGeom>
-          <a:noFill/>
-        </p:spPr>
-        <p:txBody>
-          <a:bodyPr wrap="square" anchor="t" lIns="54864" rIns="54864" tIns="0" bIns="0">
-            <a:spAutoFit/>
-          </a:bodyPr>
-          <a:lstStyle/>
-          <a:p>
-            <a:pPr algn="r">
-              <a:lnSpc>
-                <a:spcPct val="130000"/>
-              </a:lnSpc>
-              <a:defRPr sz="1000"/>
-            </a:pPr>
-            <a:r>
-              <a:rPr sz="1000" b="0" u="none">
-                <a:solidFill>
-                  <a:srgbClr val="8A94A6"/>
-                </a:solidFill>
-                <a:latin typeface="Times New Roman"/>
-                <a:ea typeface="Noto Sans CJK SC"/>
-              </a:rPr>
-              <a:t>4</a:t>
             </a:r>
           </a:p>
         </p:txBody>
@@ -6758,14 +6567,148 @@
         </p:nvSpPr>
         <p:spPr>
           <a:xfrm>
-            <a:off x="10607040" y="914400"/>
-            <a:ext cx="155448" cy="155448"/>
+            <a:off x="9281160" y="164592"/>
+            <a:ext cx="2651760" cy="2651760"/>
           </a:xfrm>
           <a:prstGeom prst="ellipse">
             <a:avLst/>
           </a:prstGeom>
+          <a:noFill/>
+          <a:ln w="13970">
+            <a:solidFill>
+              <a:srgbClr val="E8EDF2"/>
+            </a:solidFill>
+          </a:ln>
+          <a:effectLst/>
+        </p:spPr>
+        <p:style>
+          <a:lnRef idx="1">
+            <a:schemeClr val="accent1"/>
+          </a:lnRef>
+          <a:fillRef idx="3">
+            <a:schemeClr val="accent1"/>
+          </a:fillRef>
+          <a:effectRef idx="2">
+            <a:schemeClr val="accent1"/>
+          </a:effectRef>
+          <a:fontRef idx="minor">
+            <a:schemeClr val="lt1"/>
+          </a:fontRef>
+        </p:style>
+        <p:txBody>
+          <a:bodyPr rtlCol="0" anchor="ctr"/>
+          <a:lstStyle/>
+          <a:p>
+            <a:pPr algn="ctr"/>
+          </a:p>
+        </p:txBody>
+      </p:sp>
+      <p:sp>
+        <p:nvSpPr>
+          <p:cNvPr id="3" name="Oval 2"/>
+          <p:cNvSpPr/>
+          <p:nvPr/>
+        </p:nvSpPr>
+        <p:spPr>
+          <a:xfrm>
+            <a:off x="9646920" y="502920"/>
+            <a:ext cx="1920240" cy="1920240"/>
+          </a:xfrm>
+          <a:prstGeom prst="ellipse">
+            <a:avLst/>
+          </a:prstGeom>
+          <a:noFill/>
+          <a:ln w="13970">
+            <a:solidFill>
+              <a:srgbClr val="E8EDF2"/>
+            </a:solidFill>
+          </a:ln>
+          <a:effectLst/>
+        </p:spPr>
+        <p:style>
+          <a:lnRef idx="1">
+            <a:schemeClr val="accent1"/>
+          </a:lnRef>
+          <a:fillRef idx="3">
+            <a:schemeClr val="accent1"/>
+          </a:fillRef>
+          <a:effectRef idx="2">
+            <a:schemeClr val="accent1"/>
+          </a:effectRef>
+          <a:fontRef idx="minor">
+            <a:schemeClr val="lt1"/>
+          </a:fontRef>
+        </p:style>
+        <p:txBody>
+          <a:bodyPr rtlCol="0" anchor="ctr"/>
+          <a:lstStyle/>
+          <a:p>
+            <a:pPr algn="ctr"/>
+          </a:p>
+        </p:txBody>
+      </p:sp>
+      <p:sp>
+        <p:nvSpPr>
+          <p:cNvPr id="4" name="Oval 3"/>
+          <p:cNvSpPr/>
+          <p:nvPr/>
+        </p:nvSpPr>
+        <p:spPr>
+          <a:xfrm>
+            <a:off x="10012680" y="868680"/>
+            <a:ext cx="1188720" cy="1188720"/>
+          </a:xfrm>
+          <a:prstGeom prst="ellipse">
+            <a:avLst/>
+          </a:prstGeom>
+          <a:noFill/>
+          <a:ln w="13970">
+            <a:solidFill>
+              <a:srgbClr val="E8EDF2"/>
+            </a:solidFill>
+          </a:ln>
+          <a:effectLst/>
+        </p:spPr>
+        <p:style>
+          <a:lnRef idx="1">
+            <a:schemeClr val="accent1"/>
+          </a:lnRef>
+          <a:fillRef idx="3">
+            <a:schemeClr val="accent1"/>
+          </a:fillRef>
+          <a:effectRef idx="2">
+            <a:schemeClr val="accent1"/>
+          </a:effectRef>
+          <a:fontRef idx="minor">
+            <a:schemeClr val="lt1"/>
+          </a:fontRef>
+        </p:style>
+        <p:txBody>
+          <a:bodyPr rtlCol="0" anchor="ctr"/>
+          <a:lstStyle/>
+          <a:p>
+            <a:pPr algn="ctr"/>
+          </a:p>
+        </p:txBody>
+      </p:sp>
+      <p:sp>
+        <p:nvSpPr>
+          <p:cNvPr id="5" name="Rounded Rectangle 4"/>
+          <p:cNvSpPr/>
+          <p:nvPr/>
+        </p:nvSpPr>
+        <p:spPr>
+          <a:xfrm>
+            <a:off x="548640" y="347472"/>
+            <a:ext cx="4581144" cy="585216"/>
+          </a:xfrm>
+          <a:prstGeom prst="roundRect">
+            <a:avLst>
+              <a:gd name="adj" fmla="val 32000"/>
+            </a:avLst>
+          </a:prstGeom>
           <a:solidFill>
-            <a:srgbClr val="CBE7DF"/>
+            <a:srgbClr val="2E75B6"/>
           </a:solidFill>
           <a:ln>
             <a:noFill/>
@@ -6796,20 +6739,63 @@
       </p:sp>
       <p:sp>
         <p:nvSpPr>
-          <p:cNvPr id="3" name="Oval 2"/>
+          <p:cNvPr id="6" name="TextBox 5"/>
+          <p:cNvSpPr txBox="1"/>
+          <p:nvPr/>
+        </p:nvSpPr>
+        <p:spPr>
+          <a:xfrm>
+            <a:off x="548640" y="365760"/>
+            <a:ext cx="4581144" cy="548640"/>
+          </a:xfrm>
+          <a:prstGeom prst="rect">
+            <a:avLst/>
+          </a:prstGeom>
+          <a:noFill/>
+        </p:spPr>
+        <p:txBody>
+          <a:bodyPr wrap="square" anchor="ctr" lIns="54864" rIns="54864" tIns="0" bIns="0">
+            <a:spAutoFit/>
+          </a:bodyPr>
+          <a:lstStyle/>
+          <a:p>
+            <a:pPr algn="ctr">
+              <a:lnSpc>
+                <a:spcPct val="130000"/>
+              </a:lnSpc>
+              <a:defRPr sz="2300"/>
+            </a:pPr>
+            <a:r>
+              <a:rPr sz="2300" b="1" u="none">
+                <a:solidFill>
+                  <a:srgbClr val="FFFFFF"/>
+                </a:solidFill>
+                <a:latin typeface="Times New Roman"/>
+                <a:ea typeface="Noto Serif CJK SC"/>
+              </a:rPr>
+              <a:t>考点一 反应热与焓变｜反应</a:t>
+            </a:r>
+          </a:p>
+        </p:txBody>
+      </p:sp>
+      <p:sp>
+        <p:nvSpPr>
+          <p:cNvPr id="7" name="Rounded Rectangle 6"/>
           <p:cNvSpPr/>
           <p:nvPr/>
         </p:nvSpPr>
         <p:spPr>
           <a:xfrm>
-            <a:off x="11155680" y="1417320"/>
-            <a:ext cx="100584" cy="100584"/>
-          </a:xfrm>
-          <a:prstGeom prst="ellipse">
-            <a:avLst/>
+            <a:off x="731520" y="1280160"/>
+            <a:ext cx="10728655" cy="1143000"/>
+          </a:xfrm>
+          <a:prstGeom prst="roundRect">
+            <a:avLst>
+              <a:gd name="adj" fmla="val 5000"/>
+            </a:avLst>
           </a:prstGeom>
           <a:solidFill>
-            <a:srgbClr val="CBE7DF"/>
+            <a:srgbClr val="F1F5F9"/>
           </a:solidFill>
           <a:ln>
             <a:noFill/>
@@ -6840,454 +6826,7 @@
       </p:sp>
       <p:sp>
         <p:nvSpPr>
-          <p:cNvPr id="4" name="Oval 3"/>
-          <p:cNvSpPr/>
-          <p:nvPr/>
-        </p:nvSpPr>
-        <p:spPr>
-          <a:xfrm>
-            <a:off x="10744200" y="1965960"/>
-            <a:ext cx="155448" cy="155448"/>
-          </a:xfrm>
-          <a:prstGeom prst="ellipse">
-            <a:avLst/>
-          </a:prstGeom>
-          <a:solidFill>
-            <a:srgbClr val="CBE7DF"/>
-          </a:solidFill>
-          <a:ln>
-            <a:noFill/>
-          </a:ln>
-          <a:effectLst/>
-        </p:spPr>
-        <p:style>
-          <a:lnRef idx="1">
-            <a:schemeClr val="accent1"/>
-          </a:lnRef>
-          <a:fillRef idx="3">
-            <a:schemeClr val="accent1"/>
-          </a:fillRef>
-          <a:effectRef idx="2">
-            <a:schemeClr val="accent1"/>
-          </a:effectRef>
-          <a:fontRef idx="minor">
-            <a:schemeClr val="lt1"/>
-          </a:fontRef>
-        </p:style>
-        <p:txBody>
-          <a:bodyPr rtlCol="0" anchor="ctr"/>
-          <a:lstStyle/>
-          <a:p>
-            <a:pPr algn="ctr"/>
-          </a:p>
-        </p:txBody>
-      </p:sp>
-      <p:sp>
-        <p:nvSpPr>
-          <p:cNvPr id="5" name="Oval 4"/>
-          <p:cNvSpPr/>
-          <p:nvPr/>
-        </p:nvSpPr>
-        <p:spPr>
-          <a:xfrm>
-            <a:off x="11292840" y="2331720"/>
-            <a:ext cx="100584" cy="100584"/>
-          </a:xfrm>
-          <a:prstGeom prst="ellipse">
-            <a:avLst/>
-          </a:prstGeom>
-          <a:solidFill>
-            <a:srgbClr val="CBE7DF"/>
-          </a:solidFill>
-          <a:ln>
-            <a:noFill/>
-          </a:ln>
-          <a:effectLst/>
-        </p:spPr>
-        <p:style>
-          <a:lnRef idx="1">
-            <a:schemeClr val="accent1"/>
-          </a:lnRef>
-          <a:fillRef idx="3">
-            <a:schemeClr val="accent1"/>
-          </a:fillRef>
-          <a:effectRef idx="2">
-            <a:schemeClr val="accent1"/>
-          </a:effectRef>
-          <a:fontRef idx="minor">
-            <a:schemeClr val="lt1"/>
-          </a:fontRef>
-        </p:style>
-        <p:txBody>
-          <a:bodyPr rtlCol="0" anchor="ctr"/>
-          <a:lstStyle/>
-          <a:p>
-            <a:pPr algn="ctr"/>
-          </a:p>
-        </p:txBody>
-      </p:sp>
-      <p:sp>
-        <p:nvSpPr>
-          <p:cNvPr id="6" name="Oval 5"/>
-          <p:cNvSpPr/>
-          <p:nvPr/>
-        </p:nvSpPr>
-        <p:spPr>
-          <a:xfrm>
-            <a:off x="10378440" y="1691640"/>
-            <a:ext cx="155448" cy="155448"/>
-          </a:xfrm>
-          <a:prstGeom prst="ellipse">
-            <a:avLst/>
-          </a:prstGeom>
-          <a:solidFill>
-            <a:srgbClr val="CBE7DF"/>
-          </a:solidFill>
-          <a:ln>
-            <a:noFill/>
-          </a:ln>
-          <a:effectLst/>
-        </p:spPr>
-        <p:style>
-          <a:lnRef idx="1">
-            <a:schemeClr val="accent1"/>
-          </a:lnRef>
-          <a:fillRef idx="3">
-            <a:schemeClr val="accent1"/>
-          </a:fillRef>
-          <a:effectRef idx="2">
-            <a:schemeClr val="accent1"/>
-          </a:effectRef>
-          <a:fontRef idx="minor">
-            <a:schemeClr val="lt1"/>
-          </a:fontRef>
-        </p:style>
-        <p:txBody>
-          <a:bodyPr rtlCol="0" anchor="ctr"/>
-          <a:lstStyle/>
-          <a:p>
-            <a:pPr algn="ctr"/>
-          </a:p>
-        </p:txBody>
-      </p:sp>
-      <p:cxnSp>
-        <p:nvCxnSpPr>
-          <p:cNvPr id="7" name="Connector 6"/>
-          <p:cNvCxnSpPr/>
-          <p:nvPr/>
-        </p:nvCxnSpPr>
-        <p:spPr>
-          <a:xfrm>
-            <a:off x="10689336" y="996696"/>
-            <a:ext cx="548640" cy="502920"/>
-          </a:xfrm>
-          <a:prstGeom prst="line">
-            <a:avLst/>
-          </a:prstGeom>
-          <a:ln w="12700">
-            <a:solidFill>
-              <a:srgbClr val="D7EAE4"/>
-            </a:solidFill>
-          </a:ln>
-        </p:spPr>
-        <p:style>
-          <a:lnRef idx="2">
-            <a:schemeClr val="accent1"/>
-          </a:lnRef>
-          <a:fillRef idx="0">
-            <a:schemeClr val="accent1"/>
-          </a:fillRef>
-          <a:effectRef idx="1">
-            <a:schemeClr val="accent1"/>
-          </a:effectRef>
-          <a:fontRef idx="minor">
-            <a:schemeClr val="tx1"/>
-          </a:fontRef>
-        </p:style>
-      </p:cxnSp>
-      <p:cxnSp>
-        <p:nvCxnSpPr>
-          <p:cNvPr id="8" name="Connector 7"/>
-          <p:cNvCxnSpPr/>
-          <p:nvPr/>
-        </p:nvCxnSpPr>
-        <p:spPr>
-          <a:xfrm flipH="1">
-            <a:off x="10826496" y="1499616"/>
-            <a:ext cx="411480" cy="548639"/>
-          </a:xfrm>
-          <a:prstGeom prst="line">
-            <a:avLst/>
-          </a:prstGeom>
-          <a:ln w="12700">
-            <a:solidFill>
-              <a:srgbClr val="D7EAE4"/>
-            </a:solidFill>
-          </a:ln>
-        </p:spPr>
-        <p:style>
-          <a:lnRef idx="2">
-            <a:schemeClr val="accent1"/>
-          </a:lnRef>
-          <a:fillRef idx="0">
-            <a:schemeClr val="accent1"/>
-          </a:fillRef>
-          <a:effectRef idx="1">
-            <a:schemeClr val="accent1"/>
-          </a:effectRef>
-          <a:fontRef idx="minor">
-            <a:schemeClr val="tx1"/>
-          </a:fontRef>
-        </p:style>
-      </p:cxnSp>
-      <p:cxnSp>
-        <p:nvCxnSpPr>
-          <p:cNvPr id="9" name="Connector 8"/>
-          <p:cNvCxnSpPr/>
-          <p:nvPr/>
-        </p:nvCxnSpPr>
-        <p:spPr>
-          <a:xfrm>
-            <a:off x="10826496" y="2048255"/>
-            <a:ext cx="548640" cy="365760"/>
-          </a:xfrm>
-          <a:prstGeom prst="line">
-            <a:avLst/>
-          </a:prstGeom>
-          <a:ln w="12700">
-            <a:solidFill>
-              <a:srgbClr val="D7EAE4"/>
-            </a:solidFill>
-          </a:ln>
-        </p:spPr>
-        <p:style>
-          <a:lnRef idx="2">
-            <a:schemeClr val="accent1"/>
-          </a:lnRef>
-          <a:fillRef idx="0">
-            <a:schemeClr val="accent1"/>
-          </a:fillRef>
-          <a:effectRef idx="1">
-            <a:schemeClr val="accent1"/>
-          </a:effectRef>
-          <a:fontRef idx="minor">
-            <a:schemeClr val="tx1"/>
-          </a:fontRef>
-        </p:style>
-      </p:cxnSp>
-      <p:cxnSp>
-        <p:nvCxnSpPr>
-          <p:cNvPr id="10" name="Connector 9"/>
-          <p:cNvCxnSpPr/>
-          <p:nvPr/>
-        </p:nvCxnSpPr>
-        <p:spPr>
-          <a:xfrm flipH="1" flipV="1">
-            <a:off x="10460736" y="1773936"/>
-            <a:ext cx="914400" cy="640079"/>
-          </a:xfrm>
-          <a:prstGeom prst="line">
-            <a:avLst/>
-          </a:prstGeom>
-          <a:ln w="12700">
-            <a:solidFill>
-              <a:srgbClr val="D7EAE4"/>
-            </a:solidFill>
-          </a:ln>
-        </p:spPr>
-        <p:style>
-          <a:lnRef idx="2">
-            <a:schemeClr val="accent1"/>
-          </a:lnRef>
-          <a:fillRef idx="0">
-            <a:schemeClr val="accent1"/>
-          </a:fillRef>
-          <a:effectRef idx="1">
-            <a:schemeClr val="accent1"/>
-          </a:effectRef>
-          <a:fontRef idx="minor">
-            <a:schemeClr val="tx1"/>
-          </a:fontRef>
-        </p:style>
-      </p:cxnSp>
-      <p:sp>
-        <p:nvSpPr>
-          <p:cNvPr id="11" name="Rectangle 10"/>
-          <p:cNvSpPr/>
-          <p:nvPr/>
-        </p:nvSpPr>
-        <p:spPr>
-          <a:xfrm>
-            <a:off x="0" y="0"/>
-            <a:ext cx="12191695" cy="786384"/>
-          </a:xfrm>
-          <a:prstGeom prst="rect">
-            <a:avLst/>
-          </a:prstGeom>
-          <a:solidFill>
-            <a:srgbClr val="0E4F45"/>
-          </a:solidFill>
-          <a:ln>
-            <a:noFill/>
-          </a:ln>
-          <a:effectLst/>
-        </p:spPr>
-        <p:style>
-          <a:lnRef idx="1">
-            <a:schemeClr val="accent1"/>
-          </a:lnRef>
-          <a:fillRef idx="3">
-            <a:schemeClr val="accent1"/>
-          </a:fillRef>
-          <a:effectRef idx="2">
-            <a:schemeClr val="accent1"/>
-          </a:effectRef>
-          <a:fontRef idx="minor">
-            <a:schemeClr val="lt1"/>
-          </a:fontRef>
-        </p:style>
-        <p:txBody>
-          <a:bodyPr rtlCol="0" anchor="ctr"/>
-          <a:lstStyle/>
-          <a:p>
-            <a:pPr algn="ctr"/>
-          </a:p>
-        </p:txBody>
-      </p:sp>
-      <p:sp>
-        <p:nvSpPr>
-          <p:cNvPr id="12" name="Rectangle 11"/>
-          <p:cNvSpPr/>
-          <p:nvPr/>
-        </p:nvSpPr>
-        <p:spPr>
-          <a:xfrm>
-            <a:off x="0" y="786384"/>
-            <a:ext cx="12191695" cy="36576"/>
-          </a:xfrm>
-          <a:prstGeom prst="rect">
-            <a:avLst/>
-          </a:prstGeom>
-          <a:solidFill>
-            <a:srgbClr val="E8710A"/>
-          </a:solidFill>
-          <a:ln>
-            <a:noFill/>
-          </a:ln>
-          <a:effectLst/>
-        </p:spPr>
-        <p:style>
-          <a:lnRef idx="1">
-            <a:schemeClr val="accent1"/>
-          </a:lnRef>
-          <a:fillRef idx="3">
-            <a:schemeClr val="accent1"/>
-          </a:fillRef>
-          <a:effectRef idx="2">
-            <a:schemeClr val="accent1"/>
-          </a:effectRef>
-          <a:fontRef idx="minor">
-            <a:schemeClr val="lt1"/>
-          </a:fontRef>
-        </p:style>
-        <p:txBody>
-          <a:bodyPr rtlCol="0" anchor="ctr"/>
-          <a:lstStyle/>
-          <a:p>
-            <a:pPr algn="ctr"/>
-          </a:p>
-        </p:txBody>
-      </p:sp>
-      <p:sp>
-        <p:nvSpPr>
-          <p:cNvPr id="13" name="TextBox 12"/>
-          <p:cNvSpPr txBox="1"/>
-          <p:nvPr/>
-        </p:nvSpPr>
-        <p:spPr>
-          <a:xfrm>
-            <a:off x="548640" y="128016"/>
-            <a:ext cx="8442656" cy="530352"/>
-          </a:xfrm>
-          <a:prstGeom prst="rect">
-            <a:avLst/>
-          </a:prstGeom>
-          <a:noFill/>
-        </p:spPr>
-        <p:txBody>
-          <a:bodyPr wrap="square" anchor="ctr" lIns="54864" rIns="54864" tIns="0" bIns="0">
-            <a:spAutoFit/>
-          </a:bodyPr>
-          <a:lstStyle/>
-          <a:p>
-            <a:pPr algn="l">
-              <a:lnSpc>
-                <a:spcPct val="130000"/>
-              </a:lnSpc>
-              <a:defRPr sz="2800"/>
-            </a:pPr>
-            <a:r>
-              <a:rPr sz="2800" b="1" u="none">
-                <a:solidFill>
-                  <a:srgbClr val="FFFFFF"/>
-                </a:solidFill>
-                <a:latin typeface="Times New Roman"/>
-                <a:ea typeface="Noto Sans CJK SC"/>
-              </a:rPr>
-              <a:t>考点一 反应热与焓变｜反应</a:t>
-            </a:r>
-          </a:p>
-        </p:txBody>
-      </p:sp>
-      <p:sp>
-        <p:nvSpPr>
-          <p:cNvPr id="14" name="Rounded Rectangle 13"/>
-          <p:cNvSpPr/>
-          <p:nvPr/>
-        </p:nvSpPr>
-        <p:spPr>
-          <a:xfrm>
-            <a:off x="731520" y="1280160"/>
-            <a:ext cx="10728655" cy="1143000"/>
-          </a:xfrm>
-          <a:prstGeom prst="roundRect">
-            <a:avLst>
-              <a:gd name="adj" fmla="val 5000"/>
-            </a:avLst>
-          </a:prstGeom>
-          <a:solidFill>
-            <a:srgbClr val="E9F0F2"/>
-          </a:solidFill>
-          <a:ln>
-            <a:noFill/>
-          </a:ln>
-          <a:effectLst/>
-        </p:spPr>
-        <p:style>
-          <a:lnRef idx="1">
-            <a:schemeClr val="accent1"/>
-          </a:lnRef>
-          <a:fillRef idx="3">
-            <a:schemeClr val="accent1"/>
-          </a:fillRef>
-          <a:effectRef idx="2">
-            <a:schemeClr val="accent1"/>
-          </a:effectRef>
-          <a:fontRef idx="minor">
-            <a:schemeClr val="lt1"/>
-          </a:fontRef>
-        </p:style>
-        <p:txBody>
-          <a:bodyPr rtlCol="0" anchor="ctr"/>
-          <a:lstStyle/>
-          <a:p>
-            <a:pPr algn="ctr"/>
-          </a:p>
-        </p:txBody>
-      </p:sp>
-      <p:sp>
-        <p:nvSpPr>
-          <p:cNvPr id="15" name="TextBox 14"/>
+          <p:cNvPr id="8" name="TextBox 7"/>
           <p:cNvSpPr txBox="1"/>
           <p:nvPr/>
         </p:nvSpPr>
@@ -7316,10 +6855,10 @@
             <a:r>
               <a:rPr sz="3200" b="1" u="none">
                 <a:solidFill>
-                  <a:srgbClr val="0E4F45"/>
+                  <a:srgbClr val="1F4E79"/>
                 </a:solidFill>
                 <a:latin typeface="Times New Roman"/>
-                <a:ea typeface="Noto Sans CJK SC"/>
+                <a:ea typeface="Noto Serif CJK SC"/>
               </a:rPr>
               <a:t>2H₂(g) + O₂(g) = 2H₂O(l)</a:t>
             </a:r>
@@ -7328,7 +6867,7 @@
       </p:sp>
       <p:sp>
         <p:nvSpPr>
-          <p:cNvPr id="16" name="Rounded Rectangle 15"/>
+          <p:cNvPr id="9" name="Rounded Rectangle 8"/>
           <p:cNvSpPr/>
           <p:nvPr/>
         </p:nvSpPr>
@@ -7347,7 +6886,7 @@
           </a:solidFill>
           <a:ln w="12700">
             <a:solidFill>
-              <a:srgbClr val="E8710A"/>
+              <a:srgbClr val="2E75B6"/>
             </a:solidFill>
           </a:ln>
           <a:effectLst/>
@@ -7376,7 +6915,7 @@
       </p:sp>
       <p:sp>
         <p:nvSpPr>
-          <p:cNvPr id="17" name="TextBox 16"/>
+          <p:cNvPr id="10" name="TextBox 9"/>
           <p:cNvSpPr txBox="1"/>
           <p:nvPr/>
         </p:nvSpPr>
@@ -7405,10 +6944,10 @@
             <a:r>
               <a:rPr sz="1300" b="1" u="none">
                 <a:solidFill>
-                  <a:srgbClr val="E8710A"/>
+                  <a:srgbClr val="2E75B6"/>
                 </a:solidFill>
                 <a:latin typeface="Times New Roman"/>
-                <a:ea typeface="Noto Sans CJK SC"/>
+                <a:ea typeface="Noto Serif CJK SC"/>
               </a:rPr>
               <a:t>条件：点燃</a:t>
             </a:r>
@@ -7417,7 +6956,7 @@
       </p:sp>
       <p:sp>
         <p:nvSpPr>
-          <p:cNvPr id="18" name="TextBox 17"/>
+          <p:cNvPr id="11" name="TextBox 10"/>
           <p:cNvSpPr txBox="1"/>
           <p:nvPr/>
         </p:nvSpPr>
@@ -7446,20 +6985,20 @@
             <a:r>
               <a:rPr sz="2000" b="0" u="none">
                 <a:solidFill>
-                  <a:srgbClr val="E8710A"/>
+                  <a:srgbClr val="2E75B6"/>
                 </a:solidFill>
                 <a:latin typeface="Times New Roman"/>
-                <a:ea typeface="Noto Sans CJK SC"/>
+                <a:ea typeface="Noto Serif CJK SC"/>
               </a:rPr>
               <a:t>▪ </a:t>
             </a:r>
             <a:r>
               <a:rPr sz="2000" b="0" u="none">
                 <a:solidFill>
-                  <a:srgbClr val="122A26"/>
+                  <a:srgbClr val="1C2B3A"/>
                 </a:solidFill>
                 <a:latin typeface="Times New Roman"/>
-                <a:ea typeface="Noto Sans CJK SC"/>
+                <a:ea typeface="Noto Serif CJK SC"/>
               </a:rPr>
               <a:t>放热反应，ΔH = −571.6 kJ·mol⁻¹</a:t>
             </a:r>
@@ -7468,20 +7007,22 @@
       </p:sp>
       <p:sp>
         <p:nvSpPr>
-          <p:cNvPr id="19" name="Rectangle 18"/>
+          <p:cNvPr id="12" name="Rounded Rectangle 11"/>
           <p:cNvSpPr/>
           <p:nvPr/>
         </p:nvSpPr>
         <p:spPr>
           <a:xfrm>
-            <a:off x="0" y="6739128"/>
-            <a:ext cx="12191695" cy="118872"/>
-          </a:xfrm>
-          <a:prstGeom prst="rect">
-            <a:avLst/>
+            <a:off x="10600639" y="6382512"/>
+            <a:ext cx="310896" cy="292608"/>
+          </a:xfrm>
+          <a:prstGeom prst="roundRect">
+            <a:avLst>
+              <a:gd name="adj" fmla="val 18000"/>
+            </a:avLst>
           </a:prstGeom>
           <a:solidFill>
-            <a:srgbClr val="E8710A"/>
+            <a:srgbClr val="E4E9F0"/>
           </a:solidFill>
           <a:ln>
             <a:noFill/>
@@ -7512,14 +7053,14 @@
       </p:sp>
       <p:sp>
         <p:nvSpPr>
-          <p:cNvPr id="20" name="TextBox 19"/>
+          <p:cNvPr id="13" name="TextBox 12"/>
           <p:cNvSpPr txBox="1"/>
           <p:nvPr/>
         </p:nvSpPr>
         <p:spPr>
           <a:xfrm>
-            <a:off x="548640" y="6345936"/>
-            <a:ext cx="8595360" cy="274320"/>
+            <a:off x="10600639" y="6400800"/>
+            <a:ext cx="310896" cy="274320"/>
           </a:xfrm>
           <a:prstGeom prst="rect">
             <a:avLst/>
@@ -7527,7 +7068,222 @@
           <a:noFill/>
         </p:spPr>
         <p:txBody>
-          <a:bodyPr wrap="square" anchor="t" lIns="54864" rIns="54864" tIns="0" bIns="0">
+          <a:bodyPr wrap="square" anchor="ctr" lIns="54864" rIns="54864" tIns="0" bIns="0">
+            <a:spAutoFit/>
+          </a:bodyPr>
+          <a:lstStyle/>
+          <a:p>
+            <a:pPr algn="ctr">
+              <a:lnSpc>
+                <a:spcPct val="130000"/>
+              </a:lnSpc>
+              <a:defRPr sz="1000"/>
+            </a:pPr>
+            <a:r>
+              <a:rPr sz="1000" b="0" u="none">
+                <a:solidFill>
+                  <a:srgbClr val="6B7785"/>
+                </a:solidFill>
+                <a:latin typeface="Times New Roman"/>
+                <a:ea typeface="Noto Serif CJK SC"/>
+              </a:rPr>
+              <a:t>‹</a:t>
+            </a:r>
+          </a:p>
+        </p:txBody>
+      </p:sp>
+      <p:sp>
+        <p:nvSpPr>
+          <p:cNvPr id="14" name="Rounded Rectangle 13"/>
+          <p:cNvSpPr/>
+          <p:nvPr/>
+        </p:nvSpPr>
+        <p:spPr>
+          <a:xfrm>
+            <a:off x="10966399" y="6382512"/>
+            <a:ext cx="310896" cy="292608"/>
+          </a:xfrm>
+          <a:prstGeom prst="roundRect">
+            <a:avLst>
+              <a:gd name="adj" fmla="val 18000"/>
+            </a:avLst>
+          </a:prstGeom>
+          <a:solidFill>
+            <a:srgbClr val="2E75B6"/>
+          </a:solidFill>
+          <a:ln>
+            <a:noFill/>
+          </a:ln>
+          <a:effectLst/>
+        </p:spPr>
+        <p:style>
+          <a:lnRef idx="1">
+            <a:schemeClr val="accent1"/>
+          </a:lnRef>
+          <a:fillRef idx="3">
+            <a:schemeClr val="accent1"/>
+          </a:fillRef>
+          <a:effectRef idx="2">
+            <a:schemeClr val="accent1"/>
+          </a:effectRef>
+          <a:fontRef idx="minor">
+            <a:schemeClr val="lt1"/>
+          </a:fontRef>
+        </p:style>
+        <p:txBody>
+          <a:bodyPr rtlCol="0" anchor="ctr"/>
+          <a:lstStyle/>
+          <a:p>
+            <a:pPr algn="ctr"/>
+          </a:p>
+        </p:txBody>
+      </p:sp>
+      <p:sp>
+        <p:nvSpPr>
+          <p:cNvPr id="15" name="TextBox 14"/>
+          <p:cNvSpPr txBox="1"/>
+          <p:nvPr/>
+        </p:nvSpPr>
+        <p:spPr>
+          <a:xfrm>
+            <a:off x="10966399" y="6400800"/>
+            <a:ext cx="310896" cy="274320"/>
+          </a:xfrm>
+          <a:prstGeom prst="rect">
+            <a:avLst/>
+          </a:prstGeom>
+          <a:noFill/>
+        </p:spPr>
+        <p:txBody>
+          <a:bodyPr wrap="square" anchor="ctr" lIns="54864" rIns="54864" tIns="0" bIns="0">
+            <a:spAutoFit/>
+          </a:bodyPr>
+          <a:lstStyle/>
+          <a:p>
+            <a:pPr algn="ctr">
+              <a:lnSpc>
+                <a:spcPct val="130000"/>
+              </a:lnSpc>
+              <a:defRPr sz="1000"/>
+            </a:pPr>
+            <a:r>
+              <a:rPr sz="1000" b="1" u="none">
+                <a:solidFill>
+                  <a:srgbClr val="FFFFFF"/>
+                </a:solidFill>
+                <a:latin typeface="Times New Roman"/>
+                <a:ea typeface="Noto Serif CJK SC"/>
+              </a:rPr>
+              <a:t>5</a:t>
+            </a:r>
+          </a:p>
+        </p:txBody>
+      </p:sp>
+      <p:sp>
+        <p:nvSpPr>
+          <p:cNvPr id="16" name="Rounded Rectangle 15"/>
+          <p:cNvSpPr/>
+          <p:nvPr/>
+        </p:nvSpPr>
+        <p:spPr>
+          <a:xfrm>
+            <a:off x="11332159" y="6382512"/>
+            <a:ext cx="310896" cy="292608"/>
+          </a:xfrm>
+          <a:prstGeom prst="roundRect">
+            <a:avLst>
+              <a:gd name="adj" fmla="val 18000"/>
+            </a:avLst>
+          </a:prstGeom>
+          <a:solidFill>
+            <a:srgbClr val="E4E9F0"/>
+          </a:solidFill>
+          <a:ln>
+            <a:noFill/>
+          </a:ln>
+          <a:effectLst/>
+        </p:spPr>
+        <p:style>
+          <a:lnRef idx="1">
+            <a:schemeClr val="accent1"/>
+          </a:lnRef>
+          <a:fillRef idx="3">
+            <a:schemeClr val="accent1"/>
+          </a:fillRef>
+          <a:effectRef idx="2">
+            <a:schemeClr val="accent1"/>
+          </a:effectRef>
+          <a:fontRef idx="minor">
+            <a:schemeClr val="lt1"/>
+          </a:fontRef>
+        </p:style>
+        <p:txBody>
+          <a:bodyPr rtlCol="0" anchor="ctr"/>
+          <a:lstStyle/>
+          <a:p>
+            <a:pPr algn="ctr"/>
+          </a:p>
+        </p:txBody>
+      </p:sp>
+      <p:sp>
+        <p:nvSpPr>
+          <p:cNvPr id="17" name="TextBox 16"/>
+          <p:cNvSpPr txBox="1"/>
+          <p:nvPr/>
+        </p:nvSpPr>
+        <p:spPr>
+          <a:xfrm>
+            <a:off x="11332159" y="6400800"/>
+            <a:ext cx="310896" cy="274320"/>
+          </a:xfrm>
+          <a:prstGeom prst="rect">
+            <a:avLst/>
+          </a:prstGeom>
+          <a:noFill/>
+        </p:spPr>
+        <p:txBody>
+          <a:bodyPr wrap="square" anchor="ctr" lIns="54864" rIns="54864" tIns="0" bIns="0">
+            <a:spAutoFit/>
+          </a:bodyPr>
+          <a:lstStyle/>
+          <a:p>
+            <a:pPr algn="ctr">
+              <a:lnSpc>
+                <a:spcPct val="130000"/>
+              </a:lnSpc>
+              <a:defRPr sz="1000"/>
+            </a:pPr>
+            <a:r>
+              <a:rPr sz="1000" b="0" u="none">
+                <a:solidFill>
+                  <a:srgbClr val="6B7785"/>
+                </a:solidFill>
+                <a:latin typeface="Times New Roman"/>
+                <a:ea typeface="Noto Serif CJK SC"/>
+              </a:rPr>
+              <a:t>›</a:t>
+            </a:r>
+          </a:p>
+        </p:txBody>
+      </p:sp>
+      <p:sp>
+        <p:nvSpPr>
+          <p:cNvPr id="18" name="TextBox 17"/>
+          <p:cNvSpPr txBox="1"/>
+          <p:nvPr/>
+        </p:nvSpPr>
+        <p:spPr>
+          <a:xfrm>
+            <a:off x="548640" y="6382512"/>
+            <a:ext cx="7498079" cy="274320"/>
+          </a:xfrm>
+          <a:prstGeom prst="rect">
+            <a:avLst/>
+          </a:prstGeom>
+          <a:noFill/>
+        </p:spPr>
+        <p:txBody>
+          <a:bodyPr wrap="square" anchor="ctr" lIns="54864" rIns="54864" tIns="0" bIns="0">
             <a:spAutoFit/>
           </a:bodyPr>
           <a:lstStyle/>
@@ -7544,50 +7300,9 @@
                   <a:srgbClr val="8A94A6"/>
                 </a:solidFill>
                 <a:latin typeface="Times New Roman"/>
-                <a:ea typeface="Noto Sans CJK SC"/>
+                <a:ea typeface="Noto Serif CJK SC"/>
               </a:rPr>
               <a:t>胶州四中 · 14. 反应热 热化学方程式</a:t>
-            </a:r>
-          </a:p>
-        </p:txBody>
-      </p:sp>
-      <p:sp>
-        <p:nvSpPr>
-          <p:cNvPr id="21" name="TextBox 20"/>
-          <p:cNvSpPr txBox="1"/>
-          <p:nvPr/>
-        </p:nvSpPr>
-        <p:spPr>
-          <a:xfrm>
-            <a:off x="11048695" y="6345936"/>
-            <a:ext cx="685800" cy="274320"/>
-          </a:xfrm>
-          <a:prstGeom prst="rect">
-            <a:avLst/>
-          </a:prstGeom>
-          <a:noFill/>
-        </p:spPr>
-        <p:txBody>
-          <a:bodyPr wrap="square" anchor="t" lIns="54864" rIns="54864" tIns="0" bIns="0">
-            <a:spAutoFit/>
-          </a:bodyPr>
-          <a:lstStyle/>
-          <a:p>
-            <a:pPr algn="r">
-              <a:lnSpc>
-                <a:spcPct val="130000"/>
-              </a:lnSpc>
-              <a:defRPr sz="1000"/>
-            </a:pPr>
-            <a:r>
-              <a:rPr sz="1000" b="0" u="none">
-                <a:solidFill>
-                  <a:srgbClr val="8A94A6"/>
-                </a:solidFill>
-                <a:latin typeface="Times New Roman"/>
-                <a:ea typeface="Noto Sans CJK SC"/>
-              </a:rPr>
-              <a:t>5</a:t>
             </a:r>
           </a:p>
         </p:txBody>
@@ -7618,14 +7333,148 @@
         </p:nvSpPr>
         <p:spPr>
           <a:xfrm>
-            <a:off x="10607040" y="914400"/>
-            <a:ext cx="155448" cy="155448"/>
+            <a:off x="9281160" y="164592"/>
+            <a:ext cx="2651760" cy="2651760"/>
           </a:xfrm>
           <a:prstGeom prst="ellipse">
             <a:avLst/>
           </a:prstGeom>
+          <a:noFill/>
+          <a:ln w="13970">
+            <a:solidFill>
+              <a:srgbClr val="E8EDF2"/>
+            </a:solidFill>
+          </a:ln>
+          <a:effectLst/>
+        </p:spPr>
+        <p:style>
+          <a:lnRef idx="1">
+            <a:schemeClr val="accent1"/>
+          </a:lnRef>
+          <a:fillRef idx="3">
+            <a:schemeClr val="accent1"/>
+          </a:fillRef>
+          <a:effectRef idx="2">
+            <a:schemeClr val="accent1"/>
+          </a:effectRef>
+          <a:fontRef idx="minor">
+            <a:schemeClr val="lt1"/>
+          </a:fontRef>
+        </p:style>
+        <p:txBody>
+          <a:bodyPr rtlCol="0" anchor="ctr"/>
+          <a:lstStyle/>
+          <a:p>
+            <a:pPr algn="ctr"/>
+          </a:p>
+        </p:txBody>
+      </p:sp>
+      <p:sp>
+        <p:nvSpPr>
+          <p:cNvPr id="3" name="Oval 2"/>
+          <p:cNvSpPr/>
+          <p:nvPr/>
+        </p:nvSpPr>
+        <p:spPr>
+          <a:xfrm>
+            <a:off x="9646920" y="502920"/>
+            <a:ext cx="1920240" cy="1920240"/>
+          </a:xfrm>
+          <a:prstGeom prst="ellipse">
+            <a:avLst/>
+          </a:prstGeom>
+          <a:noFill/>
+          <a:ln w="13970">
+            <a:solidFill>
+              <a:srgbClr val="E8EDF2"/>
+            </a:solidFill>
+          </a:ln>
+          <a:effectLst/>
+        </p:spPr>
+        <p:style>
+          <a:lnRef idx="1">
+            <a:schemeClr val="accent1"/>
+          </a:lnRef>
+          <a:fillRef idx="3">
+            <a:schemeClr val="accent1"/>
+          </a:fillRef>
+          <a:effectRef idx="2">
+            <a:schemeClr val="accent1"/>
+          </a:effectRef>
+          <a:fontRef idx="minor">
+            <a:schemeClr val="lt1"/>
+          </a:fontRef>
+        </p:style>
+        <p:txBody>
+          <a:bodyPr rtlCol="0" anchor="ctr"/>
+          <a:lstStyle/>
+          <a:p>
+            <a:pPr algn="ctr"/>
+          </a:p>
+        </p:txBody>
+      </p:sp>
+      <p:sp>
+        <p:nvSpPr>
+          <p:cNvPr id="4" name="Oval 3"/>
+          <p:cNvSpPr/>
+          <p:nvPr/>
+        </p:nvSpPr>
+        <p:spPr>
+          <a:xfrm>
+            <a:off x="10012680" y="868680"/>
+            <a:ext cx="1188720" cy="1188720"/>
+          </a:xfrm>
+          <a:prstGeom prst="ellipse">
+            <a:avLst/>
+          </a:prstGeom>
+          <a:noFill/>
+          <a:ln w="13970">
+            <a:solidFill>
+              <a:srgbClr val="E8EDF2"/>
+            </a:solidFill>
+          </a:ln>
+          <a:effectLst/>
+        </p:spPr>
+        <p:style>
+          <a:lnRef idx="1">
+            <a:schemeClr val="accent1"/>
+          </a:lnRef>
+          <a:fillRef idx="3">
+            <a:schemeClr val="accent1"/>
+          </a:fillRef>
+          <a:effectRef idx="2">
+            <a:schemeClr val="accent1"/>
+          </a:effectRef>
+          <a:fontRef idx="minor">
+            <a:schemeClr val="lt1"/>
+          </a:fontRef>
+        </p:style>
+        <p:txBody>
+          <a:bodyPr rtlCol="0" anchor="ctr"/>
+          <a:lstStyle/>
+          <a:p>
+            <a:pPr algn="ctr"/>
+          </a:p>
+        </p:txBody>
+      </p:sp>
+      <p:sp>
+        <p:nvSpPr>
+          <p:cNvPr id="5" name="Rounded Rectangle 4"/>
+          <p:cNvSpPr/>
+          <p:nvPr/>
+        </p:nvSpPr>
+        <p:spPr>
+          <a:xfrm>
+            <a:off x="548640" y="347472"/>
+            <a:ext cx="4581144" cy="585216"/>
+          </a:xfrm>
+          <a:prstGeom prst="roundRect">
+            <a:avLst>
+              <a:gd name="adj" fmla="val 32000"/>
+            </a:avLst>
+          </a:prstGeom>
           <a:solidFill>
-            <a:srgbClr val="CBE7DF"/>
+            <a:srgbClr val="2E75B6"/>
           </a:solidFill>
           <a:ln>
             <a:noFill/>
@@ -7656,505 +7505,14 @@
       </p:sp>
       <p:sp>
         <p:nvSpPr>
-          <p:cNvPr id="3" name="Oval 2"/>
-          <p:cNvSpPr/>
-          <p:nvPr/>
-        </p:nvSpPr>
-        <p:spPr>
-          <a:xfrm>
-            <a:off x="11155680" y="1417320"/>
-            <a:ext cx="100584" cy="100584"/>
-          </a:xfrm>
-          <a:prstGeom prst="ellipse">
-            <a:avLst/>
-          </a:prstGeom>
-          <a:solidFill>
-            <a:srgbClr val="CBE7DF"/>
-          </a:solidFill>
-          <a:ln>
-            <a:noFill/>
-          </a:ln>
-          <a:effectLst/>
-        </p:spPr>
-        <p:style>
-          <a:lnRef idx="1">
-            <a:schemeClr val="accent1"/>
-          </a:lnRef>
-          <a:fillRef idx="3">
-            <a:schemeClr val="accent1"/>
-          </a:fillRef>
-          <a:effectRef idx="2">
-            <a:schemeClr val="accent1"/>
-          </a:effectRef>
-          <a:fontRef idx="minor">
-            <a:schemeClr val="lt1"/>
-          </a:fontRef>
-        </p:style>
-        <p:txBody>
-          <a:bodyPr rtlCol="0" anchor="ctr"/>
-          <a:lstStyle/>
-          <a:p>
-            <a:pPr algn="ctr"/>
-          </a:p>
-        </p:txBody>
-      </p:sp>
-      <p:sp>
-        <p:nvSpPr>
-          <p:cNvPr id="4" name="Oval 3"/>
-          <p:cNvSpPr/>
-          <p:nvPr/>
-        </p:nvSpPr>
-        <p:spPr>
-          <a:xfrm>
-            <a:off x="10744200" y="1965960"/>
-            <a:ext cx="155448" cy="155448"/>
-          </a:xfrm>
-          <a:prstGeom prst="ellipse">
-            <a:avLst/>
-          </a:prstGeom>
-          <a:solidFill>
-            <a:srgbClr val="CBE7DF"/>
-          </a:solidFill>
-          <a:ln>
-            <a:noFill/>
-          </a:ln>
-          <a:effectLst/>
-        </p:spPr>
-        <p:style>
-          <a:lnRef idx="1">
-            <a:schemeClr val="accent1"/>
-          </a:lnRef>
-          <a:fillRef idx="3">
-            <a:schemeClr val="accent1"/>
-          </a:fillRef>
-          <a:effectRef idx="2">
-            <a:schemeClr val="accent1"/>
-          </a:effectRef>
-          <a:fontRef idx="minor">
-            <a:schemeClr val="lt1"/>
-          </a:fontRef>
-        </p:style>
-        <p:txBody>
-          <a:bodyPr rtlCol="0" anchor="ctr"/>
-          <a:lstStyle/>
-          <a:p>
-            <a:pPr algn="ctr"/>
-          </a:p>
-        </p:txBody>
-      </p:sp>
-      <p:sp>
-        <p:nvSpPr>
-          <p:cNvPr id="5" name="Oval 4"/>
-          <p:cNvSpPr/>
-          <p:nvPr/>
-        </p:nvSpPr>
-        <p:spPr>
-          <a:xfrm>
-            <a:off x="11292840" y="2331720"/>
-            <a:ext cx="100584" cy="100584"/>
-          </a:xfrm>
-          <a:prstGeom prst="ellipse">
-            <a:avLst/>
-          </a:prstGeom>
-          <a:solidFill>
-            <a:srgbClr val="CBE7DF"/>
-          </a:solidFill>
-          <a:ln>
-            <a:noFill/>
-          </a:ln>
-          <a:effectLst/>
-        </p:spPr>
-        <p:style>
-          <a:lnRef idx="1">
-            <a:schemeClr val="accent1"/>
-          </a:lnRef>
-          <a:fillRef idx="3">
-            <a:schemeClr val="accent1"/>
-          </a:fillRef>
-          <a:effectRef idx="2">
-            <a:schemeClr val="accent1"/>
-          </a:effectRef>
-          <a:fontRef idx="minor">
-            <a:schemeClr val="lt1"/>
-          </a:fontRef>
-        </p:style>
-        <p:txBody>
-          <a:bodyPr rtlCol="0" anchor="ctr"/>
-          <a:lstStyle/>
-          <a:p>
-            <a:pPr algn="ctr"/>
-          </a:p>
-        </p:txBody>
-      </p:sp>
-      <p:sp>
-        <p:nvSpPr>
-          <p:cNvPr id="6" name="Oval 5"/>
-          <p:cNvSpPr/>
-          <p:nvPr/>
-        </p:nvSpPr>
-        <p:spPr>
-          <a:xfrm>
-            <a:off x="10378440" y="1691640"/>
-            <a:ext cx="155448" cy="155448"/>
-          </a:xfrm>
-          <a:prstGeom prst="ellipse">
-            <a:avLst/>
-          </a:prstGeom>
-          <a:solidFill>
-            <a:srgbClr val="CBE7DF"/>
-          </a:solidFill>
-          <a:ln>
-            <a:noFill/>
-          </a:ln>
-          <a:effectLst/>
-        </p:spPr>
-        <p:style>
-          <a:lnRef idx="1">
-            <a:schemeClr val="accent1"/>
-          </a:lnRef>
-          <a:fillRef idx="3">
-            <a:schemeClr val="accent1"/>
-          </a:fillRef>
-          <a:effectRef idx="2">
-            <a:schemeClr val="accent1"/>
-          </a:effectRef>
-          <a:fontRef idx="minor">
-            <a:schemeClr val="lt1"/>
-          </a:fontRef>
-        </p:style>
-        <p:txBody>
-          <a:bodyPr rtlCol="0" anchor="ctr"/>
-          <a:lstStyle/>
-          <a:p>
-            <a:pPr algn="ctr"/>
-          </a:p>
-        </p:txBody>
-      </p:sp>
-      <p:cxnSp>
-        <p:nvCxnSpPr>
-          <p:cNvPr id="7" name="Connector 6"/>
-          <p:cNvCxnSpPr/>
-          <p:nvPr/>
-        </p:nvCxnSpPr>
-        <p:spPr>
-          <a:xfrm>
-            <a:off x="10689336" y="996696"/>
-            <a:ext cx="548640" cy="502920"/>
-          </a:xfrm>
-          <a:prstGeom prst="line">
-            <a:avLst/>
-          </a:prstGeom>
-          <a:ln w="12700">
-            <a:solidFill>
-              <a:srgbClr val="D7EAE4"/>
-            </a:solidFill>
-          </a:ln>
-        </p:spPr>
-        <p:style>
-          <a:lnRef idx="2">
-            <a:schemeClr val="accent1"/>
-          </a:lnRef>
-          <a:fillRef idx="0">
-            <a:schemeClr val="accent1"/>
-          </a:fillRef>
-          <a:effectRef idx="1">
-            <a:schemeClr val="accent1"/>
-          </a:effectRef>
-          <a:fontRef idx="minor">
-            <a:schemeClr val="tx1"/>
-          </a:fontRef>
-        </p:style>
-      </p:cxnSp>
-      <p:cxnSp>
-        <p:nvCxnSpPr>
-          <p:cNvPr id="8" name="Connector 7"/>
-          <p:cNvCxnSpPr/>
-          <p:nvPr/>
-        </p:nvCxnSpPr>
-        <p:spPr>
-          <a:xfrm flipH="1">
-            <a:off x="10826496" y="1499616"/>
-            <a:ext cx="411480" cy="548639"/>
-          </a:xfrm>
-          <a:prstGeom prst="line">
-            <a:avLst/>
-          </a:prstGeom>
-          <a:ln w="12700">
-            <a:solidFill>
-              <a:srgbClr val="D7EAE4"/>
-            </a:solidFill>
-          </a:ln>
-        </p:spPr>
-        <p:style>
-          <a:lnRef idx="2">
-            <a:schemeClr val="accent1"/>
-          </a:lnRef>
-          <a:fillRef idx="0">
-            <a:schemeClr val="accent1"/>
-          </a:fillRef>
-          <a:effectRef idx="1">
-            <a:schemeClr val="accent1"/>
-          </a:effectRef>
-          <a:fontRef idx="minor">
-            <a:schemeClr val="tx1"/>
-          </a:fontRef>
-        </p:style>
-      </p:cxnSp>
-      <p:cxnSp>
-        <p:nvCxnSpPr>
-          <p:cNvPr id="9" name="Connector 8"/>
-          <p:cNvCxnSpPr/>
-          <p:nvPr/>
-        </p:nvCxnSpPr>
-        <p:spPr>
-          <a:xfrm>
-            <a:off x="10826496" y="2048255"/>
-            <a:ext cx="548640" cy="365760"/>
-          </a:xfrm>
-          <a:prstGeom prst="line">
-            <a:avLst/>
-          </a:prstGeom>
-          <a:ln w="12700">
-            <a:solidFill>
-              <a:srgbClr val="D7EAE4"/>
-            </a:solidFill>
-          </a:ln>
-        </p:spPr>
-        <p:style>
-          <a:lnRef idx="2">
-            <a:schemeClr val="accent1"/>
-          </a:lnRef>
-          <a:fillRef idx="0">
-            <a:schemeClr val="accent1"/>
-          </a:fillRef>
-          <a:effectRef idx="1">
-            <a:schemeClr val="accent1"/>
-          </a:effectRef>
-          <a:fontRef idx="minor">
-            <a:schemeClr val="tx1"/>
-          </a:fontRef>
-        </p:style>
-      </p:cxnSp>
-      <p:cxnSp>
-        <p:nvCxnSpPr>
-          <p:cNvPr id="10" name="Connector 9"/>
-          <p:cNvCxnSpPr/>
-          <p:nvPr/>
-        </p:nvCxnSpPr>
-        <p:spPr>
-          <a:xfrm flipH="1" flipV="1">
-            <a:off x="10460736" y="1773936"/>
-            <a:ext cx="914400" cy="640079"/>
-          </a:xfrm>
-          <a:prstGeom prst="line">
-            <a:avLst/>
-          </a:prstGeom>
-          <a:ln w="12700">
-            <a:solidFill>
-              <a:srgbClr val="D7EAE4"/>
-            </a:solidFill>
-          </a:ln>
-        </p:spPr>
-        <p:style>
-          <a:lnRef idx="2">
-            <a:schemeClr val="accent1"/>
-          </a:lnRef>
-          <a:fillRef idx="0">
-            <a:schemeClr val="accent1"/>
-          </a:fillRef>
-          <a:effectRef idx="1">
-            <a:schemeClr val="accent1"/>
-          </a:effectRef>
-          <a:fontRef idx="minor">
-            <a:schemeClr val="tx1"/>
-          </a:fontRef>
-        </p:style>
-      </p:cxnSp>
-      <p:sp>
-        <p:nvSpPr>
-          <p:cNvPr id="11" name="Rectangle 10"/>
-          <p:cNvSpPr/>
-          <p:nvPr/>
-        </p:nvSpPr>
-        <p:spPr>
-          <a:xfrm>
-            <a:off x="0" y="0"/>
-            <a:ext cx="12191695" cy="786384"/>
-          </a:xfrm>
-          <a:prstGeom prst="rect">
-            <a:avLst/>
-          </a:prstGeom>
-          <a:solidFill>
-            <a:srgbClr val="0E4F45"/>
-          </a:solidFill>
-          <a:ln>
-            <a:noFill/>
-          </a:ln>
-          <a:effectLst/>
-        </p:spPr>
-        <p:style>
-          <a:lnRef idx="1">
-            <a:schemeClr val="accent1"/>
-          </a:lnRef>
-          <a:fillRef idx="3">
-            <a:schemeClr val="accent1"/>
-          </a:fillRef>
-          <a:effectRef idx="2">
-            <a:schemeClr val="accent1"/>
-          </a:effectRef>
-          <a:fontRef idx="minor">
-            <a:schemeClr val="lt1"/>
-          </a:fontRef>
-        </p:style>
-        <p:txBody>
-          <a:bodyPr rtlCol="0" anchor="ctr"/>
-          <a:lstStyle/>
-          <a:p>
-            <a:pPr algn="ctr"/>
-          </a:p>
-        </p:txBody>
-      </p:sp>
-      <p:sp>
-        <p:nvSpPr>
-          <p:cNvPr id="12" name="Rectangle 11"/>
-          <p:cNvSpPr/>
-          <p:nvPr/>
-        </p:nvSpPr>
-        <p:spPr>
-          <a:xfrm>
-            <a:off x="0" y="786384"/>
-            <a:ext cx="12191695" cy="36576"/>
-          </a:xfrm>
-          <a:prstGeom prst="rect">
-            <a:avLst/>
-          </a:prstGeom>
-          <a:solidFill>
-            <a:srgbClr val="E8710A"/>
-          </a:solidFill>
-          <a:ln>
-            <a:noFill/>
-          </a:ln>
-          <a:effectLst/>
-        </p:spPr>
-        <p:style>
-          <a:lnRef idx="1">
-            <a:schemeClr val="accent1"/>
-          </a:lnRef>
-          <a:fillRef idx="3">
-            <a:schemeClr val="accent1"/>
-          </a:fillRef>
-          <a:effectRef idx="2">
-            <a:schemeClr val="accent1"/>
-          </a:effectRef>
-          <a:fontRef idx="minor">
-            <a:schemeClr val="lt1"/>
-          </a:fontRef>
-        </p:style>
-        <p:txBody>
-          <a:bodyPr rtlCol="0" anchor="ctr"/>
-          <a:lstStyle/>
-          <a:p>
-            <a:pPr algn="ctr"/>
-          </a:p>
-        </p:txBody>
-      </p:sp>
-      <p:sp>
-        <p:nvSpPr>
-          <p:cNvPr id="13" name="TextBox 12"/>
+          <p:cNvPr id="6" name="TextBox 5"/>
           <p:cNvSpPr txBox="1"/>
           <p:nvPr/>
         </p:nvSpPr>
         <p:spPr>
           <a:xfrm>
-            <a:off x="548640" y="128016"/>
-            <a:ext cx="8442656" cy="530352"/>
-          </a:xfrm>
-          <a:prstGeom prst="rect">
-            <a:avLst/>
-          </a:prstGeom>
-          <a:noFill/>
-        </p:spPr>
-        <p:txBody>
-          <a:bodyPr wrap="square" anchor="ctr" lIns="54864" rIns="54864" tIns="0" bIns="0">
-            <a:spAutoFit/>
-          </a:bodyPr>
-          <a:lstStyle/>
-          <a:p>
-            <a:pPr algn="l">
-              <a:lnSpc>
-                <a:spcPct val="130000"/>
-              </a:lnSpc>
-              <a:defRPr sz="2800"/>
-            </a:pPr>
-            <a:r>
-              <a:rPr sz="2800" b="1" u="none">
-                <a:solidFill>
-                  <a:srgbClr val="FFFFFF"/>
-                </a:solidFill>
-                <a:latin typeface="Times New Roman"/>
-                <a:ea typeface="Noto Sans CJK SC"/>
-              </a:rPr>
-              <a:t>考点二 热化学方程式的书写</a:t>
-            </a:r>
-          </a:p>
-        </p:txBody>
-      </p:sp>
-      <p:sp>
-        <p:nvSpPr>
-          <p:cNvPr id="14" name="Rounded Rectangle 13"/>
-          <p:cNvSpPr/>
-          <p:nvPr/>
-        </p:nvSpPr>
-        <p:spPr>
-          <a:xfrm>
-            <a:off x="9686239" y="201168"/>
-            <a:ext cx="2002536" cy="365760"/>
-          </a:xfrm>
-          <a:prstGeom prst="roundRect">
-            <a:avLst>
-              <a:gd name="adj" fmla="val 35000"/>
-            </a:avLst>
-          </a:prstGeom>
-          <a:solidFill>
-            <a:srgbClr val="2A3F63"/>
-          </a:solidFill>
-          <a:ln>
-            <a:noFill/>
-          </a:ln>
-          <a:effectLst/>
-        </p:spPr>
-        <p:style>
-          <a:lnRef idx="1">
-            <a:schemeClr val="accent1"/>
-          </a:lnRef>
-          <a:fillRef idx="3">
-            <a:schemeClr val="accent1"/>
-          </a:fillRef>
-          <a:effectRef idx="2">
-            <a:schemeClr val="accent1"/>
-          </a:effectRef>
-          <a:fontRef idx="minor">
-            <a:schemeClr val="lt1"/>
-          </a:fontRef>
-        </p:style>
-        <p:txBody>
-          <a:bodyPr rtlCol="0" anchor="ctr"/>
-          <a:lstStyle/>
-          <a:p>
-            <a:pPr algn="ctr"/>
-          </a:p>
-        </p:txBody>
-      </p:sp>
-      <p:sp>
-        <p:nvSpPr>
-          <p:cNvPr id="15" name="TextBox 14"/>
-          <p:cNvSpPr txBox="1"/>
-          <p:nvPr/>
-        </p:nvSpPr>
-        <p:spPr>
-          <a:xfrm>
-            <a:off x="9686239" y="219456"/>
-            <a:ext cx="2002536" cy="329184"/>
+            <a:off x="548640" y="365760"/>
+            <a:ext cx="4581144" cy="548640"/>
           </a:xfrm>
           <a:prstGeom prst="rect">
             <a:avLst/>
@@ -8171,24 +7529,24 @@
               <a:lnSpc>
                 <a:spcPct val="130000"/>
               </a:lnSpc>
-              <a:defRPr sz="1100"/>
+              <a:defRPr sz="2300"/>
             </a:pPr>
             <a:r>
-              <a:rPr sz="1100" b="1" u="none">
+              <a:rPr sz="2300" b="1" u="none">
                 <a:solidFill>
                   <a:srgbClr val="FFFFFF"/>
                 </a:solidFill>
                 <a:latin typeface="Times New Roman"/>
-                <a:ea typeface="Noto Sans CJK SC"/>
+                <a:ea typeface="Noto Serif CJK SC"/>
               </a:rPr>
-              <a:t>考点二 热化学方程式</a:t>
-            </a:r>
-          </a:p>
-        </p:txBody>
-      </p:sp>
-      <p:sp>
-        <p:nvSpPr>
-          <p:cNvPr id="16" name="TextBox 15"/>
+              <a:t>考点二 热化学方程式的书写</a:t>
+            </a:r>
+          </a:p>
+        </p:txBody>
+      </p:sp>
+      <p:sp>
+        <p:nvSpPr>
+          <p:cNvPr id="7" name="TextBox 6"/>
           <p:cNvSpPr txBox="1"/>
           <p:nvPr/>
         </p:nvSpPr>
@@ -8217,20 +7575,20 @@
             <a:r>
               <a:rPr sz="2600" b="0" u="none">
                 <a:solidFill>
-                  <a:srgbClr val="E8710A"/>
+                  <a:srgbClr val="2E75B6"/>
                 </a:solidFill>
                 <a:latin typeface="Times New Roman"/>
-                <a:ea typeface="Noto Sans CJK SC"/>
+                <a:ea typeface="Noto Serif CJK SC"/>
               </a:rPr>
               <a:t>▪ </a:t>
             </a:r>
             <a:r>
               <a:rPr sz="2600" b="0" u="none">
                 <a:solidFill>
-                  <a:srgbClr val="122A26"/>
+                  <a:srgbClr val="1C2B3A"/>
                 </a:solidFill>
                 <a:latin typeface="Times New Roman"/>
-                <a:ea typeface="Noto Sans CJK SC"/>
+                <a:ea typeface="Noto Serif CJK SC"/>
               </a:rPr>
               <a:t>书写规范：</a:t>
             </a:r>
@@ -8247,20 +7605,20 @@
             <a:r>
               <a:rPr sz="2600" b="0" u="none">
                 <a:solidFill>
-                  <a:srgbClr val="E8710A"/>
+                  <a:srgbClr val="2E75B6"/>
                 </a:solidFill>
                 <a:latin typeface="Times New Roman"/>
-                <a:ea typeface="Noto Sans CJK SC"/>
+                <a:ea typeface="Noto Serif CJK SC"/>
               </a:rPr>
               <a:t>▪ </a:t>
             </a:r>
             <a:r>
               <a:rPr sz="2600" b="0" u="none">
                 <a:solidFill>
-                  <a:srgbClr val="122A26"/>
+                  <a:srgbClr val="1C2B3A"/>
                 </a:solidFill>
                 <a:latin typeface="Times New Roman"/>
-                <a:ea typeface="Noto Sans CJK SC"/>
+                <a:ea typeface="Noto Serif CJK SC"/>
               </a:rPr>
               <a:t>必须注明物质的聚集状态（g / l / s / aq）。</a:t>
             </a:r>
@@ -8277,20 +7635,20 @@
             <a:r>
               <a:rPr sz="2600" b="0" u="none">
                 <a:solidFill>
-                  <a:srgbClr val="E8710A"/>
+                  <a:srgbClr val="2E75B6"/>
                 </a:solidFill>
                 <a:latin typeface="Times New Roman"/>
-                <a:ea typeface="Noto Sans CJK SC"/>
+                <a:ea typeface="Noto Serif CJK SC"/>
               </a:rPr>
               <a:t>▪ </a:t>
             </a:r>
             <a:r>
               <a:rPr sz="2600" b="0" u="none">
                 <a:solidFill>
-                  <a:srgbClr val="122A26"/>
+                  <a:srgbClr val="1C2B3A"/>
                 </a:solidFill>
                 <a:latin typeface="Times New Roman"/>
-                <a:ea typeface="Noto Sans CJK SC"/>
+                <a:ea typeface="Noto Serif CJK SC"/>
               </a:rPr>
               <a:t>ΔH 的符号不能省略，放热为「−」，吸热为「+」。</a:t>
             </a:r>
@@ -8307,20 +7665,20 @@
             <a:r>
               <a:rPr sz="2600" b="0" u="none">
                 <a:solidFill>
-                  <a:srgbClr val="E8710A"/>
+                  <a:srgbClr val="2E75B6"/>
                 </a:solidFill>
                 <a:latin typeface="Times New Roman"/>
-                <a:ea typeface="Noto Sans CJK SC"/>
+                <a:ea typeface="Noto Serif CJK SC"/>
               </a:rPr>
               <a:t>▪ </a:t>
             </a:r>
             <a:r>
               <a:rPr sz="2600" b="0" u="none">
                 <a:solidFill>
-                  <a:srgbClr val="122A26"/>
+                  <a:srgbClr val="1C2B3A"/>
                 </a:solidFill>
                 <a:latin typeface="Times New Roman"/>
-                <a:ea typeface="Noto Sans CJK SC"/>
+                <a:ea typeface="Noto Serif CJK SC"/>
               </a:rPr>
               <a:t>化学计量数改变，ΔH 同倍变化。</a:t>
             </a:r>
@@ -8329,20 +7687,22 @@
       </p:sp>
       <p:sp>
         <p:nvSpPr>
-          <p:cNvPr id="17" name="Rectangle 16"/>
+          <p:cNvPr id="8" name="Rounded Rectangle 7"/>
           <p:cNvSpPr/>
           <p:nvPr/>
         </p:nvSpPr>
         <p:spPr>
           <a:xfrm>
-            <a:off x="0" y="6739128"/>
-            <a:ext cx="12191695" cy="118872"/>
-          </a:xfrm>
-          <a:prstGeom prst="rect">
-            <a:avLst/>
+            <a:off x="10600639" y="6382512"/>
+            <a:ext cx="310896" cy="292608"/>
+          </a:xfrm>
+          <a:prstGeom prst="roundRect">
+            <a:avLst>
+              <a:gd name="adj" fmla="val 18000"/>
+            </a:avLst>
           </a:prstGeom>
           <a:solidFill>
-            <a:srgbClr val="E8710A"/>
+            <a:srgbClr val="E4E9F0"/>
           </a:solidFill>
           <a:ln>
             <a:noFill/>
@@ -8373,14 +7733,14 @@
       </p:sp>
       <p:sp>
         <p:nvSpPr>
-          <p:cNvPr id="18" name="TextBox 17"/>
+          <p:cNvPr id="9" name="TextBox 8"/>
           <p:cNvSpPr txBox="1"/>
           <p:nvPr/>
         </p:nvSpPr>
         <p:spPr>
           <a:xfrm>
-            <a:off x="548640" y="6345936"/>
-            <a:ext cx="8595360" cy="274320"/>
+            <a:off x="10600639" y="6400800"/>
+            <a:ext cx="310896" cy="274320"/>
           </a:xfrm>
           <a:prstGeom prst="rect">
             <a:avLst/>
@@ -8388,7 +7748,222 @@
           <a:noFill/>
         </p:spPr>
         <p:txBody>
-          <a:bodyPr wrap="square" anchor="t" lIns="54864" rIns="54864" tIns="0" bIns="0">
+          <a:bodyPr wrap="square" anchor="ctr" lIns="54864" rIns="54864" tIns="0" bIns="0">
+            <a:spAutoFit/>
+          </a:bodyPr>
+          <a:lstStyle/>
+          <a:p>
+            <a:pPr algn="ctr">
+              <a:lnSpc>
+                <a:spcPct val="130000"/>
+              </a:lnSpc>
+              <a:defRPr sz="1000"/>
+            </a:pPr>
+            <a:r>
+              <a:rPr sz="1000" b="0" u="none">
+                <a:solidFill>
+                  <a:srgbClr val="6B7785"/>
+                </a:solidFill>
+                <a:latin typeface="Times New Roman"/>
+                <a:ea typeface="Noto Serif CJK SC"/>
+              </a:rPr>
+              <a:t>‹</a:t>
+            </a:r>
+          </a:p>
+        </p:txBody>
+      </p:sp>
+      <p:sp>
+        <p:nvSpPr>
+          <p:cNvPr id="10" name="Rounded Rectangle 9"/>
+          <p:cNvSpPr/>
+          <p:nvPr/>
+        </p:nvSpPr>
+        <p:spPr>
+          <a:xfrm>
+            <a:off x="10966399" y="6382512"/>
+            <a:ext cx="310896" cy="292608"/>
+          </a:xfrm>
+          <a:prstGeom prst="roundRect">
+            <a:avLst>
+              <a:gd name="adj" fmla="val 18000"/>
+            </a:avLst>
+          </a:prstGeom>
+          <a:solidFill>
+            <a:srgbClr val="2E75B6"/>
+          </a:solidFill>
+          <a:ln>
+            <a:noFill/>
+          </a:ln>
+          <a:effectLst/>
+        </p:spPr>
+        <p:style>
+          <a:lnRef idx="1">
+            <a:schemeClr val="accent1"/>
+          </a:lnRef>
+          <a:fillRef idx="3">
+            <a:schemeClr val="accent1"/>
+          </a:fillRef>
+          <a:effectRef idx="2">
+            <a:schemeClr val="accent1"/>
+          </a:effectRef>
+          <a:fontRef idx="minor">
+            <a:schemeClr val="lt1"/>
+          </a:fontRef>
+        </p:style>
+        <p:txBody>
+          <a:bodyPr rtlCol="0" anchor="ctr"/>
+          <a:lstStyle/>
+          <a:p>
+            <a:pPr algn="ctr"/>
+          </a:p>
+        </p:txBody>
+      </p:sp>
+      <p:sp>
+        <p:nvSpPr>
+          <p:cNvPr id="11" name="TextBox 10"/>
+          <p:cNvSpPr txBox="1"/>
+          <p:nvPr/>
+        </p:nvSpPr>
+        <p:spPr>
+          <a:xfrm>
+            <a:off x="10966399" y="6400800"/>
+            <a:ext cx="310896" cy="274320"/>
+          </a:xfrm>
+          <a:prstGeom prst="rect">
+            <a:avLst/>
+          </a:prstGeom>
+          <a:noFill/>
+        </p:spPr>
+        <p:txBody>
+          <a:bodyPr wrap="square" anchor="ctr" lIns="54864" rIns="54864" tIns="0" bIns="0">
+            <a:spAutoFit/>
+          </a:bodyPr>
+          <a:lstStyle/>
+          <a:p>
+            <a:pPr algn="ctr">
+              <a:lnSpc>
+                <a:spcPct val="130000"/>
+              </a:lnSpc>
+              <a:defRPr sz="1000"/>
+            </a:pPr>
+            <a:r>
+              <a:rPr sz="1000" b="1" u="none">
+                <a:solidFill>
+                  <a:srgbClr val="FFFFFF"/>
+                </a:solidFill>
+                <a:latin typeface="Times New Roman"/>
+                <a:ea typeface="Noto Serif CJK SC"/>
+              </a:rPr>
+              <a:t>6</a:t>
+            </a:r>
+          </a:p>
+        </p:txBody>
+      </p:sp>
+      <p:sp>
+        <p:nvSpPr>
+          <p:cNvPr id="12" name="Rounded Rectangle 11"/>
+          <p:cNvSpPr/>
+          <p:nvPr/>
+        </p:nvSpPr>
+        <p:spPr>
+          <a:xfrm>
+            <a:off x="11332159" y="6382512"/>
+            <a:ext cx="310896" cy="292608"/>
+          </a:xfrm>
+          <a:prstGeom prst="roundRect">
+            <a:avLst>
+              <a:gd name="adj" fmla="val 18000"/>
+            </a:avLst>
+          </a:prstGeom>
+          <a:solidFill>
+            <a:srgbClr val="E4E9F0"/>
+          </a:solidFill>
+          <a:ln>
+            <a:noFill/>
+          </a:ln>
+          <a:effectLst/>
+        </p:spPr>
+        <p:style>
+          <a:lnRef idx="1">
+            <a:schemeClr val="accent1"/>
+          </a:lnRef>
+          <a:fillRef idx="3">
+            <a:schemeClr val="accent1"/>
+          </a:fillRef>
+          <a:effectRef idx="2">
+            <a:schemeClr val="accent1"/>
+          </a:effectRef>
+          <a:fontRef idx="minor">
+            <a:schemeClr val="lt1"/>
+          </a:fontRef>
+        </p:style>
+        <p:txBody>
+          <a:bodyPr rtlCol="0" anchor="ctr"/>
+          <a:lstStyle/>
+          <a:p>
+            <a:pPr algn="ctr"/>
+          </a:p>
+        </p:txBody>
+      </p:sp>
+      <p:sp>
+        <p:nvSpPr>
+          <p:cNvPr id="13" name="TextBox 12"/>
+          <p:cNvSpPr txBox="1"/>
+          <p:nvPr/>
+        </p:nvSpPr>
+        <p:spPr>
+          <a:xfrm>
+            <a:off x="11332159" y="6400800"/>
+            <a:ext cx="310896" cy="274320"/>
+          </a:xfrm>
+          <a:prstGeom prst="rect">
+            <a:avLst/>
+          </a:prstGeom>
+          <a:noFill/>
+        </p:spPr>
+        <p:txBody>
+          <a:bodyPr wrap="square" anchor="ctr" lIns="54864" rIns="54864" tIns="0" bIns="0">
+            <a:spAutoFit/>
+          </a:bodyPr>
+          <a:lstStyle/>
+          <a:p>
+            <a:pPr algn="ctr">
+              <a:lnSpc>
+                <a:spcPct val="130000"/>
+              </a:lnSpc>
+              <a:defRPr sz="1000"/>
+            </a:pPr>
+            <a:r>
+              <a:rPr sz="1000" b="0" u="none">
+                <a:solidFill>
+                  <a:srgbClr val="6B7785"/>
+                </a:solidFill>
+                <a:latin typeface="Times New Roman"/>
+                <a:ea typeface="Noto Serif CJK SC"/>
+              </a:rPr>
+              <a:t>›</a:t>
+            </a:r>
+          </a:p>
+        </p:txBody>
+      </p:sp>
+      <p:sp>
+        <p:nvSpPr>
+          <p:cNvPr id="14" name="TextBox 13"/>
+          <p:cNvSpPr txBox="1"/>
+          <p:nvPr/>
+        </p:nvSpPr>
+        <p:spPr>
+          <a:xfrm>
+            <a:off x="548640" y="6382512"/>
+            <a:ext cx="7498079" cy="274320"/>
+          </a:xfrm>
+          <a:prstGeom prst="rect">
+            <a:avLst/>
+          </a:prstGeom>
+          <a:noFill/>
+        </p:spPr>
+        <p:txBody>
+          <a:bodyPr wrap="square" anchor="ctr" lIns="54864" rIns="54864" tIns="0" bIns="0">
             <a:spAutoFit/>
           </a:bodyPr>
           <a:lstStyle/>
@@ -8405,50 +7980,9 @@
                   <a:srgbClr val="8A94A6"/>
                 </a:solidFill>
                 <a:latin typeface="Times New Roman"/>
-                <a:ea typeface="Noto Sans CJK SC"/>
+                <a:ea typeface="Noto Serif CJK SC"/>
               </a:rPr>
               <a:t>胶州四中 · 14. 反应热 热化学方程式</a:t>
-            </a:r>
-          </a:p>
-        </p:txBody>
-      </p:sp>
-      <p:sp>
-        <p:nvSpPr>
-          <p:cNvPr id="19" name="TextBox 18"/>
-          <p:cNvSpPr txBox="1"/>
-          <p:nvPr/>
-        </p:nvSpPr>
-        <p:spPr>
-          <a:xfrm>
-            <a:off x="11048695" y="6345936"/>
-            <a:ext cx="685800" cy="274320"/>
-          </a:xfrm>
-          <a:prstGeom prst="rect">
-            <a:avLst/>
-          </a:prstGeom>
-          <a:noFill/>
-        </p:spPr>
-        <p:txBody>
-          <a:bodyPr wrap="square" anchor="t" lIns="54864" rIns="54864" tIns="0" bIns="0">
-            <a:spAutoFit/>
-          </a:bodyPr>
-          <a:lstStyle/>
-          <a:p>
-            <a:pPr algn="r">
-              <a:lnSpc>
-                <a:spcPct val="130000"/>
-              </a:lnSpc>
-              <a:defRPr sz="1000"/>
-            </a:pPr>
-            <a:r>
-              <a:rPr sz="1000" b="0" u="none">
-                <a:solidFill>
-                  <a:srgbClr val="8A94A6"/>
-                </a:solidFill>
-                <a:latin typeface="Times New Roman"/>
-                <a:ea typeface="Noto Sans CJK SC"/>
-              </a:rPr>
-              <a:t>6</a:t>
             </a:r>
           </a:p>
         </p:txBody>
@@ -8479,14 +8013,148 @@
         </p:nvSpPr>
         <p:spPr>
           <a:xfrm>
-            <a:off x="10607040" y="914400"/>
-            <a:ext cx="155448" cy="155448"/>
+            <a:off x="9281160" y="164592"/>
+            <a:ext cx="2651760" cy="2651760"/>
           </a:xfrm>
           <a:prstGeom prst="ellipse">
             <a:avLst/>
           </a:prstGeom>
+          <a:noFill/>
+          <a:ln w="13970">
+            <a:solidFill>
+              <a:srgbClr val="E8EDF2"/>
+            </a:solidFill>
+          </a:ln>
+          <a:effectLst/>
+        </p:spPr>
+        <p:style>
+          <a:lnRef idx="1">
+            <a:schemeClr val="accent1"/>
+          </a:lnRef>
+          <a:fillRef idx="3">
+            <a:schemeClr val="accent1"/>
+          </a:fillRef>
+          <a:effectRef idx="2">
+            <a:schemeClr val="accent1"/>
+          </a:effectRef>
+          <a:fontRef idx="minor">
+            <a:schemeClr val="lt1"/>
+          </a:fontRef>
+        </p:style>
+        <p:txBody>
+          <a:bodyPr rtlCol="0" anchor="ctr"/>
+          <a:lstStyle/>
+          <a:p>
+            <a:pPr algn="ctr"/>
+          </a:p>
+        </p:txBody>
+      </p:sp>
+      <p:sp>
+        <p:nvSpPr>
+          <p:cNvPr id="3" name="Oval 2"/>
+          <p:cNvSpPr/>
+          <p:nvPr/>
+        </p:nvSpPr>
+        <p:spPr>
+          <a:xfrm>
+            <a:off x="9646920" y="502920"/>
+            <a:ext cx="1920240" cy="1920240"/>
+          </a:xfrm>
+          <a:prstGeom prst="ellipse">
+            <a:avLst/>
+          </a:prstGeom>
+          <a:noFill/>
+          <a:ln w="13970">
+            <a:solidFill>
+              <a:srgbClr val="E8EDF2"/>
+            </a:solidFill>
+          </a:ln>
+          <a:effectLst/>
+        </p:spPr>
+        <p:style>
+          <a:lnRef idx="1">
+            <a:schemeClr val="accent1"/>
+          </a:lnRef>
+          <a:fillRef idx="3">
+            <a:schemeClr val="accent1"/>
+          </a:fillRef>
+          <a:effectRef idx="2">
+            <a:schemeClr val="accent1"/>
+          </a:effectRef>
+          <a:fontRef idx="minor">
+            <a:schemeClr val="lt1"/>
+          </a:fontRef>
+        </p:style>
+        <p:txBody>
+          <a:bodyPr rtlCol="0" anchor="ctr"/>
+          <a:lstStyle/>
+          <a:p>
+            <a:pPr algn="ctr"/>
+          </a:p>
+        </p:txBody>
+      </p:sp>
+      <p:sp>
+        <p:nvSpPr>
+          <p:cNvPr id="4" name="Oval 3"/>
+          <p:cNvSpPr/>
+          <p:nvPr/>
+        </p:nvSpPr>
+        <p:spPr>
+          <a:xfrm>
+            <a:off x="10012680" y="868680"/>
+            <a:ext cx="1188720" cy="1188720"/>
+          </a:xfrm>
+          <a:prstGeom prst="ellipse">
+            <a:avLst/>
+          </a:prstGeom>
+          <a:noFill/>
+          <a:ln w="13970">
+            <a:solidFill>
+              <a:srgbClr val="E8EDF2"/>
+            </a:solidFill>
+          </a:ln>
+          <a:effectLst/>
+        </p:spPr>
+        <p:style>
+          <a:lnRef idx="1">
+            <a:schemeClr val="accent1"/>
+          </a:lnRef>
+          <a:fillRef idx="3">
+            <a:schemeClr val="accent1"/>
+          </a:fillRef>
+          <a:effectRef idx="2">
+            <a:schemeClr val="accent1"/>
+          </a:effectRef>
+          <a:fontRef idx="minor">
+            <a:schemeClr val="lt1"/>
+          </a:fontRef>
+        </p:style>
+        <p:txBody>
+          <a:bodyPr rtlCol="0" anchor="ctr"/>
+          <a:lstStyle/>
+          <a:p>
+            <a:pPr algn="ctr"/>
+          </a:p>
+        </p:txBody>
+      </p:sp>
+      <p:sp>
+        <p:nvSpPr>
+          <p:cNvPr id="5" name="Rounded Rectangle 4"/>
+          <p:cNvSpPr/>
+          <p:nvPr/>
+        </p:nvSpPr>
+        <p:spPr>
+          <a:xfrm>
+            <a:off x="548640" y="347472"/>
+            <a:ext cx="5486400" cy="585216"/>
+          </a:xfrm>
+          <a:prstGeom prst="roundRect">
+            <a:avLst>
+              <a:gd name="adj" fmla="val 32000"/>
+            </a:avLst>
+          </a:prstGeom>
           <a:solidFill>
-            <a:srgbClr val="CBE7DF"/>
+            <a:srgbClr val="2E75B6"/>
           </a:solidFill>
           <a:ln>
             <a:noFill/>
@@ -8517,20 +8185,63 @@
       </p:sp>
       <p:sp>
         <p:nvSpPr>
-          <p:cNvPr id="3" name="Oval 2"/>
+          <p:cNvPr id="6" name="TextBox 5"/>
+          <p:cNvSpPr txBox="1"/>
+          <p:nvPr/>
+        </p:nvSpPr>
+        <p:spPr>
+          <a:xfrm>
+            <a:off x="548640" y="365760"/>
+            <a:ext cx="5486400" cy="548640"/>
+          </a:xfrm>
+          <a:prstGeom prst="rect">
+            <a:avLst/>
+          </a:prstGeom>
+          <a:noFill/>
+        </p:spPr>
+        <p:txBody>
+          <a:bodyPr wrap="square" anchor="ctr" lIns="54864" rIns="54864" tIns="0" bIns="0">
+            <a:spAutoFit/>
+          </a:bodyPr>
+          <a:lstStyle/>
+          <a:p>
+            <a:pPr algn="ctr">
+              <a:lnSpc>
+                <a:spcPct val="130000"/>
+              </a:lnSpc>
+              <a:defRPr sz="2300"/>
+            </a:pPr>
+            <a:r>
+              <a:rPr sz="2300" b="1" u="none">
+                <a:solidFill>
+                  <a:srgbClr val="FFFFFF"/>
+                </a:solidFill>
+                <a:latin typeface="Times New Roman"/>
+                <a:ea typeface="Noto Serif CJK SC"/>
+              </a:rPr>
+              <a:t>考点二 热化学方程式的书写｜公式</a:t>
+            </a:r>
+          </a:p>
+        </p:txBody>
+      </p:sp>
+      <p:sp>
+        <p:nvSpPr>
+          <p:cNvPr id="7" name="Rounded Rectangle 6"/>
           <p:cNvSpPr/>
           <p:nvPr/>
         </p:nvSpPr>
         <p:spPr>
           <a:xfrm>
-            <a:off x="11155680" y="1417320"/>
-            <a:ext cx="100584" cy="100584"/>
-          </a:xfrm>
-          <a:prstGeom prst="ellipse">
-            <a:avLst/>
+            <a:off x="731520" y="1371600"/>
+            <a:ext cx="10728655" cy="1600200"/>
+          </a:xfrm>
+          <a:prstGeom prst="roundRect">
+            <a:avLst>
+              <a:gd name="adj" fmla="val 4000"/>
+            </a:avLst>
           </a:prstGeom>
           <a:solidFill>
-            <a:srgbClr val="CBE7DF"/>
+            <a:srgbClr val="F1F5F9"/>
           </a:solidFill>
           <a:ln>
             <a:noFill/>
@@ -8561,454 +8272,7 @@
       </p:sp>
       <p:sp>
         <p:nvSpPr>
-          <p:cNvPr id="4" name="Oval 3"/>
-          <p:cNvSpPr/>
-          <p:nvPr/>
-        </p:nvSpPr>
-        <p:spPr>
-          <a:xfrm>
-            <a:off x="10744200" y="1965960"/>
-            <a:ext cx="155448" cy="155448"/>
-          </a:xfrm>
-          <a:prstGeom prst="ellipse">
-            <a:avLst/>
-          </a:prstGeom>
-          <a:solidFill>
-            <a:srgbClr val="CBE7DF"/>
-          </a:solidFill>
-          <a:ln>
-            <a:noFill/>
-          </a:ln>
-          <a:effectLst/>
-        </p:spPr>
-        <p:style>
-          <a:lnRef idx="1">
-            <a:schemeClr val="accent1"/>
-          </a:lnRef>
-          <a:fillRef idx="3">
-            <a:schemeClr val="accent1"/>
-          </a:fillRef>
-          <a:effectRef idx="2">
-            <a:schemeClr val="accent1"/>
-          </a:effectRef>
-          <a:fontRef idx="minor">
-            <a:schemeClr val="lt1"/>
-          </a:fontRef>
-        </p:style>
-        <p:txBody>
-          <a:bodyPr rtlCol="0" anchor="ctr"/>
-          <a:lstStyle/>
-          <a:p>
-            <a:pPr algn="ctr"/>
-          </a:p>
-        </p:txBody>
-      </p:sp>
-      <p:sp>
-        <p:nvSpPr>
-          <p:cNvPr id="5" name="Oval 4"/>
-          <p:cNvSpPr/>
-          <p:nvPr/>
-        </p:nvSpPr>
-        <p:spPr>
-          <a:xfrm>
-            <a:off x="11292840" y="2331720"/>
-            <a:ext cx="100584" cy="100584"/>
-          </a:xfrm>
-          <a:prstGeom prst="ellipse">
-            <a:avLst/>
-          </a:prstGeom>
-          <a:solidFill>
-            <a:srgbClr val="CBE7DF"/>
-          </a:solidFill>
-          <a:ln>
-            <a:noFill/>
-          </a:ln>
-          <a:effectLst/>
-        </p:spPr>
-        <p:style>
-          <a:lnRef idx="1">
-            <a:schemeClr val="accent1"/>
-          </a:lnRef>
-          <a:fillRef idx="3">
-            <a:schemeClr val="accent1"/>
-          </a:fillRef>
-          <a:effectRef idx="2">
-            <a:schemeClr val="accent1"/>
-          </a:effectRef>
-          <a:fontRef idx="minor">
-            <a:schemeClr val="lt1"/>
-          </a:fontRef>
-        </p:style>
-        <p:txBody>
-          <a:bodyPr rtlCol="0" anchor="ctr"/>
-          <a:lstStyle/>
-          <a:p>
-            <a:pPr algn="ctr"/>
-          </a:p>
-        </p:txBody>
-      </p:sp>
-      <p:sp>
-        <p:nvSpPr>
-          <p:cNvPr id="6" name="Oval 5"/>
-          <p:cNvSpPr/>
-          <p:nvPr/>
-        </p:nvSpPr>
-        <p:spPr>
-          <a:xfrm>
-            <a:off x="10378440" y="1691640"/>
-            <a:ext cx="155448" cy="155448"/>
-          </a:xfrm>
-          <a:prstGeom prst="ellipse">
-            <a:avLst/>
-          </a:prstGeom>
-          <a:solidFill>
-            <a:srgbClr val="CBE7DF"/>
-          </a:solidFill>
-          <a:ln>
-            <a:noFill/>
-          </a:ln>
-          <a:effectLst/>
-        </p:spPr>
-        <p:style>
-          <a:lnRef idx="1">
-            <a:schemeClr val="accent1"/>
-          </a:lnRef>
-          <a:fillRef idx="3">
-            <a:schemeClr val="accent1"/>
-          </a:fillRef>
-          <a:effectRef idx="2">
-            <a:schemeClr val="accent1"/>
-          </a:effectRef>
-          <a:fontRef idx="minor">
-            <a:schemeClr val="lt1"/>
-          </a:fontRef>
-        </p:style>
-        <p:txBody>
-          <a:bodyPr rtlCol="0" anchor="ctr"/>
-          <a:lstStyle/>
-          <a:p>
-            <a:pPr algn="ctr"/>
-          </a:p>
-        </p:txBody>
-      </p:sp>
-      <p:cxnSp>
-        <p:nvCxnSpPr>
-          <p:cNvPr id="7" name="Connector 6"/>
-          <p:cNvCxnSpPr/>
-          <p:nvPr/>
-        </p:nvCxnSpPr>
-        <p:spPr>
-          <a:xfrm>
-            <a:off x="10689336" y="996696"/>
-            <a:ext cx="548640" cy="502920"/>
-          </a:xfrm>
-          <a:prstGeom prst="line">
-            <a:avLst/>
-          </a:prstGeom>
-          <a:ln w="12700">
-            <a:solidFill>
-              <a:srgbClr val="D7EAE4"/>
-            </a:solidFill>
-          </a:ln>
-        </p:spPr>
-        <p:style>
-          <a:lnRef idx="2">
-            <a:schemeClr val="accent1"/>
-          </a:lnRef>
-          <a:fillRef idx="0">
-            <a:schemeClr val="accent1"/>
-          </a:fillRef>
-          <a:effectRef idx="1">
-            <a:schemeClr val="accent1"/>
-          </a:effectRef>
-          <a:fontRef idx="minor">
-            <a:schemeClr val="tx1"/>
-          </a:fontRef>
-        </p:style>
-      </p:cxnSp>
-      <p:cxnSp>
-        <p:nvCxnSpPr>
-          <p:cNvPr id="8" name="Connector 7"/>
-          <p:cNvCxnSpPr/>
-          <p:nvPr/>
-        </p:nvCxnSpPr>
-        <p:spPr>
-          <a:xfrm flipH="1">
-            <a:off x="10826496" y="1499616"/>
-            <a:ext cx="411480" cy="548639"/>
-          </a:xfrm>
-          <a:prstGeom prst="line">
-            <a:avLst/>
-          </a:prstGeom>
-          <a:ln w="12700">
-            <a:solidFill>
-              <a:srgbClr val="D7EAE4"/>
-            </a:solidFill>
-          </a:ln>
-        </p:spPr>
-        <p:style>
-          <a:lnRef idx="2">
-            <a:schemeClr val="accent1"/>
-          </a:lnRef>
-          <a:fillRef idx="0">
-            <a:schemeClr val="accent1"/>
-          </a:fillRef>
-          <a:effectRef idx="1">
-            <a:schemeClr val="accent1"/>
-          </a:effectRef>
-          <a:fontRef idx="minor">
-            <a:schemeClr val="tx1"/>
-          </a:fontRef>
-        </p:style>
-      </p:cxnSp>
-      <p:cxnSp>
-        <p:nvCxnSpPr>
-          <p:cNvPr id="9" name="Connector 8"/>
-          <p:cNvCxnSpPr/>
-          <p:nvPr/>
-        </p:nvCxnSpPr>
-        <p:spPr>
-          <a:xfrm>
-            <a:off x="10826496" y="2048255"/>
-            <a:ext cx="548640" cy="365760"/>
-          </a:xfrm>
-          <a:prstGeom prst="line">
-            <a:avLst/>
-          </a:prstGeom>
-          <a:ln w="12700">
-            <a:solidFill>
-              <a:srgbClr val="D7EAE4"/>
-            </a:solidFill>
-          </a:ln>
-        </p:spPr>
-        <p:style>
-          <a:lnRef idx="2">
-            <a:schemeClr val="accent1"/>
-          </a:lnRef>
-          <a:fillRef idx="0">
-            <a:schemeClr val="accent1"/>
-          </a:fillRef>
-          <a:effectRef idx="1">
-            <a:schemeClr val="accent1"/>
-          </a:effectRef>
-          <a:fontRef idx="minor">
-            <a:schemeClr val="tx1"/>
-          </a:fontRef>
-        </p:style>
-      </p:cxnSp>
-      <p:cxnSp>
-        <p:nvCxnSpPr>
-          <p:cNvPr id="10" name="Connector 9"/>
-          <p:cNvCxnSpPr/>
-          <p:nvPr/>
-        </p:nvCxnSpPr>
-        <p:spPr>
-          <a:xfrm flipH="1" flipV="1">
-            <a:off x="10460736" y="1773936"/>
-            <a:ext cx="914400" cy="640079"/>
-          </a:xfrm>
-          <a:prstGeom prst="line">
-            <a:avLst/>
-          </a:prstGeom>
-          <a:ln w="12700">
-            <a:solidFill>
-              <a:srgbClr val="D7EAE4"/>
-            </a:solidFill>
-          </a:ln>
-        </p:spPr>
-        <p:style>
-          <a:lnRef idx="2">
-            <a:schemeClr val="accent1"/>
-          </a:lnRef>
-          <a:fillRef idx="0">
-            <a:schemeClr val="accent1"/>
-          </a:fillRef>
-          <a:effectRef idx="1">
-            <a:schemeClr val="accent1"/>
-          </a:effectRef>
-          <a:fontRef idx="minor">
-            <a:schemeClr val="tx1"/>
-          </a:fontRef>
-        </p:style>
-      </p:cxnSp>
-      <p:sp>
-        <p:nvSpPr>
-          <p:cNvPr id="11" name="Rectangle 10"/>
-          <p:cNvSpPr/>
-          <p:nvPr/>
-        </p:nvSpPr>
-        <p:spPr>
-          <a:xfrm>
-            <a:off x="0" y="0"/>
-            <a:ext cx="12191695" cy="786384"/>
-          </a:xfrm>
-          <a:prstGeom prst="rect">
-            <a:avLst/>
-          </a:prstGeom>
-          <a:solidFill>
-            <a:srgbClr val="0E4F45"/>
-          </a:solidFill>
-          <a:ln>
-            <a:noFill/>
-          </a:ln>
-          <a:effectLst/>
-        </p:spPr>
-        <p:style>
-          <a:lnRef idx="1">
-            <a:schemeClr val="accent1"/>
-          </a:lnRef>
-          <a:fillRef idx="3">
-            <a:schemeClr val="accent1"/>
-          </a:fillRef>
-          <a:effectRef idx="2">
-            <a:schemeClr val="accent1"/>
-          </a:effectRef>
-          <a:fontRef idx="minor">
-            <a:schemeClr val="lt1"/>
-          </a:fontRef>
-        </p:style>
-        <p:txBody>
-          <a:bodyPr rtlCol="0" anchor="ctr"/>
-          <a:lstStyle/>
-          <a:p>
-            <a:pPr algn="ctr"/>
-          </a:p>
-        </p:txBody>
-      </p:sp>
-      <p:sp>
-        <p:nvSpPr>
-          <p:cNvPr id="12" name="Rectangle 11"/>
-          <p:cNvSpPr/>
-          <p:nvPr/>
-        </p:nvSpPr>
-        <p:spPr>
-          <a:xfrm>
-            <a:off x="0" y="786384"/>
-            <a:ext cx="12191695" cy="36576"/>
-          </a:xfrm>
-          <a:prstGeom prst="rect">
-            <a:avLst/>
-          </a:prstGeom>
-          <a:solidFill>
-            <a:srgbClr val="E8710A"/>
-          </a:solidFill>
-          <a:ln>
-            <a:noFill/>
-          </a:ln>
-          <a:effectLst/>
-        </p:spPr>
-        <p:style>
-          <a:lnRef idx="1">
-            <a:schemeClr val="accent1"/>
-          </a:lnRef>
-          <a:fillRef idx="3">
-            <a:schemeClr val="accent1"/>
-          </a:fillRef>
-          <a:effectRef idx="2">
-            <a:schemeClr val="accent1"/>
-          </a:effectRef>
-          <a:fontRef idx="minor">
-            <a:schemeClr val="lt1"/>
-          </a:fontRef>
-        </p:style>
-        <p:txBody>
-          <a:bodyPr rtlCol="0" anchor="ctr"/>
-          <a:lstStyle/>
-          <a:p>
-            <a:pPr algn="ctr"/>
-          </a:p>
-        </p:txBody>
-      </p:sp>
-      <p:sp>
-        <p:nvSpPr>
-          <p:cNvPr id="13" name="TextBox 12"/>
-          <p:cNvSpPr txBox="1"/>
-          <p:nvPr/>
-        </p:nvSpPr>
-        <p:spPr>
-          <a:xfrm>
-            <a:off x="548640" y="128016"/>
-            <a:ext cx="8442656" cy="530352"/>
-          </a:xfrm>
-          <a:prstGeom prst="rect">
-            <a:avLst/>
-          </a:prstGeom>
-          <a:noFill/>
-        </p:spPr>
-        <p:txBody>
-          <a:bodyPr wrap="square" anchor="ctr" lIns="54864" rIns="54864" tIns="0" bIns="0">
-            <a:spAutoFit/>
-          </a:bodyPr>
-          <a:lstStyle/>
-          <a:p>
-            <a:pPr algn="l">
-              <a:lnSpc>
-                <a:spcPct val="130000"/>
-              </a:lnSpc>
-              <a:defRPr sz="2800"/>
-            </a:pPr>
-            <a:r>
-              <a:rPr sz="2800" b="1" u="none">
-                <a:solidFill>
-                  <a:srgbClr val="FFFFFF"/>
-                </a:solidFill>
-                <a:latin typeface="Times New Roman"/>
-                <a:ea typeface="Noto Sans CJK SC"/>
-              </a:rPr>
-              <a:t>考点二 热化学方程式的书写｜公式</a:t>
-            </a:r>
-          </a:p>
-        </p:txBody>
-      </p:sp>
-      <p:sp>
-        <p:nvSpPr>
-          <p:cNvPr id="14" name="Rounded Rectangle 13"/>
-          <p:cNvSpPr/>
-          <p:nvPr/>
-        </p:nvSpPr>
-        <p:spPr>
-          <a:xfrm>
-            <a:off x="731520" y="1371600"/>
-            <a:ext cx="10728655" cy="1600200"/>
-          </a:xfrm>
-          <a:prstGeom prst="roundRect">
-            <a:avLst>
-              <a:gd name="adj" fmla="val 4000"/>
-            </a:avLst>
-          </a:prstGeom>
-          <a:solidFill>
-            <a:srgbClr val="E9F0F2"/>
-          </a:solidFill>
-          <a:ln>
-            <a:noFill/>
-          </a:ln>
-          <a:effectLst/>
-        </p:spPr>
-        <p:style>
-          <a:lnRef idx="1">
-            <a:schemeClr val="accent1"/>
-          </a:lnRef>
-          <a:fillRef idx="3">
-            <a:schemeClr val="accent1"/>
-          </a:fillRef>
-          <a:effectRef idx="2">
-            <a:schemeClr val="accent1"/>
-          </a:effectRef>
-          <a:fontRef idx="minor">
-            <a:schemeClr val="lt1"/>
-          </a:fontRef>
-        </p:style>
-        <p:txBody>
-          <a:bodyPr rtlCol="0" anchor="ctr"/>
-          <a:lstStyle/>
-          <a:p>
-            <a:pPr algn="ctr"/>
-          </a:p>
-        </p:txBody>
-      </p:sp>
-      <p:sp>
-        <p:nvSpPr>
-          <p:cNvPr id="15" name="TextBox 14"/>
+          <p:cNvPr id="8" name="TextBox 7"/>
           <p:cNvSpPr txBox="1"/>
           <p:nvPr/>
         </p:nvSpPr>
@@ -9037,10 +8301,10 @@
             <a:r>
               <a:rPr sz="3200" b="1" u="none">
                 <a:solidFill>
-                  <a:srgbClr val="0E4F45"/>
+                  <a:srgbClr val="1F4E79"/>
                 </a:solidFill>
                 <a:latin typeface="Times New Roman"/>
-                <a:ea typeface="Noto Sans CJK SC"/>
+                <a:ea typeface="Noto Serif CJK SC"/>
               </a:rPr>
               <a:t>ΔH = ΣE(反应物键能) − ΣE(生成物键能)</a:t>
             </a:r>
@@ -9049,7 +8313,7 @@
       </p:sp>
       <p:sp>
         <p:nvSpPr>
-          <p:cNvPr id="16" name="Rounded Rectangle 15"/>
+          <p:cNvPr id="9" name="Rounded Rectangle 8"/>
           <p:cNvSpPr/>
           <p:nvPr/>
         </p:nvSpPr>
@@ -9097,7 +8361,7 @@
       </p:sp>
       <p:sp>
         <p:nvSpPr>
-          <p:cNvPr id="17" name="TextBox 16"/>
+          <p:cNvPr id="10" name="TextBox 9"/>
           <p:cNvSpPr txBox="1"/>
           <p:nvPr/>
         </p:nvSpPr>
@@ -9126,10 +8390,10 @@
             <a:r>
               <a:rPr sz="1500" b="1" u="none">
                 <a:solidFill>
-                  <a:srgbClr val="E8710A"/>
+                  <a:srgbClr val="2E75B6"/>
                 </a:solidFill>
                 <a:latin typeface="Times New Roman"/>
-                <a:ea typeface="Noto Sans CJK SC"/>
+                <a:ea typeface="Noto Serif CJK SC"/>
               </a:rPr>
               <a:t>条件</a:t>
             </a:r>
@@ -9138,7 +8402,7 @@
       </p:sp>
       <p:sp>
         <p:nvSpPr>
-          <p:cNvPr id="18" name="TextBox 17"/>
+          <p:cNvPr id="11" name="TextBox 10"/>
           <p:cNvSpPr txBox="1"/>
           <p:nvPr/>
         </p:nvSpPr>
@@ -9167,10 +8431,10 @@
             <a:r>
               <a:rPr sz="1600" b="0" u="none">
                 <a:solidFill>
-                  <a:srgbClr val="122A26"/>
+                  <a:srgbClr val="1C2B3A"/>
                 </a:solidFill>
                 <a:latin typeface="Times New Roman"/>
-                <a:ea typeface="Noto Sans CJK SC"/>
+                <a:ea typeface="Noto Serif CJK SC"/>
               </a:rPr>
               <a:t>所有物质均为气态</a:t>
             </a:r>
@@ -9179,7 +8443,7 @@
       </p:sp>
       <p:sp>
         <p:nvSpPr>
-          <p:cNvPr id="19" name="Rounded Rectangle 18"/>
+          <p:cNvPr id="12" name="Rounded Rectangle 11"/>
           <p:cNvSpPr/>
           <p:nvPr/>
         </p:nvSpPr>
@@ -9227,7 +8491,7 @@
       </p:sp>
       <p:sp>
         <p:nvSpPr>
-          <p:cNvPr id="20" name="TextBox 19"/>
+          <p:cNvPr id="13" name="TextBox 12"/>
           <p:cNvSpPr txBox="1"/>
           <p:nvPr/>
         </p:nvSpPr>
@@ -9256,10 +8520,10 @@
             <a:r>
               <a:rPr sz="1500" b="1" u="none">
                 <a:solidFill>
-                  <a:srgbClr val="E8710A"/>
+                  <a:srgbClr val="2E75B6"/>
                 </a:solidFill>
                 <a:latin typeface="Times New Roman"/>
-                <a:ea typeface="Noto Sans CJK SC"/>
+                <a:ea typeface="Noto Serif CJK SC"/>
               </a:rPr>
               <a:t>结论</a:t>
             </a:r>
@@ -9268,7 +8532,7 @@
       </p:sp>
       <p:sp>
         <p:nvSpPr>
-          <p:cNvPr id="21" name="TextBox 20"/>
+          <p:cNvPr id="14" name="TextBox 13"/>
           <p:cNvSpPr txBox="1"/>
           <p:nvPr/>
         </p:nvSpPr>
@@ -9297,10 +8561,10 @@
             <a:r>
               <a:rPr sz="1600" b="0" u="none">
                 <a:solidFill>
-                  <a:srgbClr val="122A26"/>
+                  <a:srgbClr val="1C2B3A"/>
                 </a:solidFill>
                 <a:latin typeface="Times New Roman"/>
-                <a:ea typeface="Noto Sans CJK SC"/>
+                <a:ea typeface="Noto Serif CJK SC"/>
               </a:rPr>
               <a:t>键能越大，物质越稳定</a:t>
             </a:r>
@@ -9309,20 +8573,22 @@
       </p:sp>
       <p:sp>
         <p:nvSpPr>
-          <p:cNvPr id="22" name="Rectangle 21"/>
+          <p:cNvPr id="15" name="Rounded Rectangle 14"/>
           <p:cNvSpPr/>
           <p:nvPr/>
         </p:nvSpPr>
         <p:spPr>
           <a:xfrm>
-            <a:off x="0" y="6739128"/>
-            <a:ext cx="12191695" cy="118872"/>
-          </a:xfrm>
-          <a:prstGeom prst="rect">
-            <a:avLst/>
+            <a:off x="10600639" y="6382512"/>
+            <a:ext cx="310896" cy="292608"/>
+          </a:xfrm>
+          <a:prstGeom prst="roundRect">
+            <a:avLst>
+              <a:gd name="adj" fmla="val 18000"/>
+            </a:avLst>
           </a:prstGeom>
           <a:solidFill>
-            <a:srgbClr val="E8710A"/>
+            <a:srgbClr val="E4E9F0"/>
           </a:solidFill>
           <a:ln>
             <a:noFill/>
@@ -9353,14 +8619,14 @@
       </p:sp>
       <p:sp>
         <p:nvSpPr>
-          <p:cNvPr id="23" name="TextBox 22"/>
+          <p:cNvPr id="16" name="TextBox 15"/>
           <p:cNvSpPr txBox="1"/>
           <p:nvPr/>
         </p:nvSpPr>
         <p:spPr>
           <a:xfrm>
-            <a:off x="548640" y="6345936"/>
-            <a:ext cx="8595360" cy="274320"/>
+            <a:off x="10600639" y="6400800"/>
+            <a:ext cx="310896" cy="274320"/>
           </a:xfrm>
           <a:prstGeom prst="rect">
             <a:avLst/>
@@ -9368,7 +8634,222 @@
           <a:noFill/>
         </p:spPr>
         <p:txBody>
-          <a:bodyPr wrap="square" anchor="t" lIns="54864" rIns="54864" tIns="0" bIns="0">
+          <a:bodyPr wrap="square" anchor="ctr" lIns="54864" rIns="54864" tIns="0" bIns="0">
+            <a:spAutoFit/>
+          </a:bodyPr>
+          <a:lstStyle/>
+          <a:p>
+            <a:pPr algn="ctr">
+              <a:lnSpc>
+                <a:spcPct val="130000"/>
+              </a:lnSpc>
+              <a:defRPr sz="1000"/>
+            </a:pPr>
+            <a:r>
+              <a:rPr sz="1000" b="0" u="none">
+                <a:solidFill>
+                  <a:srgbClr val="6B7785"/>
+                </a:solidFill>
+                <a:latin typeface="Times New Roman"/>
+                <a:ea typeface="Noto Serif CJK SC"/>
+              </a:rPr>
+              <a:t>‹</a:t>
+            </a:r>
+          </a:p>
+        </p:txBody>
+      </p:sp>
+      <p:sp>
+        <p:nvSpPr>
+          <p:cNvPr id="17" name="Rounded Rectangle 16"/>
+          <p:cNvSpPr/>
+          <p:nvPr/>
+        </p:nvSpPr>
+        <p:spPr>
+          <a:xfrm>
+            <a:off x="10966399" y="6382512"/>
+            <a:ext cx="310896" cy="292608"/>
+          </a:xfrm>
+          <a:prstGeom prst="roundRect">
+            <a:avLst>
+              <a:gd name="adj" fmla="val 18000"/>
+            </a:avLst>
+          </a:prstGeom>
+          <a:solidFill>
+            <a:srgbClr val="2E75B6"/>
+          </a:solidFill>
+          <a:ln>
+            <a:noFill/>
+          </a:ln>
+          <a:effectLst/>
+        </p:spPr>
+        <p:style>
+          <a:lnRef idx="1">
+            <a:schemeClr val="accent1"/>
+          </a:lnRef>
+          <a:fillRef idx="3">
+            <a:schemeClr val="accent1"/>
+          </a:fillRef>
+          <a:effectRef idx="2">
+            <a:schemeClr val="accent1"/>
+          </a:effectRef>
+          <a:fontRef idx="minor">
+            <a:schemeClr val="lt1"/>
+          </a:fontRef>
+        </p:style>
+        <p:txBody>
+          <a:bodyPr rtlCol="0" anchor="ctr"/>
+          <a:lstStyle/>
+          <a:p>
+            <a:pPr algn="ctr"/>
+          </a:p>
+        </p:txBody>
+      </p:sp>
+      <p:sp>
+        <p:nvSpPr>
+          <p:cNvPr id="18" name="TextBox 17"/>
+          <p:cNvSpPr txBox="1"/>
+          <p:nvPr/>
+        </p:nvSpPr>
+        <p:spPr>
+          <a:xfrm>
+            <a:off x="10966399" y="6400800"/>
+            <a:ext cx="310896" cy="274320"/>
+          </a:xfrm>
+          <a:prstGeom prst="rect">
+            <a:avLst/>
+          </a:prstGeom>
+          <a:noFill/>
+        </p:spPr>
+        <p:txBody>
+          <a:bodyPr wrap="square" anchor="ctr" lIns="54864" rIns="54864" tIns="0" bIns="0">
+            <a:spAutoFit/>
+          </a:bodyPr>
+          <a:lstStyle/>
+          <a:p>
+            <a:pPr algn="ctr">
+              <a:lnSpc>
+                <a:spcPct val="130000"/>
+              </a:lnSpc>
+              <a:defRPr sz="1000"/>
+            </a:pPr>
+            <a:r>
+              <a:rPr sz="1000" b="1" u="none">
+                <a:solidFill>
+                  <a:srgbClr val="FFFFFF"/>
+                </a:solidFill>
+                <a:latin typeface="Times New Roman"/>
+                <a:ea typeface="Noto Serif CJK SC"/>
+              </a:rPr>
+              <a:t>7</a:t>
+            </a:r>
+          </a:p>
+        </p:txBody>
+      </p:sp>
+      <p:sp>
+        <p:nvSpPr>
+          <p:cNvPr id="19" name="Rounded Rectangle 18"/>
+          <p:cNvSpPr/>
+          <p:nvPr/>
+        </p:nvSpPr>
+        <p:spPr>
+          <a:xfrm>
+            <a:off x="11332159" y="6382512"/>
+            <a:ext cx="310896" cy="292608"/>
+          </a:xfrm>
+          <a:prstGeom prst="roundRect">
+            <a:avLst>
+              <a:gd name="adj" fmla="val 18000"/>
+            </a:avLst>
+          </a:prstGeom>
+          <a:solidFill>
+            <a:srgbClr val="E4E9F0"/>
+          </a:solidFill>
+          <a:ln>
+            <a:noFill/>
+          </a:ln>
+          <a:effectLst/>
+        </p:spPr>
+        <p:style>
+          <a:lnRef idx="1">
+            <a:schemeClr val="accent1"/>
+          </a:lnRef>
+          <a:fillRef idx="3">
+            <a:schemeClr val="accent1"/>
+          </a:fillRef>
+          <a:effectRef idx="2">
+            <a:schemeClr val="accent1"/>
+          </a:effectRef>
+          <a:fontRef idx="minor">
+            <a:schemeClr val="lt1"/>
+          </a:fontRef>
+        </p:style>
+        <p:txBody>
+          <a:bodyPr rtlCol="0" anchor="ctr"/>
+          <a:lstStyle/>
+          <a:p>
+            <a:pPr algn="ctr"/>
+          </a:p>
+        </p:txBody>
+      </p:sp>
+      <p:sp>
+        <p:nvSpPr>
+          <p:cNvPr id="20" name="TextBox 19"/>
+          <p:cNvSpPr txBox="1"/>
+          <p:nvPr/>
+        </p:nvSpPr>
+        <p:spPr>
+          <a:xfrm>
+            <a:off x="11332159" y="6400800"/>
+            <a:ext cx="310896" cy="274320"/>
+          </a:xfrm>
+          <a:prstGeom prst="rect">
+            <a:avLst/>
+          </a:prstGeom>
+          <a:noFill/>
+        </p:spPr>
+        <p:txBody>
+          <a:bodyPr wrap="square" anchor="ctr" lIns="54864" rIns="54864" tIns="0" bIns="0">
+            <a:spAutoFit/>
+          </a:bodyPr>
+          <a:lstStyle/>
+          <a:p>
+            <a:pPr algn="ctr">
+              <a:lnSpc>
+                <a:spcPct val="130000"/>
+              </a:lnSpc>
+              <a:defRPr sz="1000"/>
+            </a:pPr>
+            <a:r>
+              <a:rPr sz="1000" b="0" u="none">
+                <a:solidFill>
+                  <a:srgbClr val="6B7785"/>
+                </a:solidFill>
+                <a:latin typeface="Times New Roman"/>
+                <a:ea typeface="Noto Serif CJK SC"/>
+              </a:rPr>
+              <a:t>›</a:t>
+            </a:r>
+          </a:p>
+        </p:txBody>
+      </p:sp>
+      <p:sp>
+        <p:nvSpPr>
+          <p:cNvPr id="21" name="TextBox 20"/>
+          <p:cNvSpPr txBox="1"/>
+          <p:nvPr/>
+        </p:nvSpPr>
+        <p:spPr>
+          <a:xfrm>
+            <a:off x="548640" y="6382512"/>
+            <a:ext cx="7498079" cy="274320"/>
+          </a:xfrm>
+          <a:prstGeom prst="rect">
+            <a:avLst/>
+          </a:prstGeom>
+          <a:noFill/>
+        </p:spPr>
+        <p:txBody>
+          <a:bodyPr wrap="square" anchor="ctr" lIns="54864" rIns="54864" tIns="0" bIns="0">
             <a:spAutoFit/>
           </a:bodyPr>
           <a:lstStyle/>
@@ -9385,50 +8866,9 @@
                   <a:srgbClr val="8A94A6"/>
                 </a:solidFill>
                 <a:latin typeface="Times New Roman"/>
-                <a:ea typeface="Noto Sans CJK SC"/>
+                <a:ea typeface="Noto Serif CJK SC"/>
               </a:rPr>
               <a:t>胶州四中 · 14. 反应热 热化学方程式</a:t>
-            </a:r>
-          </a:p>
-        </p:txBody>
-      </p:sp>
-      <p:sp>
-        <p:nvSpPr>
-          <p:cNvPr id="24" name="TextBox 23"/>
-          <p:cNvSpPr txBox="1"/>
-          <p:nvPr/>
-        </p:nvSpPr>
-        <p:spPr>
-          <a:xfrm>
-            <a:off x="11048695" y="6345936"/>
-            <a:ext cx="685800" cy="274320"/>
-          </a:xfrm>
-          <a:prstGeom prst="rect">
-            <a:avLst/>
-          </a:prstGeom>
-          <a:noFill/>
-        </p:spPr>
-        <p:txBody>
-          <a:bodyPr wrap="square" anchor="t" lIns="54864" rIns="54864" tIns="0" bIns="0">
-            <a:spAutoFit/>
-          </a:bodyPr>
-          <a:lstStyle/>
-          <a:p>
-            <a:pPr algn="r">
-              <a:lnSpc>
-                <a:spcPct val="130000"/>
-              </a:lnSpc>
-              <a:defRPr sz="1000"/>
-            </a:pPr>
-            <a:r>
-              <a:rPr sz="1000" b="0" u="none">
-                <a:solidFill>
-                  <a:srgbClr val="8A94A6"/>
-                </a:solidFill>
-                <a:latin typeface="Times New Roman"/>
-                <a:ea typeface="Noto Sans CJK SC"/>
-              </a:rPr>
-              <a:t>7</a:t>
             </a:r>
           </a:p>
         </p:txBody>
@@ -9459,14 +8899,148 @@
         </p:nvSpPr>
         <p:spPr>
           <a:xfrm>
-            <a:off x="10607040" y="914400"/>
-            <a:ext cx="155448" cy="155448"/>
+            <a:off x="9281160" y="164592"/>
+            <a:ext cx="2651760" cy="2651760"/>
           </a:xfrm>
           <a:prstGeom prst="ellipse">
             <a:avLst/>
           </a:prstGeom>
+          <a:noFill/>
+          <a:ln w="13970">
+            <a:solidFill>
+              <a:srgbClr val="E8EDF2"/>
+            </a:solidFill>
+          </a:ln>
+          <a:effectLst/>
+        </p:spPr>
+        <p:style>
+          <a:lnRef idx="1">
+            <a:schemeClr val="accent1"/>
+          </a:lnRef>
+          <a:fillRef idx="3">
+            <a:schemeClr val="accent1"/>
+          </a:fillRef>
+          <a:effectRef idx="2">
+            <a:schemeClr val="accent1"/>
+          </a:effectRef>
+          <a:fontRef idx="minor">
+            <a:schemeClr val="lt1"/>
+          </a:fontRef>
+        </p:style>
+        <p:txBody>
+          <a:bodyPr rtlCol="0" anchor="ctr"/>
+          <a:lstStyle/>
+          <a:p>
+            <a:pPr algn="ctr"/>
+          </a:p>
+        </p:txBody>
+      </p:sp>
+      <p:sp>
+        <p:nvSpPr>
+          <p:cNvPr id="3" name="Oval 2"/>
+          <p:cNvSpPr/>
+          <p:nvPr/>
+        </p:nvSpPr>
+        <p:spPr>
+          <a:xfrm>
+            <a:off x="9646920" y="502920"/>
+            <a:ext cx="1920240" cy="1920240"/>
+          </a:xfrm>
+          <a:prstGeom prst="ellipse">
+            <a:avLst/>
+          </a:prstGeom>
+          <a:noFill/>
+          <a:ln w="13970">
+            <a:solidFill>
+              <a:srgbClr val="E8EDF2"/>
+            </a:solidFill>
+          </a:ln>
+          <a:effectLst/>
+        </p:spPr>
+        <p:style>
+          <a:lnRef idx="1">
+            <a:schemeClr val="accent1"/>
+          </a:lnRef>
+          <a:fillRef idx="3">
+            <a:schemeClr val="accent1"/>
+          </a:fillRef>
+          <a:effectRef idx="2">
+            <a:schemeClr val="accent1"/>
+          </a:effectRef>
+          <a:fontRef idx="minor">
+            <a:schemeClr val="lt1"/>
+          </a:fontRef>
+        </p:style>
+        <p:txBody>
+          <a:bodyPr rtlCol="0" anchor="ctr"/>
+          <a:lstStyle/>
+          <a:p>
+            <a:pPr algn="ctr"/>
+          </a:p>
+        </p:txBody>
+      </p:sp>
+      <p:sp>
+        <p:nvSpPr>
+          <p:cNvPr id="4" name="Oval 3"/>
+          <p:cNvSpPr/>
+          <p:nvPr/>
+        </p:nvSpPr>
+        <p:spPr>
+          <a:xfrm>
+            <a:off x="10012680" y="868680"/>
+            <a:ext cx="1188720" cy="1188720"/>
+          </a:xfrm>
+          <a:prstGeom prst="ellipse">
+            <a:avLst/>
+          </a:prstGeom>
+          <a:noFill/>
+          <a:ln w="13970">
+            <a:solidFill>
+              <a:srgbClr val="E8EDF2"/>
+            </a:solidFill>
+          </a:ln>
+          <a:effectLst/>
+        </p:spPr>
+        <p:style>
+          <a:lnRef idx="1">
+            <a:schemeClr val="accent1"/>
+          </a:lnRef>
+          <a:fillRef idx="3">
+            <a:schemeClr val="accent1"/>
+          </a:fillRef>
+          <a:effectRef idx="2">
+            <a:schemeClr val="accent1"/>
+          </a:effectRef>
+          <a:fontRef idx="minor">
+            <a:schemeClr val="lt1"/>
+          </a:fontRef>
+        </p:style>
+        <p:txBody>
+          <a:bodyPr rtlCol="0" anchor="ctr"/>
+          <a:lstStyle/>
+          <a:p>
+            <a:pPr algn="ctr"/>
+          </a:p>
+        </p:txBody>
+      </p:sp>
+      <p:sp>
+        <p:nvSpPr>
+          <p:cNvPr id="5" name="Rounded Rectangle 4"/>
+          <p:cNvSpPr/>
+          <p:nvPr/>
+        </p:nvSpPr>
+        <p:spPr>
+          <a:xfrm>
+            <a:off x="548640" y="347472"/>
+            <a:ext cx="1865376" cy="585216"/>
+          </a:xfrm>
+          <a:prstGeom prst="roundRect">
+            <a:avLst>
+              <a:gd name="adj" fmla="val 32000"/>
+            </a:avLst>
+          </a:prstGeom>
           <a:solidFill>
-            <a:srgbClr val="CBE7DF"/>
+            <a:srgbClr val="2E75B6"/>
           </a:solidFill>
           <a:ln>
             <a:noFill/>
@@ -9497,418 +9071,14 @@
       </p:sp>
       <p:sp>
         <p:nvSpPr>
-          <p:cNvPr id="3" name="Oval 2"/>
-          <p:cNvSpPr/>
-          <p:nvPr/>
-        </p:nvSpPr>
-        <p:spPr>
-          <a:xfrm>
-            <a:off x="11155680" y="1417320"/>
-            <a:ext cx="100584" cy="100584"/>
-          </a:xfrm>
-          <a:prstGeom prst="ellipse">
-            <a:avLst/>
-          </a:prstGeom>
-          <a:solidFill>
-            <a:srgbClr val="CBE7DF"/>
-          </a:solidFill>
-          <a:ln>
-            <a:noFill/>
-          </a:ln>
-          <a:effectLst/>
-        </p:spPr>
-        <p:style>
-          <a:lnRef idx="1">
-            <a:schemeClr val="accent1"/>
-          </a:lnRef>
-          <a:fillRef idx="3">
-            <a:schemeClr val="accent1"/>
-          </a:fillRef>
-          <a:effectRef idx="2">
-            <a:schemeClr val="accent1"/>
-          </a:effectRef>
-          <a:fontRef idx="minor">
-            <a:schemeClr val="lt1"/>
-          </a:fontRef>
-        </p:style>
-        <p:txBody>
-          <a:bodyPr rtlCol="0" anchor="ctr"/>
-          <a:lstStyle/>
-          <a:p>
-            <a:pPr algn="ctr"/>
-          </a:p>
-        </p:txBody>
-      </p:sp>
-      <p:sp>
-        <p:nvSpPr>
-          <p:cNvPr id="4" name="Oval 3"/>
-          <p:cNvSpPr/>
-          <p:nvPr/>
-        </p:nvSpPr>
-        <p:spPr>
-          <a:xfrm>
-            <a:off x="10744200" y="1965960"/>
-            <a:ext cx="155448" cy="155448"/>
-          </a:xfrm>
-          <a:prstGeom prst="ellipse">
-            <a:avLst/>
-          </a:prstGeom>
-          <a:solidFill>
-            <a:srgbClr val="CBE7DF"/>
-          </a:solidFill>
-          <a:ln>
-            <a:noFill/>
-          </a:ln>
-          <a:effectLst/>
-        </p:spPr>
-        <p:style>
-          <a:lnRef idx="1">
-            <a:schemeClr val="accent1"/>
-          </a:lnRef>
-          <a:fillRef idx="3">
-            <a:schemeClr val="accent1"/>
-          </a:fillRef>
-          <a:effectRef idx="2">
-            <a:schemeClr val="accent1"/>
-          </a:effectRef>
-          <a:fontRef idx="minor">
-            <a:schemeClr val="lt1"/>
-          </a:fontRef>
-        </p:style>
-        <p:txBody>
-          <a:bodyPr rtlCol="0" anchor="ctr"/>
-          <a:lstStyle/>
-          <a:p>
-            <a:pPr algn="ctr"/>
-          </a:p>
-        </p:txBody>
-      </p:sp>
-      <p:sp>
-        <p:nvSpPr>
-          <p:cNvPr id="5" name="Oval 4"/>
-          <p:cNvSpPr/>
-          <p:nvPr/>
-        </p:nvSpPr>
-        <p:spPr>
-          <a:xfrm>
-            <a:off x="11292840" y="2331720"/>
-            <a:ext cx="100584" cy="100584"/>
-          </a:xfrm>
-          <a:prstGeom prst="ellipse">
-            <a:avLst/>
-          </a:prstGeom>
-          <a:solidFill>
-            <a:srgbClr val="CBE7DF"/>
-          </a:solidFill>
-          <a:ln>
-            <a:noFill/>
-          </a:ln>
-          <a:effectLst/>
-        </p:spPr>
-        <p:style>
-          <a:lnRef idx="1">
-            <a:schemeClr val="accent1"/>
-          </a:lnRef>
-          <a:fillRef idx="3">
-            <a:schemeClr val="accent1"/>
-          </a:fillRef>
-          <a:effectRef idx="2">
-            <a:schemeClr val="accent1"/>
-          </a:effectRef>
-          <a:fontRef idx="minor">
-            <a:schemeClr val="lt1"/>
-          </a:fontRef>
-        </p:style>
-        <p:txBody>
-          <a:bodyPr rtlCol="0" anchor="ctr"/>
-          <a:lstStyle/>
-          <a:p>
-            <a:pPr algn="ctr"/>
-          </a:p>
-        </p:txBody>
-      </p:sp>
-      <p:sp>
-        <p:nvSpPr>
-          <p:cNvPr id="6" name="Oval 5"/>
-          <p:cNvSpPr/>
-          <p:nvPr/>
-        </p:nvSpPr>
-        <p:spPr>
-          <a:xfrm>
-            <a:off x="10378440" y="1691640"/>
-            <a:ext cx="155448" cy="155448"/>
-          </a:xfrm>
-          <a:prstGeom prst="ellipse">
-            <a:avLst/>
-          </a:prstGeom>
-          <a:solidFill>
-            <a:srgbClr val="CBE7DF"/>
-          </a:solidFill>
-          <a:ln>
-            <a:noFill/>
-          </a:ln>
-          <a:effectLst/>
-        </p:spPr>
-        <p:style>
-          <a:lnRef idx="1">
-            <a:schemeClr val="accent1"/>
-          </a:lnRef>
-          <a:fillRef idx="3">
-            <a:schemeClr val="accent1"/>
-          </a:fillRef>
-          <a:effectRef idx="2">
-            <a:schemeClr val="accent1"/>
-          </a:effectRef>
-          <a:fontRef idx="minor">
-            <a:schemeClr val="lt1"/>
-          </a:fontRef>
-        </p:style>
-        <p:txBody>
-          <a:bodyPr rtlCol="0" anchor="ctr"/>
-          <a:lstStyle/>
-          <a:p>
-            <a:pPr algn="ctr"/>
-          </a:p>
-        </p:txBody>
-      </p:sp>
-      <p:cxnSp>
-        <p:nvCxnSpPr>
-          <p:cNvPr id="7" name="Connector 6"/>
-          <p:cNvCxnSpPr/>
-          <p:nvPr/>
-        </p:nvCxnSpPr>
-        <p:spPr>
-          <a:xfrm>
-            <a:off x="10689336" y="996696"/>
-            <a:ext cx="548640" cy="502920"/>
-          </a:xfrm>
-          <a:prstGeom prst="line">
-            <a:avLst/>
-          </a:prstGeom>
-          <a:ln w="12700">
-            <a:solidFill>
-              <a:srgbClr val="D7EAE4"/>
-            </a:solidFill>
-          </a:ln>
-        </p:spPr>
-        <p:style>
-          <a:lnRef idx="2">
-            <a:schemeClr val="accent1"/>
-          </a:lnRef>
-          <a:fillRef idx="0">
-            <a:schemeClr val="accent1"/>
-          </a:fillRef>
-          <a:effectRef idx="1">
-            <a:schemeClr val="accent1"/>
-          </a:effectRef>
-          <a:fontRef idx="minor">
-            <a:schemeClr val="tx1"/>
-          </a:fontRef>
-        </p:style>
-      </p:cxnSp>
-      <p:cxnSp>
-        <p:nvCxnSpPr>
-          <p:cNvPr id="8" name="Connector 7"/>
-          <p:cNvCxnSpPr/>
-          <p:nvPr/>
-        </p:nvCxnSpPr>
-        <p:spPr>
-          <a:xfrm flipH="1">
-            <a:off x="10826496" y="1499616"/>
-            <a:ext cx="411480" cy="548639"/>
-          </a:xfrm>
-          <a:prstGeom prst="line">
-            <a:avLst/>
-          </a:prstGeom>
-          <a:ln w="12700">
-            <a:solidFill>
-              <a:srgbClr val="D7EAE4"/>
-            </a:solidFill>
-          </a:ln>
-        </p:spPr>
-        <p:style>
-          <a:lnRef idx="2">
-            <a:schemeClr val="accent1"/>
-          </a:lnRef>
-          <a:fillRef idx="0">
-            <a:schemeClr val="accent1"/>
-          </a:fillRef>
-          <a:effectRef idx="1">
-            <a:schemeClr val="accent1"/>
-          </a:effectRef>
-          <a:fontRef idx="minor">
-            <a:schemeClr val="tx1"/>
-          </a:fontRef>
-        </p:style>
-      </p:cxnSp>
-      <p:cxnSp>
-        <p:nvCxnSpPr>
-          <p:cNvPr id="9" name="Connector 8"/>
-          <p:cNvCxnSpPr/>
-          <p:nvPr/>
-        </p:nvCxnSpPr>
-        <p:spPr>
-          <a:xfrm>
-            <a:off x="10826496" y="2048255"/>
-            <a:ext cx="548640" cy="365760"/>
-          </a:xfrm>
-          <a:prstGeom prst="line">
-            <a:avLst/>
-          </a:prstGeom>
-          <a:ln w="12700">
-            <a:solidFill>
-              <a:srgbClr val="D7EAE4"/>
-            </a:solidFill>
-          </a:ln>
-        </p:spPr>
-        <p:style>
-          <a:lnRef idx="2">
-            <a:schemeClr val="accent1"/>
-          </a:lnRef>
-          <a:fillRef idx="0">
-            <a:schemeClr val="accent1"/>
-          </a:fillRef>
-          <a:effectRef idx="1">
-            <a:schemeClr val="accent1"/>
-          </a:effectRef>
-          <a:fontRef idx="minor">
-            <a:schemeClr val="tx1"/>
-          </a:fontRef>
-        </p:style>
-      </p:cxnSp>
-      <p:cxnSp>
-        <p:nvCxnSpPr>
-          <p:cNvPr id="10" name="Connector 9"/>
-          <p:cNvCxnSpPr/>
-          <p:nvPr/>
-        </p:nvCxnSpPr>
-        <p:spPr>
-          <a:xfrm flipH="1" flipV="1">
-            <a:off x="10460736" y="1773936"/>
-            <a:ext cx="914400" cy="640079"/>
-          </a:xfrm>
-          <a:prstGeom prst="line">
-            <a:avLst/>
-          </a:prstGeom>
-          <a:ln w="12700">
-            <a:solidFill>
-              <a:srgbClr val="D7EAE4"/>
-            </a:solidFill>
-          </a:ln>
-        </p:spPr>
-        <p:style>
-          <a:lnRef idx="2">
-            <a:schemeClr val="accent1"/>
-          </a:lnRef>
-          <a:fillRef idx="0">
-            <a:schemeClr val="accent1"/>
-          </a:fillRef>
-          <a:effectRef idx="1">
-            <a:schemeClr val="accent1"/>
-          </a:effectRef>
-          <a:fontRef idx="minor">
-            <a:schemeClr val="tx1"/>
-          </a:fontRef>
-        </p:style>
-      </p:cxnSp>
-      <p:sp>
-        <p:nvSpPr>
-          <p:cNvPr id="11" name="Rectangle 10"/>
-          <p:cNvSpPr/>
-          <p:nvPr/>
-        </p:nvSpPr>
-        <p:spPr>
-          <a:xfrm>
-            <a:off x="0" y="0"/>
-            <a:ext cx="12191695" cy="786384"/>
-          </a:xfrm>
-          <a:prstGeom prst="rect">
-            <a:avLst/>
-          </a:prstGeom>
-          <a:solidFill>
-            <a:srgbClr val="0E4F45"/>
-          </a:solidFill>
-          <a:ln>
-            <a:noFill/>
-          </a:ln>
-          <a:effectLst/>
-        </p:spPr>
-        <p:style>
-          <a:lnRef idx="1">
-            <a:schemeClr val="accent1"/>
-          </a:lnRef>
-          <a:fillRef idx="3">
-            <a:schemeClr val="accent1"/>
-          </a:fillRef>
-          <a:effectRef idx="2">
-            <a:schemeClr val="accent1"/>
-          </a:effectRef>
-          <a:fontRef idx="minor">
-            <a:schemeClr val="lt1"/>
-          </a:fontRef>
-        </p:style>
-        <p:txBody>
-          <a:bodyPr rtlCol="0" anchor="ctr"/>
-          <a:lstStyle/>
-          <a:p>
-            <a:pPr algn="ctr"/>
-          </a:p>
-        </p:txBody>
-      </p:sp>
-      <p:sp>
-        <p:nvSpPr>
-          <p:cNvPr id="12" name="Rectangle 11"/>
-          <p:cNvSpPr/>
-          <p:nvPr/>
-        </p:nvSpPr>
-        <p:spPr>
-          <a:xfrm>
-            <a:off x="0" y="786384"/>
-            <a:ext cx="12191695" cy="36576"/>
-          </a:xfrm>
-          <a:prstGeom prst="rect">
-            <a:avLst/>
-          </a:prstGeom>
-          <a:solidFill>
-            <a:srgbClr val="E8710A"/>
-          </a:solidFill>
-          <a:ln>
-            <a:noFill/>
-          </a:ln>
-          <a:effectLst/>
-        </p:spPr>
-        <p:style>
-          <a:lnRef idx="1">
-            <a:schemeClr val="accent1"/>
-          </a:lnRef>
-          <a:fillRef idx="3">
-            <a:schemeClr val="accent1"/>
-          </a:fillRef>
-          <a:effectRef idx="2">
-            <a:schemeClr val="accent1"/>
-          </a:effectRef>
-          <a:fontRef idx="minor">
-            <a:schemeClr val="lt1"/>
-          </a:fontRef>
-        </p:style>
-        <p:txBody>
-          <a:bodyPr rtlCol="0" anchor="ctr"/>
-          <a:lstStyle/>
-          <a:p>
-            <a:pPr algn="ctr"/>
-          </a:p>
-        </p:txBody>
-      </p:sp>
-      <p:sp>
-        <p:nvSpPr>
-          <p:cNvPr id="13" name="TextBox 12"/>
+          <p:cNvPr id="6" name="TextBox 5"/>
           <p:cNvSpPr txBox="1"/>
           <p:nvPr/>
         </p:nvSpPr>
         <p:spPr>
           <a:xfrm>
-            <a:off x="548640" y="128016"/>
-            <a:ext cx="8442656" cy="530352"/>
+            <a:off x="548640" y="365760"/>
+            <a:ext cx="1865376" cy="548640"/>
           </a:xfrm>
           <a:prstGeom prst="rect">
             <a:avLst/>
@@ -9921,19 +9091,19 @@
           </a:bodyPr>
           <a:lstStyle/>
           <a:p>
-            <a:pPr algn="l">
+            <a:pPr algn="ctr">
               <a:lnSpc>
                 <a:spcPct val="130000"/>
               </a:lnSpc>
-              <a:defRPr sz="2800"/>
+              <a:defRPr sz="2300"/>
             </a:pPr>
             <a:r>
-              <a:rPr sz="2800" b="1" u="none">
+              <a:rPr sz="2300" b="1" u="none">
                 <a:solidFill>
                   <a:srgbClr val="FFFFFF"/>
                 </a:solidFill>
                 <a:latin typeface="Times New Roman"/>
-                <a:ea typeface="Noto Sans CJK SC"/>
+                <a:ea typeface="Noto Serif CJK SC"/>
               </a:rPr>
               <a:t>精练真题</a:t>
             </a:r>
@@ -9942,7 +9112,7 @@
       </p:sp>
       <p:sp>
         <p:nvSpPr>
-          <p:cNvPr id="14" name="TextBox 13"/>
+          <p:cNvPr id="7" name="TextBox 6"/>
           <p:cNvSpPr txBox="1"/>
           <p:nvPr/>
         </p:nvSpPr>
@@ -9971,10 +9141,10 @@
             <a:r>
               <a:rPr sz="2400" b="0" u="none">
                 <a:solidFill>
-                  <a:srgbClr val="122A26"/>
+                  <a:srgbClr val="1C2B3A"/>
                 </a:solidFill>
                 <a:latin typeface="Times New Roman"/>
-                <a:ea typeface="Noto Sans CJK SC"/>
+                <a:ea typeface="Noto Serif CJK SC"/>
               </a:rPr>
               <a:t>1. （2025·山东卷）已知：H₂(g) + ½O₂(g) = H₂O(g)　ΔH₁ = −241.8 kJ·mol⁻¹；H₂O(g) = H₂O(l)　ΔH₂ = −44.0 kJ·mol⁻¹，则 H₂ 的燃烧热为（　　）</a:t>
             </a:r>
@@ -9991,20 +9161,20 @@
             <a:r>
               <a:rPr sz="2400" b="0" u="none">
                 <a:solidFill>
-                  <a:srgbClr val="E8710A"/>
+                  <a:srgbClr val="2E75B6"/>
                 </a:solidFill>
                 <a:latin typeface="Times New Roman"/>
-                <a:ea typeface="Noto Sans CJK SC"/>
+                <a:ea typeface="Noto Serif CJK SC"/>
               </a:rPr>
               <a:t>▪ </a:t>
             </a:r>
             <a:r>
               <a:rPr sz="2400" b="0" u="none">
                 <a:solidFill>
-                  <a:srgbClr val="122A26"/>
+                  <a:srgbClr val="1C2B3A"/>
                 </a:solidFill>
                 <a:latin typeface="Times New Roman"/>
-                <a:ea typeface="Noto Sans CJK SC"/>
+                <a:ea typeface="Noto Serif CJK SC"/>
               </a:rPr>
               <a:t>A. 241.8 kJ·mol⁻¹　B. 285.8 kJ·mol⁻¹　C. 197.8 kJ·mol⁻¹　D. 44.0 kJ·mol⁻¹</a:t>
             </a:r>
@@ -10013,20 +9183,22 @@
       </p:sp>
       <p:sp>
         <p:nvSpPr>
-          <p:cNvPr id="15" name="Rectangle 14"/>
+          <p:cNvPr id="8" name="Rounded Rectangle 7"/>
           <p:cNvSpPr/>
           <p:nvPr/>
         </p:nvSpPr>
         <p:spPr>
           <a:xfrm>
-            <a:off x="0" y="6739128"/>
-            <a:ext cx="12191695" cy="118872"/>
-          </a:xfrm>
-          <a:prstGeom prst="rect">
-            <a:avLst/>
+            <a:off x="10600639" y="6382512"/>
+            <a:ext cx="310896" cy="292608"/>
+          </a:xfrm>
+          <a:prstGeom prst="roundRect">
+            <a:avLst>
+              <a:gd name="adj" fmla="val 18000"/>
+            </a:avLst>
           </a:prstGeom>
           <a:solidFill>
-            <a:srgbClr val="E8710A"/>
+            <a:srgbClr val="E4E9F0"/>
           </a:solidFill>
           <a:ln>
             <a:noFill/>
@@ -10057,14 +9229,14 @@
       </p:sp>
       <p:sp>
         <p:nvSpPr>
-          <p:cNvPr id="16" name="TextBox 15"/>
+          <p:cNvPr id="9" name="TextBox 8"/>
           <p:cNvSpPr txBox="1"/>
           <p:nvPr/>
         </p:nvSpPr>
         <p:spPr>
           <a:xfrm>
-            <a:off x="548640" y="6345936"/>
-            <a:ext cx="8595360" cy="274320"/>
+            <a:off x="10600639" y="6400800"/>
+            <a:ext cx="310896" cy="274320"/>
           </a:xfrm>
           <a:prstGeom prst="rect">
             <a:avLst/>
@@ -10072,7 +9244,222 @@
           <a:noFill/>
         </p:spPr>
         <p:txBody>
-          <a:bodyPr wrap="square" anchor="t" lIns="54864" rIns="54864" tIns="0" bIns="0">
+          <a:bodyPr wrap="square" anchor="ctr" lIns="54864" rIns="54864" tIns="0" bIns="0">
+            <a:spAutoFit/>
+          </a:bodyPr>
+          <a:lstStyle/>
+          <a:p>
+            <a:pPr algn="ctr">
+              <a:lnSpc>
+                <a:spcPct val="130000"/>
+              </a:lnSpc>
+              <a:defRPr sz="1000"/>
+            </a:pPr>
+            <a:r>
+              <a:rPr sz="1000" b="0" u="none">
+                <a:solidFill>
+                  <a:srgbClr val="6B7785"/>
+                </a:solidFill>
+                <a:latin typeface="Times New Roman"/>
+                <a:ea typeface="Noto Serif CJK SC"/>
+              </a:rPr>
+              <a:t>‹</a:t>
+            </a:r>
+          </a:p>
+        </p:txBody>
+      </p:sp>
+      <p:sp>
+        <p:nvSpPr>
+          <p:cNvPr id="10" name="Rounded Rectangle 9"/>
+          <p:cNvSpPr/>
+          <p:nvPr/>
+        </p:nvSpPr>
+        <p:spPr>
+          <a:xfrm>
+            <a:off x="10966399" y="6382512"/>
+            <a:ext cx="310896" cy="292608"/>
+          </a:xfrm>
+          <a:prstGeom prst="roundRect">
+            <a:avLst>
+              <a:gd name="adj" fmla="val 18000"/>
+            </a:avLst>
+          </a:prstGeom>
+          <a:solidFill>
+            <a:srgbClr val="2E75B6"/>
+          </a:solidFill>
+          <a:ln>
+            <a:noFill/>
+          </a:ln>
+          <a:effectLst/>
+        </p:spPr>
+        <p:style>
+          <a:lnRef idx="1">
+            <a:schemeClr val="accent1"/>
+          </a:lnRef>
+          <a:fillRef idx="3">
+            <a:schemeClr val="accent1"/>
+          </a:fillRef>
+          <a:effectRef idx="2">
+            <a:schemeClr val="accent1"/>
+          </a:effectRef>
+          <a:fontRef idx="minor">
+            <a:schemeClr val="lt1"/>
+          </a:fontRef>
+        </p:style>
+        <p:txBody>
+          <a:bodyPr rtlCol="0" anchor="ctr"/>
+          <a:lstStyle/>
+          <a:p>
+            <a:pPr algn="ctr"/>
+          </a:p>
+        </p:txBody>
+      </p:sp>
+      <p:sp>
+        <p:nvSpPr>
+          <p:cNvPr id="11" name="TextBox 10"/>
+          <p:cNvSpPr txBox="1"/>
+          <p:nvPr/>
+        </p:nvSpPr>
+        <p:spPr>
+          <a:xfrm>
+            <a:off x="10966399" y="6400800"/>
+            <a:ext cx="310896" cy="274320"/>
+          </a:xfrm>
+          <a:prstGeom prst="rect">
+            <a:avLst/>
+          </a:prstGeom>
+          <a:noFill/>
+        </p:spPr>
+        <p:txBody>
+          <a:bodyPr wrap="square" anchor="ctr" lIns="54864" rIns="54864" tIns="0" bIns="0">
+            <a:spAutoFit/>
+          </a:bodyPr>
+          <a:lstStyle/>
+          <a:p>
+            <a:pPr algn="ctr">
+              <a:lnSpc>
+                <a:spcPct val="130000"/>
+              </a:lnSpc>
+              <a:defRPr sz="1000"/>
+            </a:pPr>
+            <a:r>
+              <a:rPr sz="1000" b="1" u="none">
+                <a:solidFill>
+                  <a:srgbClr val="FFFFFF"/>
+                </a:solidFill>
+                <a:latin typeface="Times New Roman"/>
+                <a:ea typeface="Noto Serif CJK SC"/>
+              </a:rPr>
+              <a:t>8</a:t>
+            </a:r>
+          </a:p>
+        </p:txBody>
+      </p:sp>
+      <p:sp>
+        <p:nvSpPr>
+          <p:cNvPr id="12" name="Rounded Rectangle 11"/>
+          <p:cNvSpPr/>
+          <p:nvPr/>
+        </p:nvSpPr>
+        <p:spPr>
+          <a:xfrm>
+            <a:off x="11332159" y="6382512"/>
+            <a:ext cx="310896" cy="292608"/>
+          </a:xfrm>
+          <a:prstGeom prst="roundRect">
+            <a:avLst>
+              <a:gd name="adj" fmla="val 18000"/>
+            </a:avLst>
+          </a:prstGeom>
+          <a:solidFill>
+            <a:srgbClr val="E4E9F0"/>
+          </a:solidFill>
+          <a:ln>
+            <a:noFill/>
+          </a:ln>
+          <a:effectLst/>
+        </p:spPr>
+        <p:style>
+          <a:lnRef idx="1">
+            <a:schemeClr val="accent1"/>
+          </a:lnRef>
+          <a:fillRef idx="3">
+            <a:schemeClr val="accent1"/>
+          </a:fillRef>
+          <a:effectRef idx="2">
+            <a:schemeClr val="accent1"/>
+          </a:effectRef>
+          <a:fontRef idx="minor">
+            <a:schemeClr val="lt1"/>
+          </a:fontRef>
+        </p:style>
+        <p:txBody>
+          <a:bodyPr rtlCol="0" anchor="ctr"/>
+          <a:lstStyle/>
+          <a:p>
+            <a:pPr algn="ctr"/>
+          </a:p>
+        </p:txBody>
+      </p:sp>
+      <p:sp>
+        <p:nvSpPr>
+          <p:cNvPr id="13" name="TextBox 12"/>
+          <p:cNvSpPr txBox="1"/>
+          <p:nvPr/>
+        </p:nvSpPr>
+        <p:spPr>
+          <a:xfrm>
+            <a:off x="11332159" y="6400800"/>
+            <a:ext cx="310896" cy="274320"/>
+          </a:xfrm>
+          <a:prstGeom prst="rect">
+            <a:avLst/>
+          </a:prstGeom>
+          <a:noFill/>
+        </p:spPr>
+        <p:txBody>
+          <a:bodyPr wrap="square" anchor="ctr" lIns="54864" rIns="54864" tIns="0" bIns="0">
+            <a:spAutoFit/>
+          </a:bodyPr>
+          <a:lstStyle/>
+          <a:p>
+            <a:pPr algn="ctr">
+              <a:lnSpc>
+                <a:spcPct val="130000"/>
+              </a:lnSpc>
+              <a:defRPr sz="1000"/>
+            </a:pPr>
+            <a:r>
+              <a:rPr sz="1000" b="0" u="none">
+                <a:solidFill>
+                  <a:srgbClr val="6B7785"/>
+                </a:solidFill>
+                <a:latin typeface="Times New Roman"/>
+                <a:ea typeface="Noto Serif CJK SC"/>
+              </a:rPr>
+              <a:t>›</a:t>
+            </a:r>
+          </a:p>
+        </p:txBody>
+      </p:sp>
+      <p:sp>
+        <p:nvSpPr>
+          <p:cNvPr id="14" name="TextBox 13"/>
+          <p:cNvSpPr txBox="1"/>
+          <p:nvPr/>
+        </p:nvSpPr>
+        <p:spPr>
+          <a:xfrm>
+            <a:off x="548640" y="6382512"/>
+            <a:ext cx="7498079" cy="274320"/>
+          </a:xfrm>
+          <a:prstGeom prst="rect">
+            <a:avLst/>
+          </a:prstGeom>
+          <a:noFill/>
+        </p:spPr>
+        <p:txBody>
+          <a:bodyPr wrap="square" anchor="ctr" lIns="54864" rIns="54864" tIns="0" bIns="0">
             <a:spAutoFit/>
           </a:bodyPr>
           <a:lstStyle/>
@@ -10089,50 +9476,9 @@
                   <a:srgbClr val="8A94A6"/>
                 </a:solidFill>
                 <a:latin typeface="Times New Roman"/>
-                <a:ea typeface="Noto Sans CJK SC"/>
+                <a:ea typeface="Noto Serif CJK SC"/>
               </a:rPr>
               <a:t>胶州四中 · 14. 反应热 热化学方程式</a:t>
-            </a:r>
-          </a:p>
-        </p:txBody>
-      </p:sp>
-      <p:sp>
-        <p:nvSpPr>
-          <p:cNvPr id="17" name="TextBox 16"/>
-          <p:cNvSpPr txBox="1"/>
-          <p:nvPr/>
-        </p:nvSpPr>
-        <p:spPr>
-          <a:xfrm>
-            <a:off x="11048695" y="6345936"/>
-            <a:ext cx="685800" cy="274320"/>
-          </a:xfrm>
-          <a:prstGeom prst="rect">
-            <a:avLst/>
-          </a:prstGeom>
-          <a:noFill/>
-        </p:spPr>
-        <p:txBody>
-          <a:bodyPr wrap="square" anchor="t" lIns="54864" rIns="54864" tIns="0" bIns="0">
-            <a:spAutoFit/>
-          </a:bodyPr>
-          <a:lstStyle/>
-          <a:p>
-            <a:pPr algn="r">
-              <a:lnSpc>
-                <a:spcPct val="130000"/>
-              </a:lnSpc>
-              <a:defRPr sz="1000"/>
-            </a:pPr>
-            <a:r>
-              <a:rPr sz="1000" b="0" u="none">
-                <a:solidFill>
-                  <a:srgbClr val="8A94A6"/>
-                </a:solidFill>
-                <a:latin typeface="Times New Roman"/>
-                <a:ea typeface="Noto Sans CJK SC"/>
-              </a:rPr>
-              <a:t>8</a:t>
             </a:r>
           </a:p>
         </p:txBody>
@@ -10170,7 +9516,7 @@
             <a:avLst/>
           </a:prstGeom>
           <a:solidFill>
-            <a:srgbClr val="0E4F45"/>
+            <a:srgbClr val="1F4E79"/>
           </a:solidFill>
           <a:ln>
             <a:noFill/>
@@ -10214,7 +9560,7 @@
             <a:avLst/>
           </a:prstGeom>
           <a:solidFill>
-            <a:srgbClr val="E8710A"/>
+            <a:srgbClr val="2E75B6"/>
           </a:solidFill>
           <a:ln>
             <a:noFill/>
@@ -10274,10 +9620,10 @@
             <a:r>
               <a:rPr sz="9200" b="1" u="none">
                 <a:solidFill>
-                  <a:srgbClr val="E8710A"/>
+                  <a:srgbClr val="2E75B6"/>
                 </a:solidFill>
                 <a:latin typeface="Times New Roman"/>
-                <a:ea typeface="Noto Sans CJK SC"/>
+                <a:ea typeface="Noto Serif CJK SC"/>
               </a:rPr>
               <a:t>05</a:t>
             </a:r>
@@ -10318,7 +9664,7 @@
                   <a:srgbClr val="FFFFFF"/>
                 </a:solidFill>
                 <a:latin typeface="Times New Roman"/>
-                <a:ea typeface="Noto Sans CJK SC"/>
+                <a:ea typeface="Noto Serif CJK SC"/>
               </a:rPr>
               <a:t>参考答案</a:t>
             </a:r>
